--- a/Review2_Submission/R2_BATCH_MCA_9224116032_Deepak_Kumar_Abstract_Source.pptx
+++ b/Review2_Submission/R2_BATCH_MCA_9224116032_Deepak_Kumar_Abstract_Source.pptx
@@ -130,7 +130,7 @@
           <p:cNvPr id="2" name="Title 1">
             <a:extLst>
               <a:ext uri="{FF2B5EF4-FFF2-40B4-BE49-F238E27FC236}">
-                <a16:creationId xmlns:a16="http://schemas.microsoft.com/office/drawing/2014/main" id="{11D77DDA-AFA7-D239-1B44-5E8FF82880B6}"/>
+                <a16:creationId xmlns:a16="http://schemas.microsoft.com/office/drawing/2014/main" id="{A1F6E44D-D17A-E32F-802E-1981B3348574}"/>
               </a:ext>
             </a:extLst>
           </p:cNvPr>
@@ -167,7 +167,7 @@
           <p:cNvPr id="3" name="Subtitle 2">
             <a:extLst>
               <a:ext uri="{FF2B5EF4-FFF2-40B4-BE49-F238E27FC236}">
-                <a16:creationId xmlns:a16="http://schemas.microsoft.com/office/drawing/2014/main" id="{AD846167-E202-0744-19AA-9E78ABA7238B}"/>
+                <a16:creationId xmlns:a16="http://schemas.microsoft.com/office/drawing/2014/main" id="{5E49F327-32FE-3943-287A-7CB7C0362E27}"/>
               </a:ext>
             </a:extLst>
           </p:cNvPr>
@@ -237,7 +237,7 @@
           <p:cNvPr id="4" name="Date Placeholder 3">
             <a:extLst>
               <a:ext uri="{FF2B5EF4-FFF2-40B4-BE49-F238E27FC236}">
-                <a16:creationId xmlns:a16="http://schemas.microsoft.com/office/drawing/2014/main" id="{815B9222-2E48-72B1-0CB8-838D2BDF2DDB}"/>
+                <a16:creationId xmlns:a16="http://schemas.microsoft.com/office/drawing/2014/main" id="{1006FDD6-6C20-9B65-B83C-49455822DE67}"/>
               </a:ext>
             </a:extLst>
           </p:cNvPr>
@@ -253,7 +253,7 @@
           <a:bodyPr/>
           <a:lstStyle/>
           <a:p>
-            <a:fld id="{130DF622-6113-4AB8-94CD-EF291E0695AC}" type="datetimeFigureOut">
+            <a:fld id="{BA23750E-CB54-4FEB-ADEA-7E26C796855B}" type="datetimeFigureOut">
               <a:rPr lang="en-US" smtClean="0"/>
               <a:t>10/19/2026</a:t>
             </a:fld>
@@ -266,7 +266,7 @@
           <p:cNvPr id="5" name="Footer Placeholder 4">
             <a:extLst>
               <a:ext uri="{FF2B5EF4-FFF2-40B4-BE49-F238E27FC236}">
-                <a16:creationId xmlns:a16="http://schemas.microsoft.com/office/drawing/2014/main" id="{1BE68291-222B-2A4E-249D-E2A5E3107C57}"/>
+                <a16:creationId xmlns:a16="http://schemas.microsoft.com/office/drawing/2014/main" id="{988A1D53-42D4-7112-B067-A7751A2B4B03}"/>
               </a:ext>
             </a:extLst>
           </p:cNvPr>
@@ -291,7 +291,7 @@
           <p:cNvPr id="6" name="Slide Number Placeholder 5">
             <a:extLst>
               <a:ext uri="{FF2B5EF4-FFF2-40B4-BE49-F238E27FC236}">
-                <a16:creationId xmlns:a16="http://schemas.microsoft.com/office/drawing/2014/main" id="{78697BF6-706E-4592-17C3-FCFB639795E7}"/>
+                <a16:creationId xmlns:a16="http://schemas.microsoft.com/office/drawing/2014/main" id="{1FF9226C-0FC6-0D00-C170-9C1696A7447E}"/>
               </a:ext>
             </a:extLst>
           </p:cNvPr>
@@ -307,7 +307,7 @@
           <a:bodyPr/>
           <a:lstStyle/>
           <a:p>
-            <a:fld id="{89F55FFA-8360-4277-90EA-C17DC0B65CCD}" type="slidenum">
+            <a:fld id="{4D499B8D-3E85-4778-BF3B-206B51009B45}" type="slidenum">
               <a:rPr lang="en-US" smtClean="0"/>
               <a:t>‹#›</a:t>
             </a:fld>
@@ -318,7 +318,7 @@
     </p:spTree>
     <p:extLst>
       <p:ext uri="{BB962C8B-B14F-4D97-AF65-F5344CB8AC3E}">
-        <p14:creationId xmlns:p14="http://schemas.microsoft.com/office/powerpoint/2010/main" val="406083518"/>
+        <p14:creationId xmlns:p14="http://schemas.microsoft.com/office/powerpoint/2010/main" val="3580843696"/>
       </p:ext>
     </p:extLst>
   </p:cSld>
@@ -350,7 +350,7 @@
           <p:cNvPr id="2" name="Title 1">
             <a:extLst>
               <a:ext uri="{FF2B5EF4-FFF2-40B4-BE49-F238E27FC236}">
-                <a16:creationId xmlns:a16="http://schemas.microsoft.com/office/drawing/2014/main" id="{808A0DCB-0CAC-3E48-85DD-A0C2A815AEFE}"/>
+                <a16:creationId xmlns:a16="http://schemas.microsoft.com/office/drawing/2014/main" id="{414B8AF5-CD03-FF0B-5E32-F577E2A1D8A8}"/>
               </a:ext>
             </a:extLst>
           </p:cNvPr>
@@ -378,7 +378,7 @@
           <p:cNvPr id="3" name="Vertical Text Placeholder 2">
             <a:extLst>
               <a:ext uri="{FF2B5EF4-FFF2-40B4-BE49-F238E27FC236}">
-                <a16:creationId xmlns:a16="http://schemas.microsoft.com/office/drawing/2014/main" id="{AA0CB0ED-905E-0FE4-5DB6-4CF0002477F9}"/>
+                <a16:creationId xmlns:a16="http://schemas.microsoft.com/office/drawing/2014/main" id="{22D7B6ED-76B9-BCCD-1C21-01174FEF6CFA}"/>
               </a:ext>
             </a:extLst>
           </p:cNvPr>
@@ -435,7 +435,7 @@
           <p:cNvPr id="4" name="Date Placeholder 3">
             <a:extLst>
               <a:ext uri="{FF2B5EF4-FFF2-40B4-BE49-F238E27FC236}">
-                <a16:creationId xmlns:a16="http://schemas.microsoft.com/office/drawing/2014/main" id="{D110B231-22DB-1DB8-9A63-9CCB593AC254}"/>
+                <a16:creationId xmlns:a16="http://schemas.microsoft.com/office/drawing/2014/main" id="{E4617FFE-9662-6860-40B9-B0D73ADA15C8}"/>
               </a:ext>
             </a:extLst>
           </p:cNvPr>
@@ -451,7 +451,7 @@
           <a:bodyPr/>
           <a:lstStyle/>
           <a:p>
-            <a:fld id="{130DF622-6113-4AB8-94CD-EF291E0695AC}" type="datetimeFigureOut">
+            <a:fld id="{BA23750E-CB54-4FEB-ADEA-7E26C796855B}" type="datetimeFigureOut">
               <a:rPr lang="en-US" smtClean="0"/>
               <a:t>10/19/2026</a:t>
             </a:fld>
@@ -464,7 +464,7 @@
           <p:cNvPr id="5" name="Footer Placeholder 4">
             <a:extLst>
               <a:ext uri="{FF2B5EF4-FFF2-40B4-BE49-F238E27FC236}">
-                <a16:creationId xmlns:a16="http://schemas.microsoft.com/office/drawing/2014/main" id="{D5517BE4-5122-8CE5-D629-1B8A795AA345}"/>
+                <a16:creationId xmlns:a16="http://schemas.microsoft.com/office/drawing/2014/main" id="{F05DCA9A-6633-F585-A549-DCF12892FCB8}"/>
               </a:ext>
             </a:extLst>
           </p:cNvPr>
@@ -489,7 +489,7 @@
           <p:cNvPr id="6" name="Slide Number Placeholder 5">
             <a:extLst>
               <a:ext uri="{FF2B5EF4-FFF2-40B4-BE49-F238E27FC236}">
-                <a16:creationId xmlns:a16="http://schemas.microsoft.com/office/drawing/2014/main" id="{D4FDEE69-3C5C-7718-EB27-8EC0C2F86F9A}"/>
+                <a16:creationId xmlns:a16="http://schemas.microsoft.com/office/drawing/2014/main" id="{11CFDCBA-9202-3EE2-02CA-46703624DF66}"/>
               </a:ext>
             </a:extLst>
           </p:cNvPr>
@@ -505,7 +505,7 @@
           <a:bodyPr/>
           <a:lstStyle/>
           <a:p>
-            <a:fld id="{89F55FFA-8360-4277-90EA-C17DC0B65CCD}" type="slidenum">
+            <a:fld id="{4D499B8D-3E85-4778-BF3B-206B51009B45}" type="slidenum">
               <a:rPr lang="en-US" smtClean="0"/>
               <a:t>‹#›</a:t>
             </a:fld>
@@ -516,7 +516,7 @@
     </p:spTree>
     <p:extLst>
       <p:ext uri="{BB962C8B-B14F-4D97-AF65-F5344CB8AC3E}">
-        <p14:creationId xmlns:p14="http://schemas.microsoft.com/office/powerpoint/2010/main" val="1062648850"/>
+        <p14:creationId xmlns:p14="http://schemas.microsoft.com/office/powerpoint/2010/main" val="246509284"/>
       </p:ext>
     </p:extLst>
   </p:cSld>
@@ -548,7 +548,7 @@
           <p:cNvPr id="2" name="Vertical Title 1">
             <a:extLst>
               <a:ext uri="{FF2B5EF4-FFF2-40B4-BE49-F238E27FC236}">
-                <a16:creationId xmlns:a16="http://schemas.microsoft.com/office/drawing/2014/main" id="{8F1DA29C-44BC-007D-7E23-A76540B9A4B5}"/>
+                <a16:creationId xmlns:a16="http://schemas.microsoft.com/office/drawing/2014/main" id="{786FA6B6-AC29-9965-7E51-9F2760471692}"/>
               </a:ext>
             </a:extLst>
           </p:cNvPr>
@@ -581,7 +581,7 @@
           <p:cNvPr id="3" name="Vertical Text Placeholder 2">
             <a:extLst>
               <a:ext uri="{FF2B5EF4-FFF2-40B4-BE49-F238E27FC236}">
-                <a16:creationId xmlns:a16="http://schemas.microsoft.com/office/drawing/2014/main" id="{5C3EC844-0B4A-87F2-7178-AD88FFEBBF09}"/>
+                <a16:creationId xmlns:a16="http://schemas.microsoft.com/office/drawing/2014/main" id="{6F91DEDF-6BD9-A593-14D5-4B9CD55631AA}"/>
               </a:ext>
             </a:extLst>
           </p:cNvPr>
@@ -643,7 +643,7 @@
           <p:cNvPr id="4" name="Date Placeholder 3">
             <a:extLst>
               <a:ext uri="{FF2B5EF4-FFF2-40B4-BE49-F238E27FC236}">
-                <a16:creationId xmlns:a16="http://schemas.microsoft.com/office/drawing/2014/main" id="{AEAC52C6-6D7B-8381-D4C4-257AB5F26228}"/>
+                <a16:creationId xmlns:a16="http://schemas.microsoft.com/office/drawing/2014/main" id="{5020603F-818B-EF0B-C4FE-A627621C3FC0}"/>
               </a:ext>
             </a:extLst>
           </p:cNvPr>
@@ -659,7 +659,7 @@
           <a:bodyPr/>
           <a:lstStyle/>
           <a:p>
-            <a:fld id="{130DF622-6113-4AB8-94CD-EF291E0695AC}" type="datetimeFigureOut">
+            <a:fld id="{BA23750E-CB54-4FEB-ADEA-7E26C796855B}" type="datetimeFigureOut">
               <a:rPr lang="en-US" smtClean="0"/>
               <a:t>10/19/2026</a:t>
             </a:fld>
@@ -672,7 +672,7 @@
           <p:cNvPr id="5" name="Footer Placeholder 4">
             <a:extLst>
               <a:ext uri="{FF2B5EF4-FFF2-40B4-BE49-F238E27FC236}">
-                <a16:creationId xmlns:a16="http://schemas.microsoft.com/office/drawing/2014/main" id="{028EED81-391A-7BD2-E9CA-060586052378}"/>
+                <a16:creationId xmlns:a16="http://schemas.microsoft.com/office/drawing/2014/main" id="{4F465D0C-2547-C394-A6F0-53E283DAE263}"/>
               </a:ext>
             </a:extLst>
           </p:cNvPr>
@@ -697,7 +697,7 @@
           <p:cNvPr id="6" name="Slide Number Placeholder 5">
             <a:extLst>
               <a:ext uri="{FF2B5EF4-FFF2-40B4-BE49-F238E27FC236}">
-                <a16:creationId xmlns:a16="http://schemas.microsoft.com/office/drawing/2014/main" id="{59A3CB4D-6A25-9F8A-BCF9-35D23F395592}"/>
+                <a16:creationId xmlns:a16="http://schemas.microsoft.com/office/drawing/2014/main" id="{D1A731BB-1583-0400-B32B-CDE500ADD58E}"/>
               </a:ext>
             </a:extLst>
           </p:cNvPr>
@@ -713,7 +713,7 @@
           <a:bodyPr/>
           <a:lstStyle/>
           <a:p>
-            <a:fld id="{89F55FFA-8360-4277-90EA-C17DC0B65CCD}" type="slidenum">
+            <a:fld id="{4D499B8D-3E85-4778-BF3B-206B51009B45}" type="slidenum">
               <a:rPr lang="en-US" smtClean="0"/>
               <a:t>‹#›</a:t>
             </a:fld>
@@ -724,7 +724,7 @@
     </p:spTree>
     <p:extLst>
       <p:ext uri="{BB962C8B-B14F-4D97-AF65-F5344CB8AC3E}">
-        <p14:creationId xmlns:p14="http://schemas.microsoft.com/office/powerpoint/2010/main" val="3531380599"/>
+        <p14:creationId xmlns:p14="http://schemas.microsoft.com/office/powerpoint/2010/main" val="3309625942"/>
       </p:ext>
     </p:extLst>
   </p:cSld>
@@ -756,7 +756,7 @@
           <p:cNvPr id="2" name="Title 1">
             <a:extLst>
               <a:ext uri="{FF2B5EF4-FFF2-40B4-BE49-F238E27FC236}">
-                <a16:creationId xmlns:a16="http://schemas.microsoft.com/office/drawing/2014/main" id="{6E5F27A7-50AA-A50B-F56A-34B13F06906D}"/>
+                <a16:creationId xmlns:a16="http://schemas.microsoft.com/office/drawing/2014/main" id="{FCA1D892-BE5F-ECFA-51BC-1AC31DACD106}"/>
               </a:ext>
             </a:extLst>
           </p:cNvPr>
@@ -784,7 +784,7 @@
           <p:cNvPr id="3" name="Content Placeholder 2">
             <a:extLst>
               <a:ext uri="{FF2B5EF4-FFF2-40B4-BE49-F238E27FC236}">
-                <a16:creationId xmlns:a16="http://schemas.microsoft.com/office/drawing/2014/main" id="{9D202A29-8C0B-A0FC-5E45-02C6B016B2BB}"/>
+                <a16:creationId xmlns:a16="http://schemas.microsoft.com/office/drawing/2014/main" id="{AEDC309B-511E-40FE-04C7-C892B8124F77}"/>
               </a:ext>
             </a:extLst>
           </p:cNvPr>
@@ -841,7 +841,7 @@
           <p:cNvPr id="4" name="Date Placeholder 3">
             <a:extLst>
               <a:ext uri="{FF2B5EF4-FFF2-40B4-BE49-F238E27FC236}">
-                <a16:creationId xmlns:a16="http://schemas.microsoft.com/office/drawing/2014/main" id="{7AC32212-4E48-5C2F-D1F6-D5EF78483D29}"/>
+                <a16:creationId xmlns:a16="http://schemas.microsoft.com/office/drawing/2014/main" id="{8B7589E0-55EB-FEED-D196-191206274E53}"/>
               </a:ext>
             </a:extLst>
           </p:cNvPr>
@@ -857,7 +857,7 @@
           <a:bodyPr/>
           <a:lstStyle/>
           <a:p>
-            <a:fld id="{130DF622-6113-4AB8-94CD-EF291E0695AC}" type="datetimeFigureOut">
+            <a:fld id="{BA23750E-CB54-4FEB-ADEA-7E26C796855B}" type="datetimeFigureOut">
               <a:rPr lang="en-US" smtClean="0"/>
               <a:t>10/19/2026</a:t>
             </a:fld>
@@ -870,7 +870,7 @@
           <p:cNvPr id="5" name="Footer Placeholder 4">
             <a:extLst>
               <a:ext uri="{FF2B5EF4-FFF2-40B4-BE49-F238E27FC236}">
-                <a16:creationId xmlns:a16="http://schemas.microsoft.com/office/drawing/2014/main" id="{A7CB0C3F-0AD8-010B-D830-EB7083FBACF1}"/>
+                <a16:creationId xmlns:a16="http://schemas.microsoft.com/office/drawing/2014/main" id="{AD9451E5-B62A-361A-8977-08826E3D66E7}"/>
               </a:ext>
             </a:extLst>
           </p:cNvPr>
@@ -895,7 +895,7 @@
           <p:cNvPr id="6" name="Slide Number Placeholder 5">
             <a:extLst>
               <a:ext uri="{FF2B5EF4-FFF2-40B4-BE49-F238E27FC236}">
-                <a16:creationId xmlns:a16="http://schemas.microsoft.com/office/drawing/2014/main" id="{29D0166F-C7DA-9CE2-4748-D383E67F474F}"/>
+                <a16:creationId xmlns:a16="http://schemas.microsoft.com/office/drawing/2014/main" id="{C87BCB54-A37F-9F41-FE4F-C08E049D881A}"/>
               </a:ext>
             </a:extLst>
           </p:cNvPr>
@@ -911,7 +911,7 @@
           <a:bodyPr/>
           <a:lstStyle/>
           <a:p>
-            <a:fld id="{89F55FFA-8360-4277-90EA-C17DC0B65CCD}" type="slidenum">
+            <a:fld id="{4D499B8D-3E85-4778-BF3B-206B51009B45}" type="slidenum">
               <a:rPr lang="en-US" smtClean="0"/>
               <a:t>‹#›</a:t>
             </a:fld>
@@ -922,7 +922,7 @@
     </p:spTree>
     <p:extLst>
       <p:ext uri="{BB962C8B-B14F-4D97-AF65-F5344CB8AC3E}">
-        <p14:creationId xmlns:p14="http://schemas.microsoft.com/office/powerpoint/2010/main" val="2528888623"/>
+        <p14:creationId xmlns:p14="http://schemas.microsoft.com/office/powerpoint/2010/main" val="3325985566"/>
       </p:ext>
     </p:extLst>
   </p:cSld>
@@ -954,7 +954,7 @@
           <p:cNvPr id="2" name="Title 1">
             <a:extLst>
               <a:ext uri="{FF2B5EF4-FFF2-40B4-BE49-F238E27FC236}">
-                <a16:creationId xmlns:a16="http://schemas.microsoft.com/office/drawing/2014/main" id="{E34E6AB9-C767-83F3-9A8D-67E5071C08EE}"/>
+                <a16:creationId xmlns:a16="http://schemas.microsoft.com/office/drawing/2014/main" id="{5B142B01-01DB-6575-DDDC-78B6E627C9CA}"/>
               </a:ext>
             </a:extLst>
           </p:cNvPr>
@@ -991,7 +991,7 @@
           <p:cNvPr id="3" name="Text Placeholder 2">
             <a:extLst>
               <a:ext uri="{FF2B5EF4-FFF2-40B4-BE49-F238E27FC236}">
-                <a16:creationId xmlns:a16="http://schemas.microsoft.com/office/drawing/2014/main" id="{C798AA67-B86D-928A-6816-D62845AE3C72}"/>
+                <a16:creationId xmlns:a16="http://schemas.microsoft.com/office/drawing/2014/main" id="{3C7279E9-4A3B-EF70-1658-0090393E2D30}"/>
               </a:ext>
             </a:extLst>
           </p:cNvPr>
@@ -1116,7 +1116,7 @@
           <p:cNvPr id="4" name="Date Placeholder 3">
             <a:extLst>
               <a:ext uri="{FF2B5EF4-FFF2-40B4-BE49-F238E27FC236}">
-                <a16:creationId xmlns:a16="http://schemas.microsoft.com/office/drawing/2014/main" id="{2DB4021F-E319-159E-3D23-FE09F8F45279}"/>
+                <a16:creationId xmlns:a16="http://schemas.microsoft.com/office/drawing/2014/main" id="{042A1496-72F9-C584-D007-8788519732EA}"/>
               </a:ext>
             </a:extLst>
           </p:cNvPr>
@@ -1132,7 +1132,7 @@
           <a:bodyPr/>
           <a:lstStyle/>
           <a:p>
-            <a:fld id="{130DF622-6113-4AB8-94CD-EF291E0695AC}" type="datetimeFigureOut">
+            <a:fld id="{BA23750E-CB54-4FEB-ADEA-7E26C796855B}" type="datetimeFigureOut">
               <a:rPr lang="en-US" smtClean="0"/>
               <a:t>10/19/2026</a:t>
             </a:fld>
@@ -1145,7 +1145,7 @@
           <p:cNvPr id="5" name="Footer Placeholder 4">
             <a:extLst>
               <a:ext uri="{FF2B5EF4-FFF2-40B4-BE49-F238E27FC236}">
-                <a16:creationId xmlns:a16="http://schemas.microsoft.com/office/drawing/2014/main" id="{9040716F-02E4-8879-D78F-3962C3C4CF0F}"/>
+                <a16:creationId xmlns:a16="http://schemas.microsoft.com/office/drawing/2014/main" id="{B75495EB-1BBD-3615-8503-6D53A7389C5F}"/>
               </a:ext>
             </a:extLst>
           </p:cNvPr>
@@ -1170,7 +1170,7 @@
           <p:cNvPr id="6" name="Slide Number Placeholder 5">
             <a:extLst>
               <a:ext uri="{FF2B5EF4-FFF2-40B4-BE49-F238E27FC236}">
-                <a16:creationId xmlns:a16="http://schemas.microsoft.com/office/drawing/2014/main" id="{A2A67589-12B2-D9D0-4260-2FD890C30A0A}"/>
+                <a16:creationId xmlns:a16="http://schemas.microsoft.com/office/drawing/2014/main" id="{46F34CE8-CF82-6A2E-3742-01C85816A0FD}"/>
               </a:ext>
             </a:extLst>
           </p:cNvPr>
@@ -1186,7 +1186,7 @@
           <a:bodyPr/>
           <a:lstStyle/>
           <a:p>
-            <a:fld id="{89F55FFA-8360-4277-90EA-C17DC0B65CCD}" type="slidenum">
+            <a:fld id="{4D499B8D-3E85-4778-BF3B-206B51009B45}" type="slidenum">
               <a:rPr lang="en-US" smtClean="0"/>
               <a:t>‹#›</a:t>
             </a:fld>
@@ -1197,7 +1197,7 @@
     </p:spTree>
     <p:extLst>
       <p:ext uri="{BB962C8B-B14F-4D97-AF65-F5344CB8AC3E}">
-        <p14:creationId xmlns:p14="http://schemas.microsoft.com/office/powerpoint/2010/main" val="3906158460"/>
+        <p14:creationId xmlns:p14="http://schemas.microsoft.com/office/powerpoint/2010/main" val="2586753309"/>
       </p:ext>
     </p:extLst>
   </p:cSld>
@@ -1229,7 +1229,7 @@
           <p:cNvPr id="2" name="Title 1">
             <a:extLst>
               <a:ext uri="{FF2B5EF4-FFF2-40B4-BE49-F238E27FC236}">
-                <a16:creationId xmlns:a16="http://schemas.microsoft.com/office/drawing/2014/main" id="{469CBD98-AB52-1A73-7367-C573572313D4}"/>
+                <a16:creationId xmlns:a16="http://schemas.microsoft.com/office/drawing/2014/main" id="{8165EDDC-D82D-D730-F8F9-8E2AF69AD06E}"/>
               </a:ext>
             </a:extLst>
           </p:cNvPr>
@@ -1257,7 +1257,7 @@
           <p:cNvPr id="3" name="Content Placeholder 2">
             <a:extLst>
               <a:ext uri="{FF2B5EF4-FFF2-40B4-BE49-F238E27FC236}">
-                <a16:creationId xmlns:a16="http://schemas.microsoft.com/office/drawing/2014/main" id="{446916D4-BE57-3A02-8C81-4A4C4AA3D59D}"/>
+                <a16:creationId xmlns:a16="http://schemas.microsoft.com/office/drawing/2014/main" id="{380B3FB1-C669-4631-3109-81C2CD25D714}"/>
               </a:ext>
             </a:extLst>
           </p:cNvPr>
@@ -1319,7 +1319,7 @@
           <p:cNvPr id="4" name="Content Placeholder 3">
             <a:extLst>
               <a:ext uri="{FF2B5EF4-FFF2-40B4-BE49-F238E27FC236}">
-                <a16:creationId xmlns:a16="http://schemas.microsoft.com/office/drawing/2014/main" id="{BFAAA618-9498-2696-9AB3-98ACBAE87BBB}"/>
+                <a16:creationId xmlns:a16="http://schemas.microsoft.com/office/drawing/2014/main" id="{10ED497D-FA3B-29DA-59CE-454E0C1F626A}"/>
               </a:ext>
             </a:extLst>
           </p:cNvPr>
@@ -1381,7 +1381,7 @@
           <p:cNvPr id="5" name="Date Placeholder 4">
             <a:extLst>
               <a:ext uri="{FF2B5EF4-FFF2-40B4-BE49-F238E27FC236}">
-                <a16:creationId xmlns:a16="http://schemas.microsoft.com/office/drawing/2014/main" id="{04CBF96E-65BF-766B-EFA9-9008F83A0B0A}"/>
+                <a16:creationId xmlns:a16="http://schemas.microsoft.com/office/drawing/2014/main" id="{4FC901B6-C1BF-B0ED-3C67-B332A29DF668}"/>
               </a:ext>
             </a:extLst>
           </p:cNvPr>
@@ -1397,7 +1397,7 @@
           <a:bodyPr/>
           <a:lstStyle/>
           <a:p>
-            <a:fld id="{130DF622-6113-4AB8-94CD-EF291E0695AC}" type="datetimeFigureOut">
+            <a:fld id="{BA23750E-CB54-4FEB-ADEA-7E26C796855B}" type="datetimeFigureOut">
               <a:rPr lang="en-US" smtClean="0"/>
               <a:t>10/19/2026</a:t>
             </a:fld>
@@ -1410,7 +1410,7 @@
           <p:cNvPr id="6" name="Footer Placeholder 5">
             <a:extLst>
               <a:ext uri="{FF2B5EF4-FFF2-40B4-BE49-F238E27FC236}">
-                <a16:creationId xmlns:a16="http://schemas.microsoft.com/office/drawing/2014/main" id="{FEF0B55C-61AE-81E6-8D3A-1E7A56DE8EEB}"/>
+                <a16:creationId xmlns:a16="http://schemas.microsoft.com/office/drawing/2014/main" id="{4F34D161-E0B6-159D-7045-CCB87C8BF92F}"/>
               </a:ext>
             </a:extLst>
           </p:cNvPr>
@@ -1435,7 +1435,7 @@
           <p:cNvPr id="7" name="Slide Number Placeholder 6">
             <a:extLst>
               <a:ext uri="{FF2B5EF4-FFF2-40B4-BE49-F238E27FC236}">
-                <a16:creationId xmlns:a16="http://schemas.microsoft.com/office/drawing/2014/main" id="{BE7A4217-D95A-68C7-90CA-CF1F11E1C188}"/>
+                <a16:creationId xmlns:a16="http://schemas.microsoft.com/office/drawing/2014/main" id="{2FA7F4AF-8E47-228C-FF1B-D93329A397AC}"/>
               </a:ext>
             </a:extLst>
           </p:cNvPr>
@@ -1451,7 +1451,7 @@
           <a:bodyPr/>
           <a:lstStyle/>
           <a:p>
-            <a:fld id="{89F55FFA-8360-4277-90EA-C17DC0B65CCD}" type="slidenum">
+            <a:fld id="{4D499B8D-3E85-4778-BF3B-206B51009B45}" type="slidenum">
               <a:rPr lang="en-US" smtClean="0"/>
               <a:t>‹#›</a:t>
             </a:fld>
@@ -1462,7 +1462,7 @@
     </p:spTree>
     <p:extLst>
       <p:ext uri="{BB962C8B-B14F-4D97-AF65-F5344CB8AC3E}">
-        <p14:creationId xmlns:p14="http://schemas.microsoft.com/office/powerpoint/2010/main" val="1444297756"/>
+        <p14:creationId xmlns:p14="http://schemas.microsoft.com/office/powerpoint/2010/main" val="4155946670"/>
       </p:ext>
     </p:extLst>
   </p:cSld>
@@ -1494,7 +1494,7 @@
           <p:cNvPr id="2" name="Title 1">
             <a:extLst>
               <a:ext uri="{FF2B5EF4-FFF2-40B4-BE49-F238E27FC236}">
-                <a16:creationId xmlns:a16="http://schemas.microsoft.com/office/drawing/2014/main" id="{AE2402C2-6CB8-C77E-4553-0E5635A4BDD3}"/>
+                <a16:creationId xmlns:a16="http://schemas.microsoft.com/office/drawing/2014/main" id="{64995291-77C2-0E76-B869-0A731F3B44F3}"/>
               </a:ext>
             </a:extLst>
           </p:cNvPr>
@@ -1527,7 +1527,7 @@
           <p:cNvPr id="3" name="Text Placeholder 2">
             <a:extLst>
               <a:ext uri="{FF2B5EF4-FFF2-40B4-BE49-F238E27FC236}">
-                <a16:creationId xmlns:a16="http://schemas.microsoft.com/office/drawing/2014/main" id="{B16540B6-5F3C-9248-4172-CE853AC87EE0}"/>
+                <a16:creationId xmlns:a16="http://schemas.microsoft.com/office/drawing/2014/main" id="{688E094D-0D37-A533-4703-466925B6B111}"/>
               </a:ext>
             </a:extLst>
           </p:cNvPr>
@@ -1598,7 +1598,7 @@
           <p:cNvPr id="4" name="Content Placeholder 3">
             <a:extLst>
               <a:ext uri="{FF2B5EF4-FFF2-40B4-BE49-F238E27FC236}">
-                <a16:creationId xmlns:a16="http://schemas.microsoft.com/office/drawing/2014/main" id="{8CD05F05-3168-5F27-23A0-CF4B6D05DC1D}"/>
+                <a16:creationId xmlns:a16="http://schemas.microsoft.com/office/drawing/2014/main" id="{979F4482-5E82-1A00-D157-3BD5958E0753}"/>
               </a:ext>
             </a:extLst>
           </p:cNvPr>
@@ -1660,7 +1660,7 @@
           <p:cNvPr id="5" name="Text Placeholder 4">
             <a:extLst>
               <a:ext uri="{FF2B5EF4-FFF2-40B4-BE49-F238E27FC236}">
-                <a16:creationId xmlns:a16="http://schemas.microsoft.com/office/drawing/2014/main" id="{D9CB760A-C547-8052-CEE7-12F29CF626CE}"/>
+                <a16:creationId xmlns:a16="http://schemas.microsoft.com/office/drawing/2014/main" id="{60BF2181-35ED-897D-DA8B-80913DDE1032}"/>
               </a:ext>
             </a:extLst>
           </p:cNvPr>
@@ -1731,7 +1731,7 @@
           <p:cNvPr id="6" name="Content Placeholder 5">
             <a:extLst>
               <a:ext uri="{FF2B5EF4-FFF2-40B4-BE49-F238E27FC236}">
-                <a16:creationId xmlns:a16="http://schemas.microsoft.com/office/drawing/2014/main" id="{EBBBFDD1-D127-E07B-1B6B-4EE4923FD103}"/>
+                <a16:creationId xmlns:a16="http://schemas.microsoft.com/office/drawing/2014/main" id="{837E3012-C181-AA94-C44B-47EA7AA7B665}"/>
               </a:ext>
             </a:extLst>
           </p:cNvPr>
@@ -1793,7 +1793,7 @@
           <p:cNvPr id="7" name="Date Placeholder 6">
             <a:extLst>
               <a:ext uri="{FF2B5EF4-FFF2-40B4-BE49-F238E27FC236}">
-                <a16:creationId xmlns:a16="http://schemas.microsoft.com/office/drawing/2014/main" id="{EBBDA96B-2CDD-E519-EBD8-ED17FC1842DA}"/>
+                <a16:creationId xmlns:a16="http://schemas.microsoft.com/office/drawing/2014/main" id="{E884FCA0-0821-4E4D-02F8-BAC57FC5FE1A}"/>
               </a:ext>
             </a:extLst>
           </p:cNvPr>
@@ -1809,7 +1809,7 @@
           <a:bodyPr/>
           <a:lstStyle/>
           <a:p>
-            <a:fld id="{130DF622-6113-4AB8-94CD-EF291E0695AC}" type="datetimeFigureOut">
+            <a:fld id="{BA23750E-CB54-4FEB-ADEA-7E26C796855B}" type="datetimeFigureOut">
               <a:rPr lang="en-US" smtClean="0"/>
               <a:t>10/19/2026</a:t>
             </a:fld>
@@ -1822,7 +1822,7 @@
           <p:cNvPr id="8" name="Footer Placeholder 7">
             <a:extLst>
               <a:ext uri="{FF2B5EF4-FFF2-40B4-BE49-F238E27FC236}">
-                <a16:creationId xmlns:a16="http://schemas.microsoft.com/office/drawing/2014/main" id="{B2D96CE7-759B-8F86-59ED-210A2AAB62E0}"/>
+                <a16:creationId xmlns:a16="http://schemas.microsoft.com/office/drawing/2014/main" id="{FF34D52B-6821-02AD-ED36-E0084400C59F}"/>
               </a:ext>
             </a:extLst>
           </p:cNvPr>
@@ -1847,7 +1847,7 @@
           <p:cNvPr id="9" name="Slide Number Placeholder 8">
             <a:extLst>
               <a:ext uri="{FF2B5EF4-FFF2-40B4-BE49-F238E27FC236}">
-                <a16:creationId xmlns:a16="http://schemas.microsoft.com/office/drawing/2014/main" id="{1742DE32-1009-C8F4-4783-0E32A1BEEA29}"/>
+                <a16:creationId xmlns:a16="http://schemas.microsoft.com/office/drawing/2014/main" id="{C7B49A54-C148-9051-329D-F86B6357EB4F}"/>
               </a:ext>
             </a:extLst>
           </p:cNvPr>
@@ -1863,7 +1863,7 @@
           <a:bodyPr/>
           <a:lstStyle/>
           <a:p>
-            <a:fld id="{89F55FFA-8360-4277-90EA-C17DC0B65CCD}" type="slidenum">
+            <a:fld id="{4D499B8D-3E85-4778-BF3B-206B51009B45}" type="slidenum">
               <a:rPr lang="en-US" smtClean="0"/>
               <a:t>‹#›</a:t>
             </a:fld>
@@ -1874,7 +1874,7 @@
     </p:spTree>
     <p:extLst>
       <p:ext uri="{BB962C8B-B14F-4D97-AF65-F5344CB8AC3E}">
-        <p14:creationId xmlns:p14="http://schemas.microsoft.com/office/powerpoint/2010/main" val="1286881968"/>
+        <p14:creationId xmlns:p14="http://schemas.microsoft.com/office/powerpoint/2010/main" val="2683754104"/>
       </p:ext>
     </p:extLst>
   </p:cSld>
@@ -1906,7 +1906,7 @@
           <p:cNvPr id="2" name="Title 1">
             <a:extLst>
               <a:ext uri="{FF2B5EF4-FFF2-40B4-BE49-F238E27FC236}">
-                <a16:creationId xmlns:a16="http://schemas.microsoft.com/office/drawing/2014/main" id="{3278369A-9586-153A-C7A0-48350C9D990D}"/>
+                <a16:creationId xmlns:a16="http://schemas.microsoft.com/office/drawing/2014/main" id="{589F92AB-848B-CFDA-CC13-F5C90DDC5A7B}"/>
               </a:ext>
             </a:extLst>
           </p:cNvPr>
@@ -1934,7 +1934,7 @@
           <p:cNvPr id="3" name="Date Placeholder 2">
             <a:extLst>
               <a:ext uri="{FF2B5EF4-FFF2-40B4-BE49-F238E27FC236}">
-                <a16:creationId xmlns:a16="http://schemas.microsoft.com/office/drawing/2014/main" id="{1A6E7296-779B-1A23-3BBA-303479F6FAAE}"/>
+                <a16:creationId xmlns:a16="http://schemas.microsoft.com/office/drawing/2014/main" id="{DFF2A370-92FC-A7CF-6145-01334510A40F}"/>
               </a:ext>
             </a:extLst>
           </p:cNvPr>
@@ -1950,7 +1950,7 @@
           <a:bodyPr/>
           <a:lstStyle/>
           <a:p>
-            <a:fld id="{130DF622-6113-4AB8-94CD-EF291E0695AC}" type="datetimeFigureOut">
+            <a:fld id="{BA23750E-CB54-4FEB-ADEA-7E26C796855B}" type="datetimeFigureOut">
               <a:rPr lang="en-US" smtClean="0"/>
               <a:t>10/19/2026</a:t>
             </a:fld>
@@ -1963,7 +1963,7 @@
           <p:cNvPr id="4" name="Footer Placeholder 3">
             <a:extLst>
               <a:ext uri="{FF2B5EF4-FFF2-40B4-BE49-F238E27FC236}">
-                <a16:creationId xmlns:a16="http://schemas.microsoft.com/office/drawing/2014/main" id="{8D468328-938A-4E86-F428-3810E78AA3FC}"/>
+                <a16:creationId xmlns:a16="http://schemas.microsoft.com/office/drawing/2014/main" id="{9B31FBDC-E25D-D24E-2558-C521624A9D4A}"/>
               </a:ext>
             </a:extLst>
           </p:cNvPr>
@@ -1988,7 +1988,7 @@
           <p:cNvPr id="5" name="Slide Number Placeholder 4">
             <a:extLst>
               <a:ext uri="{FF2B5EF4-FFF2-40B4-BE49-F238E27FC236}">
-                <a16:creationId xmlns:a16="http://schemas.microsoft.com/office/drawing/2014/main" id="{74AA8D26-E1E3-A0BE-B4F5-369221F0A865}"/>
+                <a16:creationId xmlns:a16="http://schemas.microsoft.com/office/drawing/2014/main" id="{D03DC6D7-EF26-39FE-16EC-A988BDB1DA33}"/>
               </a:ext>
             </a:extLst>
           </p:cNvPr>
@@ -2004,7 +2004,7 @@
           <a:bodyPr/>
           <a:lstStyle/>
           <a:p>
-            <a:fld id="{89F55FFA-8360-4277-90EA-C17DC0B65CCD}" type="slidenum">
+            <a:fld id="{4D499B8D-3E85-4778-BF3B-206B51009B45}" type="slidenum">
               <a:rPr lang="en-US" smtClean="0"/>
               <a:t>‹#›</a:t>
             </a:fld>
@@ -2015,7 +2015,7 @@
     </p:spTree>
     <p:extLst>
       <p:ext uri="{BB962C8B-B14F-4D97-AF65-F5344CB8AC3E}">
-        <p14:creationId xmlns:p14="http://schemas.microsoft.com/office/powerpoint/2010/main" val="3864651323"/>
+        <p14:creationId xmlns:p14="http://schemas.microsoft.com/office/powerpoint/2010/main" val="2066213230"/>
       </p:ext>
     </p:extLst>
   </p:cSld>
@@ -2047,7 +2047,7 @@
           <p:cNvPr id="2" name="Date Placeholder 1">
             <a:extLst>
               <a:ext uri="{FF2B5EF4-FFF2-40B4-BE49-F238E27FC236}">
-                <a16:creationId xmlns:a16="http://schemas.microsoft.com/office/drawing/2014/main" id="{D834BA00-FAB8-F09F-BAD9-EA16D7A85C67}"/>
+                <a16:creationId xmlns:a16="http://schemas.microsoft.com/office/drawing/2014/main" id="{894FDB42-1232-9529-2374-24B291C49282}"/>
               </a:ext>
             </a:extLst>
           </p:cNvPr>
@@ -2063,7 +2063,7 @@
           <a:bodyPr/>
           <a:lstStyle/>
           <a:p>
-            <a:fld id="{130DF622-6113-4AB8-94CD-EF291E0695AC}" type="datetimeFigureOut">
+            <a:fld id="{BA23750E-CB54-4FEB-ADEA-7E26C796855B}" type="datetimeFigureOut">
               <a:rPr lang="en-US" smtClean="0"/>
               <a:t>10/19/2026</a:t>
             </a:fld>
@@ -2076,7 +2076,7 @@
           <p:cNvPr id="3" name="Footer Placeholder 2">
             <a:extLst>
               <a:ext uri="{FF2B5EF4-FFF2-40B4-BE49-F238E27FC236}">
-                <a16:creationId xmlns:a16="http://schemas.microsoft.com/office/drawing/2014/main" id="{3F525B41-A021-AF06-4F26-634FF96A34D4}"/>
+                <a16:creationId xmlns:a16="http://schemas.microsoft.com/office/drawing/2014/main" id="{827F6074-61C2-44DC-D998-ED3D1AB7223F}"/>
               </a:ext>
             </a:extLst>
           </p:cNvPr>
@@ -2101,7 +2101,7 @@
           <p:cNvPr id="4" name="Slide Number Placeholder 3">
             <a:extLst>
               <a:ext uri="{FF2B5EF4-FFF2-40B4-BE49-F238E27FC236}">
-                <a16:creationId xmlns:a16="http://schemas.microsoft.com/office/drawing/2014/main" id="{B22C18E2-3302-C54F-51A5-4BC75CA2B413}"/>
+                <a16:creationId xmlns:a16="http://schemas.microsoft.com/office/drawing/2014/main" id="{39D1DF16-0C38-BB20-5DF0-266D4DA693F7}"/>
               </a:ext>
             </a:extLst>
           </p:cNvPr>
@@ -2117,7 +2117,7 @@
           <a:bodyPr/>
           <a:lstStyle/>
           <a:p>
-            <a:fld id="{89F55FFA-8360-4277-90EA-C17DC0B65CCD}" type="slidenum">
+            <a:fld id="{4D499B8D-3E85-4778-BF3B-206B51009B45}" type="slidenum">
               <a:rPr lang="en-US" smtClean="0"/>
               <a:t>‹#›</a:t>
             </a:fld>
@@ -2128,7 +2128,7 @@
     </p:spTree>
     <p:extLst>
       <p:ext uri="{BB962C8B-B14F-4D97-AF65-F5344CB8AC3E}">
-        <p14:creationId xmlns:p14="http://schemas.microsoft.com/office/powerpoint/2010/main" val="1844545477"/>
+        <p14:creationId xmlns:p14="http://schemas.microsoft.com/office/powerpoint/2010/main" val="852837648"/>
       </p:ext>
     </p:extLst>
   </p:cSld>
@@ -2160,7 +2160,7 @@
           <p:cNvPr id="2" name="Title 1">
             <a:extLst>
               <a:ext uri="{FF2B5EF4-FFF2-40B4-BE49-F238E27FC236}">
-                <a16:creationId xmlns:a16="http://schemas.microsoft.com/office/drawing/2014/main" id="{09250442-937A-A45B-0B9A-1046087B7132}"/>
+                <a16:creationId xmlns:a16="http://schemas.microsoft.com/office/drawing/2014/main" id="{87E898F7-8B41-57EA-3A37-2EA95216C00B}"/>
               </a:ext>
             </a:extLst>
           </p:cNvPr>
@@ -2197,7 +2197,7 @@
           <p:cNvPr id="3" name="Content Placeholder 2">
             <a:extLst>
               <a:ext uri="{FF2B5EF4-FFF2-40B4-BE49-F238E27FC236}">
-                <a16:creationId xmlns:a16="http://schemas.microsoft.com/office/drawing/2014/main" id="{81505CD8-37C7-FE85-7CB4-DA964C242887}"/>
+                <a16:creationId xmlns:a16="http://schemas.microsoft.com/office/drawing/2014/main" id="{24B7B0D0-3F48-8A1C-224B-217B0DAF4C77}"/>
               </a:ext>
             </a:extLst>
           </p:cNvPr>
@@ -2287,7 +2287,7 @@
           <p:cNvPr id="4" name="Text Placeholder 3">
             <a:extLst>
               <a:ext uri="{FF2B5EF4-FFF2-40B4-BE49-F238E27FC236}">
-                <a16:creationId xmlns:a16="http://schemas.microsoft.com/office/drawing/2014/main" id="{4C366ECC-3F21-D74A-D519-B5A4DD313062}"/>
+                <a16:creationId xmlns:a16="http://schemas.microsoft.com/office/drawing/2014/main" id="{00440919-B5DC-25A6-6DA7-2AA4720F45FA}"/>
               </a:ext>
             </a:extLst>
           </p:cNvPr>
@@ -2358,7 +2358,7 @@
           <p:cNvPr id="5" name="Date Placeholder 4">
             <a:extLst>
               <a:ext uri="{FF2B5EF4-FFF2-40B4-BE49-F238E27FC236}">
-                <a16:creationId xmlns:a16="http://schemas.microsoft.com/office/drawing/2014/main" id="{2EA3BE25-5495-2FB6-C699-1A2E4D31BE24}"/>
+                <a16:creationId xmlns:a16="http://schemas.microsoft.com/office/drawing/2014/main" id="{7DBAF1AA-13A6-E0AB-E1C6-1D62017CDD92}"/>
               </a:ext>
             </a:extLst>
           </p:cNvPr>
@@ -2374,7 +2374,7 @@
           <a:bodyPr/>
           <a:lstStyle/>
           <a:p>
-            <a:fld id="{130DF622-6113-4AB8-94CD-EF291E0695AC}" type="datetimeFigureOut">
+            <a:fld id="{BA23750E-CB54-4FEB-ADEA-7E26C796855B}" type="datetimeFigureOut">
               <a:rPr lang="en-US" smtClean="0"/>
               <a:t>10/19/2026</a:t>
             </a:fld>
@@ -2387,7 +2387,7 @@
           <p:cNvPr id="6" name="Footer Placeholder 5">
             <a:extLst>
               <a:ext uri="{FF2B5EF4-FFF2-40B4-BE49-F238E27FC236}">
-                <a16:creationId xmlns:a16="http://schemas.microsoft.com/office/drawing/2014/main" id="{251AFA54-2666-8D5C-90D2-A872C57C1A5F}"/>
+                <a16:creationId xmlns:a16="http://schemas.microsoft.com/office/drawing/2014/main" id="{899C5358-7F57-D169-4489-43FB01538C79}"/>
               </a:ext>
             </a:extLst>
           </p:cNvPr>
@@ -2412,7 +2412,7 @@
           <p:cNvPr id="7" name="Slide Number Placeholder 6">
             <a:extLst>
               <a:ext uri="{FF2B5EF4-FFF2-40B4-BE49-F238E27FC236}">
-                <a16:creationId xmlns:a16="http://schemas.microsoft.com/office/drawing/2014/main" id="{918E884F-B24E-DF87-2327-4612D207A0D2}"/>
+                <a16:creationId xmlns:a16="http://schemas.microsoft.com/office/drawing/2014/main" id="{D4266307-7E46-16D1-86B1-60333511C943}"/>
               </a:ext>
             </a:extLst>
           </p:cNvPr>
@@ -2428,7 +2428,7 @@
           <a:bodyPr/>
           <a:lstStyle/>
           <a:p>
-            <a:fld id="{89F55FFA-8360-4277-90EA-C17DC0B65CCD}" type="slidenum">
+            <a:fld id="{4D499B8D-3E85-4778-BF3B-206B51009B45}" type="slidenum">
               <a:rPr lang="en-US" smtClean="0"/>
               <a:t>‹#›</a:t>
             </a:fld>
@@ -2439,7 +2439,7 @@
     </p:spTree>
     <p:extLst>
       <p:ext uri="{BB962C8B-B14F-4D97-AF65-F5344CB8AC3E}">
-        <p14:creationId xmlns:p14="http://schemas.microsoft.com/office/powerpoint/2010/main" val="1661072655"/>
+        <p14:creationId xmlns:p14="http://schemas.microsoft.com/office/powerpoint/2010/main" val="3172956035"/>
       </p:ext>
     </p:extLst>
   </p:cSld>
@@ -2471,7 +2471,7 @@
           <p:cNvPr id="2" name="Title 1">
             <a:extLst>
               <a:ext uri="{FF2B5EF4-FFF2-40B4-BE49-F238E27FC236}">
-                <a16:creationId xmlns:a16="http://schemas.microsoft.com/office/drawing/2014/main" id="{5E834927-C57E-964C-025F-0275E8F415D9}"/>
+                <a16:creationId xmlns:a16="http://schemas.microsoft.com/office/drawing/2014/main" id="{A27BEA22-D779-369B-3B13-E21D101AA35D}"/>
               </a:ext>
             </a:extLst>
           </p:cNvPr>
@@ -2508,7 +2508,7 @@
           <p:cNvPr id="3" name="Picture Placeholder 2">
             <a:extLst>
               <a:ext uri="{FF2B5EF4-FFF2-40B4-BE49-F238E27FC236}">
-                <a16:creationId xmlns:a16="http://schemas.microsoft.com/office/drawing/2014/main" id="{F0D67B71-FC8D-E466-1471-7DDA10708E58}"/>
+                <a16:creationId xmlns:a16="http://schemas.microsoft.com/office/drawing/2014/main" id="{756DF435-5883-AC4D-FEDC-0112ADFBCB10}"/>
               </a:ext>
             </a:extLst>
           </p:cNvPr>
@@ -2575,7 +2575,7 @@
           <p:cNvPr id="4" name="Text Placeholder 3">
             <a:extLst>
               <a:ext uri="{FF2B5EF4-FFF2-40B4-BE49-F238E27FC236}">
-                <a16:creationId xmlns:a16="http://schemas.microsoft.com/office/drawing/2014/main" id="{8DDEBF36-1A85-14D4-BE8A-9CC2BB523756}"/>
+                <a16:creationId xmlns:a16="http://schemas.microsoft.com/office/drawing/2014/main" id="{274D8AA8-9B92-D48B-3370-570861E60D96}"/>
               </a:ext>
             </a:extLst>
           </p:cNvPr>
@@ -2646,7 +2646,7 @@
           <p:cNvPr id="5" name="Date Placeholder 4">
             <a:extLst>
               <a:ext uri="{FF2B5EF4-FFF2-40B4-BE49-F238E27FC236}">
-                <a16:creationId xmlns:a16="http://schemas.microsoft.com/office/drawing/2014/main" id="{1F533B6B-9839-F581-D90C-03CFFD79165A}"/>
+                <a16:creationId xmlns:a16="http://schemas.microsoft.com/office/drawing/2014/main" id="{3B195486-3FBC-AD62-9ECE-3CF42EA5B0B9}"/>
               </a:ext>
             </a:extLst>
           </p:cNvPr>
@@ -2662,7 +2662,7 @@
           <a:bodyPr/>
           <a:lstStyle/>
           <a:p>
-            <a:fld id="{130DF622-6113-4AB8-94CD-EF291E0695AC}" type="datetimeFigureOut">
+            <a:fld id="{BA23750E-CB54-4FEB-ADEA-7E26C796855B}" type="datetimeFigureOut">
               <a:rPr lang="en-US" smtClean="0"/>
               <a:t>10/19/2026</a:t>
             </a:fld>
@@ -2675,7 +2675,7 @@
           <p:cNvPr id="6" name="Footer Placeholder 5">
             <a:extLst>
               <a:ext uri="{FF2B5EF4-FFF2-40B4-BE49-F238E27FC236}">
-                <a16:creationId xmlns:a16="http://schemas.microsoft.com/office/drawing/2014/main" id="{CC76C05C-F68E-0E17-A57B-AFB3174302AF}"/>
+                <a16:creationId xmlns:a16="http://schemas.microsoft.com/office/drawing/2014/main" id="{3E5FA0F6-F201-E5F1-FC7A-8C5BFF69A096}"/>
               </a:ext>
             </a:extLst>
           </p:cNvPr>
@@ -2700,7 +2700,7 @@
           <p:cNvPr id="7" name="Slide Number Placeholder 6">
             <a:extLst>
               <a:ext uri="{FF2B5EF4-FFF2-40B4-BE49-F238E27FC236}">
-                <a16:creationId xmlns:a16="http://schemas.microsoft.com/office/drawing/2014/main" id="{C3B51295-1C79-3B4F-5485-478771A286A2}"/>
+                <a16:creationId xmlns:a16="http://schemas.microsoft.com/office/drawing/2014/main" id="{01F375F9-59C6-CBF3-C9D0-A96A8707CDD6}"/>
               </a:ext>
             </a:extLst>
           </p:cNvPr>
@@ -2716,7 +2716,7 @@
           <a:bodyPr/>
           <a:lstStyle/>
           <a:p>
-            <a:fld id="{89F55FFA-8360-4277-90EA-C17DC0B65CCD}" type="slidenum">
+            <a:fld id="{4D499B8D-3E85-4778-BF3B-206B51009B45}" type="slidenum">
               <a:rPr lang="en-US" smtClean="0"/>
               <a:t>‹#›</a:t>
             </a:fld>
@@ -2727,7 +2727,7 @@
     </p:spTree>
     <p:extLst>
       <p:ext uri="{BB962C8B-B14F-4D97-AF65-F5344CB8AC3E}">
-        <p14:creationId xmlns:p14="http://schemas.microsoft.com/office/powerpoint/2010/main" val="943273980"/>
+        <p14:creationId xmlns:p14="http://schemas.microsoft.com/office/powerpoint/2010/main" val="1148890101"/>
       </p:ext>
     </p:extLst>
   </p:cSld>
@@ -2764,7 +2764,7 @@
           <p:cNvPr id="2" name="Title Placeholder 1">
             <a:extLst>
               <a:ext uri="{FF2B5EF4-FFF2-40B4-BE49-F238E27FC236}">
-                <a16:creationId xmlns:a16="http://schemas.microsoft.com/office/drawing/2014/main" id="{BDEF752D-A2CF-B64B-AE84-431A99C47D3E}"/>
+                <a16:creationId xmlns:a16="http://schemas.microsoft.com/office/drawing/2014/main" id="{7B57ED01-437C-E1DD-0A05-9A1B5D02AFCD}"/>
               </a:ext>
             </a:extLst>
           </p:cNvPr>
@@ -2802,7 +2802,7 @@
           <p:cNvPr id="3" name="Text Placeholder 2">
             <a:extLst>
               <a:ext uri="{FF2B5EF4-FFF2-40B4-BE49-F238E27FC236}">
-                <a16:creationId xmlns:a16="http://schemas.microsoft.com/office/drawing/2014/main" id="{EF563D81-DB8F-9C0A-A9EA-C089B48B98F0}"/>
+                <a16:creationId xmlns:a16="http://schemas.microsoft.com/office/drawing/2014/main" id="{0A8B535B-7BAE-E2B6-E65E-A69D6C55E503}"/>
               </a:ext>
             </a:extLst>
           </p:cNvPr>
@@ -2869,7 +2869,7 @@
           <p:cNvPr id="4" name="Date Placeholder 3">
             <a:extLst>
               <a:ext uri="{FF2B5EF4-FFF2-40B4-BE49-F238E27FC236}">
-                <a16:creationId xmlns:a16="http://schemas.microsoft.com/office/drawing/2014/main" id="{FBD57CF8-3673-32B1-D76E-740BFFAEEC95}"/>
+                <a16:creationId xmlns:a16="http://schemas.microsoft.com/office/drawing/2014/main" id="{006BDDB2-9F36-0638-31E7-79923047A965}"/>
               </a:ext>
             </a:extLst>
           </p:cNvPr>
@@ -2903,7 +2903,7 @@
             </a:lvl1pPr>
           </a:lstStyle>
           <a:p>
-            <a:fld id="{130DF622-6113-4AB8-94CD-EF291E0695AC}" type="datetimeFigureOut">
+            <a:fld id="{BA23750E-CB54-4FEB-ADEA-7E26C796855B}" type="datetimeFigureOut">
               <a:rPr lang="en-US" smtClean="0"/>
               <a:t>10/19/2026</a:t>
             </a:fld>
@@ -2916,7 +2916,7 @@
           <p:cNvPr id="5" name="Footer Placeholder 4">
             <a:extLst>
               <a:ext uri="{FF2B5EF4-FFF2-40B4-BE49-F238E27FC236}">
-                <a16:creationId xmlns:a16="http://schemas.microsoft.com/office/drawing/2014/main" id="{900F1DBF-6A2B-7857-9A20-418A40ADD58A}"/>
+                <a16:creationId xmlns:a16="http://schemas.microsoft.com/office/drawing/2014/main" id="{8B7999AA-E1E3-802B-4589-F9FF887A6E26}"/>
               </a:ext>
             </a:extLst>
           </p:cNvPr>
@@ -2959,7 +2959,7 @@
           <p:cNvPr id="6" name="Slide Number Placeholder 5">
             <a:extLst>
               <a:ext uri="{FF2B5EF4-FFF2-40B4-BE49-F238E27FC236}">
-                <a16:creationId xmlns:a16="http://schemas.microsoft.com/office/drawing/2014/main" id="{6828135B-0829-084B-3C34-FCDB05B57437}"/>
+                <a16:creationId xmlns:a16="http://schemas.microsoft.com/office/drawing/2014/main" id="{2F87616E-AB5D-4357-13D8-6A3A94617D6F}"/>
               </a:ext>
             </a:extLst>
           </p:cNvPr>
@@ -2993,7 +2993,7 @@
             </a:lvl1pPr>
           </a:lstStyle>
           <a:p>
-            <a:fld id="{89F55FFA-8360-4277-90EA-C17DC0B65CCD}" type="slidenum">
+            <a:fld id="{4D499B8D-3E85-4778-BF3B-206B51009B45}" type="slidenum">
               <a:rPr lang="en-US" smtClean="0"/>
               <a:t>‹#›</a:t>
             </a:fld>
@@ -3004,7 +3004,7 @@
     </p:spTree>
     <p:extLst>
       <p:ext uri="{BB962C8B-B14F-4D97-AF65-F5344CB8AC3E}">
-        <p14:creationId xmlns:p14="http://schemas.microsoft.com/office/powerpoint/2010/main" val="2113468878"/>
+        <p14:creationId xmlns:p14="http://schemas.microsoft.com/office/powerpoint/2010/main" val="42974596"/>
       </p:ext>
     </p:extLst>
   </p:cSld>
@@ -3308,6 +3308,14 @@
 <file path=ppt/slides/slide1.xml><?xml version="1.0" encoding="utf-8"?>
 <p:sld xmlns:a="http://schemas.openxmlformats.org/drawingml/2006/main" xmlns:r="http://schemas.openxmlformats.org/officeDocument/2006/relationships" xmlns:p="http://schemas.openxmlformats.org/presentationml/2006/main">
   <p:cSld>
+    <p:bg>
+      <p:bgPr>
+        <a:solidFill>
+          <a:srgbClr val="FFFFFF"/>
+        </a:solidFill>
+        <a:effectLst/>
+      </p:bgPr>
+    </p:bg>
     <p:spTree>
       <p:nvGrpSpPr>
         <p:cNvPr id="1" name=""/>
@@ -3322,316 +3330,960 @@
           <a:chExt cx="0" cy="0"/>
         </a:xfrm>
       </p:grpSpPr>
-      <p:sp>
-        <p:nvSpPr>
-          <p:cNvPr id="2" name="Rectangle 1">
-            <a:extLst>
-              <a:ext uri="{FF2B5EF4-FFF2-40B4-BE49-F238E27FC236}">
-                <a16:creationId xmlns:a16="http://schemas.microsoft.com/office/drawing/2014/main" id="{E822FA72-0E68-C842-A339-9AFCDEAD75F1}"/>
-              </a:ext>
-            </a:extLst>
-          </p:cNvPr>
-          <p:cNvSpPr/>
-          <p:nvPr/>
-        </p:nvSpPr>
-        <p:spPr>
-          <a:xfrm>
-            <a:off x="0" y="0"/>
-            <a:ext cx="152400" cy="10693400"/>
-          </a:xfrm>
-          <a:prstGeom prst="rect">
-            <a:avLst/>
-          </a:prstGeom>
-          <a:solidFill>
-            <a:srgbClr val="28796F"/>
-          </a:solidFill>
-          <a:ln w="19050" cap="flat" cmpd="sng" algn="ctr">
+      <p:pic>
+        <p:nvPicPr>
+          <p:cNvPr id="2" name="Picture 1">
+            <a:extLst>
+              <a:ext uri="{FF2B5EF4-FFF2-40B4-BE49-F238E27FC236}">
+                <a16:creationId xmlns:a16="http://schemas.microsoft.com/office/drawing/2014/main" id="{7BE1AB37-6FE7-3797-A3D9-C4F988EFBA0F}"/>
+              </a:ext>
+            </a:extLst>
+          </p:cNvPr>
+          <p:cNvPicPr>
+            <a:picLocks noChangeAspect="1"/>
+          </p:cNvPicPr>
+          <p:nvPr/>
+        </p:nvPicPr>
+        <p:blipFill>
+          <a:blip r:embed="rId2">
+            <a:extLst>
+              <a:ext uri="{28A0092B-C50C-407E-A947-70E740481C1C}">
+                <a14:useLocalDpi xmlns:a14="http://schemas.microsoft.com/office/drawing/2010/main" val="0"/>
+              </a:ext>
+            </a:extLst>
+          </a:blip>
+          <a:srcRect/>
+          <a:stretch>
+            <a:fillRect/>
+          </a:stretch>
+        </p:blipFill>
+        <p:spPr bwMode="auto">
+          <a:xfrm>
+            <a:off x="508000" y="165100"/>
+            <a:ext cx="6540500" cy="1633313"/>
+          </a:xfrm>
+          <a:prstGeom prst="rect">
+            <a:avLst/>
+          </a:prstGeom>
+          <a:noFill/>
+          <a:ln>
             <a:noFill/>
-            <a:prstDash val="solid"/>
-            <a:miter lim="800000"/>
           </a:ln>
-          <a:effectLst/>
-          <a:extLst>
-            <a:ext uri="{91240B29-F687-4F45-9708-019B960494DF}">
-              <a14:hiddenLine xmlns:a14="http://schemas.microsoft.com/office/drawing/2010/main" w="19050" cap="flat" cmpd="sng" algn="ctr">
+        </p:spPr>
+      </p:pic>
+      <p:sp>
+        <p:nvSpPr>
+          <p:cNvPr id="3" name="TextBox 2">
+            <a:extLst>
+              <a:ext uri="{FF2B5EF4-FFF2-40B4-BE49-F238E27FC236}">
+                <a16:creationId xmlns:a16="http://schemas.microsoft.com/office/drawing/2014/main" id="{645B7EE2-3CD7-DE2B-A66C-5535F0E01972}"/>
+              </a:ext>
+            </a:extLst>
+          </p:cNvPr>
+          <p:cNvSpPr txBox="1"/>
+          <p:nvPr/>
+        </p:nvSpPr>
+        <p:spPr>
+          <a:xfrm>
+            <a:off x="444500" y="1917700"/>
+            <a:ext cx="6667500" cy="254000"/>
+          </a:xfrm>
+          <a:prstGeom prst="rect">
+            <a:avLst/>
+          </a:prstGeom>
+          <a:noFill/>
+        </p:spPr>
+        <p:txBody>
+          <a:bodyPr vert="horz" wrap="square" lIns="0" tIns="0" rIns="0" bIns="0" rtlCol="0">
+            <a:noAutofit/>
+          </a:bodyPr>
+          <a:lstStyle/>
+          <a:p>
+            <a:pPr algn="ctr"/>
+            <a:r>
+              <a:rPr lang="en-US" sz="1200" b="1">
                 <a:solidFill>
-                  <a:schemeClr val="accent1">
-                    <a:shade val="15000"/>
-                  </a:schemeClr>
+                  <a:srgbClr val="111111"/>
                 </a:solidFill>
-                <a:prstDash val="solid"/>
-                <a:miter lim="800000"/>
-              </a14:hiddenLine>
-            </a:ext>
-          </a:extLst>
+                <a:latin typeface="Times New Roman" panose="02020603050405020304" pitchFamily="18" charset="0"/>
+              </a:rPr>
+              <a:t>CENTRE FOR DISTANCE AND ONLINE EDUCATION (CDOE)</a:t>
+            </a:r>
+          </a:p>
+        </p:txBody>
+      </p:sp>
+      <p:cxnSp>
+        <p:nvCxnSpPr>
+          <p:cNvPr id="4" name="Straight Arrow Connector 3">
+            <a:extLst>
+              <a:ext uri="{FF2B5EF4-FFF2-40B4-BE49-F238E27FC236}">
+                <a16:creationId xmlns:a16="http://schemas.microsoft.com/office/drawing/2014/main" id="{D954059A-4E95-469C-02FF-57D39BCC4547}"/>
+              </a:ext>
+            </a:extLst>
+          </p:cNvPr>
+          <p:cNvCxnSpPr/>
+          <p:nvPr/>
+        </p:nvCxnSpPr>
+        <p:spPr>
+          <a:xfrm>
+            <a:off x="508000" y="2235200"/>
+            <a:ext cx="6540500" cy="0"/>
+          </a:xfrm>
+          <a:prstGeom prst="straightConnector1">
+            <a:avLst/>
+          </a:prstGeom>
+          <a:ln w="10160">
+            <a:solidFill>
+              <a:srgbClr val="555555"/>
+            </a:solidFill>
+          </a:ln>
         </p:spPr>
         <p:style>
           <a:lnRef idx="2">
-            <a:schemeClr val="accent1">
-              <a:shade val="15000"/>
-            </a:schemeClr>
+            <a:schemeClr val="accent1"/>
           </a:lnRef>
-          <a:fillRef idx="1">
+          <a:fillRef idx="0">
             <a:schemeClr val="accent1"/>
           </a:fillRef>
-          <a:effectRef idx="0">
+          <a:effectRef idx="1">
             <a:schemeClr val="accent1"/>
           </a:effectRef>
           <a:fontRef idx="minor">
-            <a:schemeClr val="lt1"/>
+            <a:schemeClr val="tx1"/>
           </a:fontRef>
         </p:style>
-        <p:txBody>
-          <a:bodyPr rtlCol="0" anchor="ctr"/>
+      </p:cxnSp>
+      <p:sp>
+        <p:nvSpPr>
+          <p:cNvPr id="5" name="TextBox 4">
+            <a:extLst>
+              <a:ext uri="{FF2B5EF4-FFF2-40B4-BE49-F238E27FC236}">
+                <a16:creationId xmlns:a16="http://schemas.microsoft.com/office/drawing/2014/main" id="{D06D71F8-3841-31CB-7D6F-C2E4719810B7}"/>
+              </a:ext>
+            </a:extLst>
+          </p:cNvPr>
+          <p:cNvSpPr txBox="1"/>
+          <p:nvPr/>
+        </p:nvSpPr>
+        <p:spPr>
+          <a:xfrm>
+            <a:off x="533400" y="2336800"/>
+            <a:ext cx="3810000" cy="279400"/>
+          </a:xfrm>
+          <a:prstGeom prst="rect">
+            <a:avLst/>
+          </a:prstGeom>
+          <a:noFill/>
+        </p:spPr>
+        <p:txBody>
+          <a:bodyPr vert="horz" wrap="square" lIns="0" tIns="0" rIns="0" bIns="0" rtlCol="0">
+            <a:noAutofit/>
+          </a:bodyPr>
+          <a:lstStyle/>
+          <a:p>
+            <a:r>
+              <a:rPr lang="en-US" sz="1200" b="1">
+                <a:solidFill>
+                  <a:srgbClr val="111111"/>
+                </a:solidFill>
+                <a:latin typeface="Times New Roman" panose="02020603050405020304" pitchFamily="18" charset="0"/>
+              </a:rPr>
+              <a:t>Name of the Learner: Deepak Kumar</a:t>
+            </a:r>
+          </a:p>
+        </p:txBody>
+      </p:sp>
+      <p:sp>
+        <p:nvSpPr>
+          <p:cNvPr id="6" name="TextBox 5">
+            <a:extLst>
+              <a:ext uri="{FF2B5EF4-FFF2-40B4-BE49-F238E27FC236}">
+                <a16:creationId xmlns:a16="http://schemas.microsoft.com/office/drawing/2014/main" id="{1C3A71FF-5FDD-4E96-545F-798CE3282A99}"/>
+              </a:ext>
+            </a:extLst>
+          </p:cNvPr>
+          <p:cNvSpPr txBox="1"/>
+          <p:nvPr/>
+        </p:nvSpPr>
+        <p:spPr>
+          <a:xfrm>
+            <a:off x="4191000" y="2336800"/>
+            <a:ext cx="2832100" cy="279400"/>
+          </a:xfrm>
+          <a:prstGeom prst="rect">
+            <a:avLst/>
+          </a:prstGeom>
+          <a:noFill/>
+        </p:spPr>
+        <p:txBody>
+          <a:bodyPr vert="horz" wrap="square" lIns="0" tIns="0" rIns="0" bIns="0" rtlCol="0">
+            <a:noAutofit/>
+          </a:bodyPr>
+          <a:lstStyle/>
+          <a:p>
+            <a:r>
+              <a:rPr lang="en-US" sz="1200" b="1">
+                <a:solidFill>
+                  <a:srgbClr val="111111"/>
+                </a:solidFill>
+                <a:latin typeface="Times New Roman" panose="02020603050405020304" pitchFamily="18" charset="0"/>
+              </a:rPr>
+              <a:t>Register number: 9224116032</a:t>
+            </a:r>
+          </a:p>
+        </p:txBody>
+      </p:sp>
+      <p:sp>
+        <p:nvSpPr>
+          <p:cNvPr id="7" name="TextBox 6">
+            <a:extLst>
+              <a:ext uri="{FF2B5EF4-FFF2-40B4-BE49-F238E27FC236}">
+                <a16:creationId xmlns:a16="http://schemas.microsoft.com/office/drawing/2014/main" id="{019C54D7-5348-3A02-4B51-C8ABB5893A82}"/>
+              </a:ext>
+            </a:extLst>
+          </p:cNvPr>
+          <p:cNvSpPr txBox="1"/>
+          <p:nvPr/>
+        </p:nvSpPr>
+        <p:spPr>
+          <a:xfrm>
+            <a:off x="533400" y="2679700"/>
+            <a:ext cx="3810000" cy="279400"/>
+          </a:xfrm>
+          <a:prstGeom prst="rect">
+            <a:avLst/>
+          </a:prstGeom>
+          <a:noFill/>
+        </p:spPr>
+        <p:txBody>
+          <a:bodyPr vert="horz" wrap="square" lIns="0" tIns="0" rIns="0" bIns="0" rtlCol="0">
+            <a:noAutofit/>
+          </a:bodyPr>
+          <a:lstStyle/>
+          <a:p>
+            <a:r>
+              <a:rPr lang="en-US" sz="1200" b="1">
+                <a:solidFill>
+                  <a:srgbClr val="111111"/>
+                </a:solidFill>
+                <a:latin typeface="Times New Roman" panose="02020603050405020304" pitchFamily="18" charset="0"/>
+              </a:rPr>
+              <a:t>Name of the Programme: MCA</a:t>
+            </a:r>
+          </a:p>
+        </p:txBody>
+      </p:sp>
+      <p:sp>
+        <p:nvSpPr>
+          <p:cNvPr id="8" name="TextBox 7">
+            <a:extLst>
+              <a:ext uri="{FF2B5EF4-FFF2-40B4-BE49-F238E27FC236}">
+                <a16:creationId xmlns:a16="http://schemas.microsoft.com/office/drawing/2014/main" id="{71BD39DC-B069-A8BF-B38D-E0BEAB0C412C}"/>
+              </a:ext>
+            </a:extLst>
+          </p:cNvPr>
+          <p:cNvSpPr txBox="1"/>
+          <p:nvPr/>
+        </p:nvSpPr>
+        <p:spPr>
+          <a:xfrm>
+            <a:off x="4191000" y="2679700"/>
+            <a:ext cx="2832100" cy="279400"/>
+          </a:xfrm>
+          <a:prstGeom prst="rect">
+            <a:avLst/>
+          </a:prstGeom>
+          <a:noFill/>
+        </p:spPr>
+        <p:txBody>
+          <a:bodyPr vert="horz" wrap="square" lIns="0" tIns="0" rIns="0" bIns="0" rtlCol="0">
+            <a:noAutofit/>
+          </a:bodyPr>
+          <a:lstStyle/>
+          <a:p>
+            <a:r>
+              <a:rPr lang="en-US" sz="1200" b="1">
+                <a:solidFill>
+                  <a:srgbClr val="111111"/>
+                </a:solidFill>
+                <a:latin typeface="Times New Roman" panose="02020603050405020304" pitchFamily="18" charset="0"/>
+              </a:rPr>
+              <a:t>Semester: IV</a:t>
+            </a:r>
+          </a:p>
+        </p:txBody>
+      </p:sp>
+      <p:sp>
+        <p:nvSpPr>
+          <p:cNvPr id="9" name="TextBox 8">
+            <a:extLst>
+              <a:ext uri="{FF2B5EF4-FFF2-40B4-BE49-F238E27FC236}">
+                <a16:creationId xmlns:a16="http://schemas.microsoft.com/office/drawing/2014/main" id="{E5338BE2-A046-7B72-9C8C-ADBB3487B737}"/>
+              </a:ext>
+            </a:extLst>
+          </p:cNvPr>
+          <p:cNvSpPr txBox="1"/>
+          <p:nvPr/>
+        </p:nvSpPr>
+        <p:spPr>
+          <a:xfrm>
+            <a:off x="533400" y="3022600"/>
+            <a:ext cx="3810000" cy="279400"/>
+          </a:xfrm>
+          <a:prstGeom prst="rect">
+            <a:avLst/>
+          </a:prstGeom>
+          <a:noFill/>
+        </p:spPr>
+        <p:txBody>
+          <a:bodyPr vert="horz" wrap="square" lIns="0" tIns="0" rIns="0" bIns="0" rtlCol="0">
+            <a:noAutofit/>
+          </a:bodyPr>
+          <a:lstStyle/>
+          <a:p>
+            <a:r>
+              <a:rPr lang="en-US" sz="1200" b="1">
+                <a:solidFill>
+                  <a:srgbClr val="111111"/>
+                </a:solidFill>
+                <a:latin typeface="Times New Roman" panose="02020603050405020304" pitchFamily="18" charset="0"/>
+              </a:rPr>
+              <a:t>Name of the Course: Project Work</a:t>
+            </a:r>
+          </a:p>
+        </p:txBody>
+      </p:sp>
+      <p:sp>
+        <p:nvSpPr>
+          <p:cNvPr id="10" name="TextBox 9">
+            <a:extLst>
+              <a:ext uri="{FF2B5EF4-FFF2-40B4-BE49-F238E27FC236}">
+                <a16:creationId xmlns:a16="http://schemas.microsoft.com/office/drawing/2014/main" id="{195D13E7-EEFD-2BC8-B4E9-1E9FF6AAA787}"/>
+              </a:ext>
+            </a:extLst>
+          </p:cNvPr>
+          <p:cNvSpPr txBox="1"/>
+          <p:nvPr/>
+        </p:nvSpPr>
+        <p:spPr>
+          <a:xfrm>
+            <a:off x="4191000" y="3022600"/>
+            <a:ext cx="2832100" cy="279400"/>
+          </a:xfrm>
+          <a:prstGeom prst="rect">
+            <a:avLst/>
+          </a:prstGeom>
+          <a:noFill/>
+        </p:spPr>
+        <p:txBody>
+          <a:bodyPr vert="horz" wrap="square" lIns="0" tIns="0" rIns="0" bIns="0" rtlCol="0">
+            <a:noAutofit/>
+          </a:bodyPr>
+          <a:lstStyle/>
+          <a:p>
+            <a:r>
+              <a:rPr lang="en-US" sz="1200" b="1">
+                <a:solidFill>
+                  <a:srgbClr val="111111"/>
+                </a:solidFill>
+                <a:latin typeface="Times New Roman" panose="02020603050405020304" pitchFamily="18" charset="0"/>
+              </a:rPr>
+              <a:t>Batch: Jan 2024</a:t>
+            </a:r>
+          </a:p>
+        </p:txBody>
+      </p:sp>
+      <p:sp>
+        <p:nvSpPr>
+          <p:cNvPr id="11" name="TextBox 10">
+            <a:extLst>
+              <a:ext uri="{FF2B5EF4-FFF2-40B4-BE49-F238E27FC236}">
+                <a16:creationId xmlns:a16="http://schemas.microsoft.com/office/drawing/2014/main" id="{06D34926-78EC-E3E5-7B21-F057AECFB250}"/>
+              </a:ext>
+            </a:extLst>
+          </p:cNvPr>
+          <p:cNvSpPr txBox="1"/>
+          <p:nvPr/>
+        </p:nvSpPr>
+        <p:spPr>
+          <a:xfrm>
+            <a:off x="533400" y="3365500"/>
+            <a:ext cx="3810000" cy="279400"/>
+          </a:xfrm>
+          <a:prstGeom prst="rect">
+            <a:avLst/>
+          </a:prstGeom>
+          <a:noFill/>
+        </p:spPr>
+        <p:txBody>
+          <a:bodyPr vert="horz" wrap="square" lIns="0" tIns="0" rIns="0" bIns="0" rtlCol="0">
+            <a:noAutofit/>
+          </a:bodyPr>
+          <a:lstStyle/>
+          <a:p>
+            <a:r>
+              <a:rPr lang="en-US" sz="1200" b="1">
+                <a:solidFill>
+                  <a:srgbClr val="111111"/>
+                </a:solidFill>
+                <a:latin typeface="Times New Roman" panose="02020603050405020304" pitchFamily="18" charset="0"/>
+              </a:rPr>
+              <a:t>Course Code: 223MCA4201</a:t>
+            </a:r>
+          </a:p>
+        </p:txBody>
+      </p:sp>
+      <p:sp>
+        <p:nvSpPr>
+          <p:cNvPr id="12" name="TextBox 11">
+            <a:extLst>
+              <a:ext uri="{FF2B5EF4-FFF2-40B4-BE49-F238E27FC236}">
+                <a16:creationId xmlns:a16="http://schemas.microsoft.com/office/drawing/2014/main" id="{1B1A3E19-B477-AAD9-8A29-B2C401C9D5CE}"/>
+              </a:ext>
+            </a:extLst>
+          </p:cNvPr>
+          <p:cNvSpPr txBox="1"/>
+          <p:nvPr/>
+        </p:nvSpPr>
+        <p:spPr>
+          <a:xfrm>
+            <a:off x="4191000" y="3365500"/>
+            <a:ext cx="2832100" cy="279400"/>
+          </a:xfrm>
+          <a:prstGeom prst="rect">
+            <a:avLst/>
+          </a:prstGeom>
+          <a:noFill/>
+        </p:spPr>
+        <p:txBody>
+          <a:bodyPr vert="horz" wrap="square" lIns="0" tIns="0" rIns="0" bIns="0" rtlCol="0">
+            <a:noAutofit/>
+          </a:bodyPr>
+          <a:lstStyle/>
+          <a:p>
+            <a:r>
+              <a:rPr lang="en-US" sz="1200" b="1">
+                <a:solidFill>
+                  <a:srgbClr val="111111"/>
+                </a:solidFill>
+                <a:latin typeface="Times New Roman" panose="02020603050405020304" pitchFamily="18" charset="0"/>
+              </a:rPr>
+              <a:t>Regulation: 2022</a:t>
+            </a:r>
+          </a:p>
+        </p:txBody>
+      </p:sp>
+      <p:sp>
+        <p:nvSpPr>
+          <p:cNvPr id="13" name="TextBox 12">
+            <a:extLst>
+              <a:ext uri="{FF2B5EF4-FFF2-40B4-BE49-F238E27FC236}">
+                <a16:creationId xmlns:a16="http://schemas.microsoft.com/office/drawing/2014/main" id="{BC45133E-A40A-ADCE-27D6-6AD94AE2B55C}"/>
+              </a:ext>
+            </a:extLst>
+          </p:cNvPr>
+          <p:cNvSpPr txBox="1"/>
+          <p:nvPr/>
+        </p:nvSpPr>
+        <p:spPr>
+          <a:xfrm>
+            <a:off x="533400" y="3708400"/>
+            <a:ext cx="6477000" cy="304800"/>
+          </a:xfrm>
+          <a:prstGeom prst="rect">
+            <a:avLst/>
+          </a:prstGeom>
+          <a:noFill/>
+        </p:spPr>
+        <p:txBody>
+          <a:bodyPr vert="horz" wrap="square" lIns="0" tIns="0" rIns="0" bIns="0" rtlCol="0">
+            <a:noAutofit/>
+          </a:bodyPr>
+          <a:lstStyle/>
+          <a:p>
+            <a:r>
+              <a:rPr lang="en-US" sz="1200" b="1">
+                <a:solidFill>
+                  <a:srgbClr val="111111"/>
+                </a:solidFill>
+                <a:latin typeface="Times New Roman" panose="02020603050405020304" pitchFamily="18" charset="0"/>
+              </a:rPr>
+              <a:t>Project Title: MaatriCare</a:t>
+            </a:r>
+          </a:p>
+        </p:txBody>
+      </p:sp>
+      <p:sp>
+        <p:nvSpPr>
+          <p:cNvPr id="14" name="TextBox 13">
+            <a:extLst>
+              <a:ext uri="{FF2B5EF4-FFF2-40B4-BE49-F238E27FC236}">
+                <a16:creationId xmlns:a16="http://schemas.microsoft.com/office/drawing/2014/main" id="{6C7FC2D3-9C38-2235-7960-D095CFCBBA3C}"/>
+              </a:ext>
+            </a:extLst>
+          </p:cNvPr>
+          <p:cNvSpPr txBox="1"/>
+          <p:nvPr/>
+        </p:nvSpPr>
+        <p:spPr>
+          <a:xfrm>
+            <a:off x="533400" y="4114800"/>
+            <a:ext cx="6477000" cy="279400"/>
+          </a:xfrm>
+          <a:prstGeom prst="rect">
+            <a:avLst/>
+          </a:prstGeom>
+          <a:noFill/>
+        </p:spPr>
+        <p:txBody>
+          <a:bodyPr vert="horz" wrap="square" lIns="0" tIns="0" rIns="0" bIns="0" rtlCol="0">
+            <a:noAutofit/>
+          </a:bodyPr>
           <a:lstStyle/>
           <a:p>
             <a:pPr algn="ctr"/>
-            <a:endParaRPr lang="en-US"/>
-          </a:p>
-        </p:txBody>
-      </p:sp>
-      <p:sp>
-        <p:nvSpPr>
-          <p:cNvPr id="3" name="TextBox 2">
-            <a:extLst>
-              <a:ext uri="{FF2B5EF4-FFF2-40B4-BE49-F238E27FC236}">
-                <a16:creationId xmlns:a16="http://schemas.microsoft.com/office/drawing/2014/main" id="{A77041B9-627E-83A9-384B-B9502E0305DE}"/>
-              </a:ext>
-            </a:extLst>
-          </p:cNvPr>
-          <p:cNvSpPr txBox="1"/>
-          <p:nvPr/>
-        </p:nvSpPr>
-        <p:spPr>
-          <a:xfrm>
-            <a:off x="609600" y="482600"/>
-            <a:ext cx="4826000" cy="338554"/>
-          </a:xfrm>
-          <a:prstGeom prst="rect">
-            <a:avLst/>
-          </a:prstGeom>
-          <a:noFill/>
-        </p:spPr>
-        <p:txBody>
-          <a:bodyPr vert="horz" wrap="square" lIns="0" tIns="0" rIns="0" bIns="0" rtlCol="0">
-            <a:spAutoFit/>
-          </a:bodyPr>
-          <a:lstStyle/>
-          <a:p>
-            <a:r>
-              <a:rPr lang="en-US" sz="2200" b="1">
-                <a:solidFill>
-                  <a:srgbClr val="173B38"/>
-                </a:solidFill>
-                <a:latin typeface="Aptos" panose="020B0004020202020204" pitchFamily="34" charset="0"/>
-              </a:rPr>
-              <a:t>MAATRICARE</a:t>
-            </a:r>
-          </a:p>
-        </p:txBody>
-      </p:sp>
-      <p:sp>
-        <p:nvSpPr>
-          <p:cNvPr id="4" name="TextBox 3">
-            <a:extLst>
-              <a:ext uri="{FF2B5EF4-FFF2-40B4-BE49-F238E27FC236}">
-                <a16:creationId xmlns:a16="http://schemas.microsoft.com/office/drawing/2014/main" id="{0E5D282F-7AE3-FB97-F741-51FAEA486DA4}"/>
-              </a:ext>
-            </a:extLst>
-          </p:cNvPr>
-          <p:cNvSpPr txBox="1"/>
-          <p:nvPr/>
-        </p:nvSpPr>
-        <p:spPr>
-          <a:xfrm>
-            <a:off x="609600" y="889000"/>
-            <a:ext cx="5969000" cy="215444"/>
-          </a:xfrm>
-          <a:prstGeom prst="rect">
-            <a:avLst/>
-          </a:prstGeom>
-          <a:noFill/>
-        </p:spPr>
-        <p:txBody>
-          <a:bodyPr vert="horz" wrap="square" lIns="0" tIns="0" rIns="0" bIns="0" rtlCol="0">
-            <a:spAutoFit/>
-          </a:bodyPr>
-          <a:lstStyle/>
-          <a:p>
             <a:r>
               <a:rPr lang="en-US" sz="1400" b="1">
                 <a:solidFill>
-                  <a:srgbClr val="203A3A"/>
+                  <a:srgbClr val="111111"/>
                 </a:solidFill>
-                <a:latin typeface="Aptos" panose="020B0004020202020204" pitchFamily="34" charset="0"/>
+                <a:latin typeface="Times New Roman" panose="02020603050405020304" pitchFamily="18" charset="0"/>
               </a:rPr>
-              <a:t>Pregnancy Support and Care-Coordination Application</a:t>
-            </a:r>
-          </a:p>
-        </p:txBody>
-      </p:sp>
-      <p:sp>
-        <p:nvSpPr>
-          <p:cNvPr id="5" name="Rectangle: Rounded Corners 4">
-            <a:extLst>
-              <a:ext uri="{FF2B5EF4-FFF2-40B4-BE49-F238E27FC236}">
-                <a16:creationId xmlns:a16="http://schemas.microsoft.com/office/drawing/2014/main" id="{8603E434-1DAE-A2DF-9A0B-3C86A46249B9}"/>
-              </a:ext>
-            </a:extLst>
-          </p:cNvPr>
-          <p:cNvSpPr/>
-          <p:nvPr/>
-        </p:nvSpPr>
-        <p:spPr>
-          <a:xfrm>
-            <a:off x="5638800" y="495300"/>
-            <a:ext cx="1320800" cy="711200"/>
-          </a:xfrm>
-          <a:prstGeom prst="roundRect">
-            <a:avLst/>
-          </a:prstGeom>
-          <a:solidFill>
-            <a:srgbClr val="F2F7F4"/>
-          </a:solidFill>
-          <a:ln>
+              <a:t>Abstract</a:t>
+            </a:r>
+          </a:p>
+        </p:txBody>
+      </p:sp>
+      <p:sp>
+        <p:nvSpPr>
+          <p:cNvPr id="15" name="TextBox 14">
+            <a:extLst>
+              <a:ext uri="{FF2B5EF4-FFF2-40B4-BE49-F238E27FC236}">
+                <a16:creationId xmlns:a16="http://schemas.microsoft.com/office/drawing/2014/main" id="{DEFA4E73-E022-6E3A-4AC6-AD1E583449B6}"/>
+              </a:ext>
+            </a:extLst>
+          </p:cNvPr>
+          <p:cNvSpPr txBox="1"/>
+          <p:nvPr/>
+        </p:nvSpPr>
+        <p:spPr>
+          <a:xfrm>
+            <a:off x="609600" y="4483100"/>
+            <a:ext cx="6337300" cy="2616200"/>
+          </a:xfrm>
+          <a:prstGeom prst="rect">
+            <a:avLst/>
+          </a:prstGeom>
+          <a:noFill/>
+        </p:spPr>
+        <p:txBody>
+          <a:bodyPr vert="horz" wrap="square" lIns="0" tIns="0" rIns="0" bIns="0" rtlCol="0">
+            <a:noAutofit/>
+          </a:bodyPr>
+          <a:lstStyle/>
+          <a:p>
+            <a:pPr algn="just">
+              <a:lnSpc>
+                <a:spcPct val="150000"/>
+              </a:lnSpc>
+            </a:pPr>
+            <a:r>
+              <a:rPr lang="en-US" sz="1200">
+                <a:solidFill>
+                  <a:srgbClr val="111111"/>
+                </a:solidFill>
+                <a:latin typeface="Times New Roman" panose="02020603050405020304" pitchFamily="18" charset="0"/>
+              </a:rPr>
+              <a:t>Pregnancy involves regular appointments, daily care, personal records, and communication with healthcare professionals. MaatriCare is an authenticated web application that brings these activities into one workspace. It supports pregnancy profiles, appointments and visit questions, daily wellbeing, a private symptom journal, milestones, educational resources, summaries, emergency contacts, and reminders. Users control report content and may share selected summaries through revocable, time-limited links. The React and TypeScript frontend uses a Java Spring Boot REST backend with JWT security, JPA, and relational storage (MySQL locally; PostgreSQL configuration). Optional Web Push uses Asia/Kolkata schedules and requires VAPID keys and HTTPS. MaatriCare organizes user-entered information; it does not diagnose, recommend treatment, or replace professional or emergency care.</a:t>
+            </a:r>
+          </a:p>
+        </p:txBody>
+      </p:sp>
+      <p:sp>
+        <p:nvSpPr>
+          <p:cNvPr id="16" name="TextBox 15">
+            <a:extLst>
+              <a:ext uri="{FF2B5EF4-FFF2-40B4-BE49-F238E27FC236}">
+                <a16:creationId xmlns:a16="http://schemas.microsoft.com/office/drawing/2014/main" id="{2A01E861-EF3F-16A8-E08F-CE6FFA446957}"/>
+              </a:ext>
+            </a:extLst>
+          </p:cNvPr>
+          <p:cNvSpPr txBox="1"/>
+          <p:nvPr/>
+        </p:nvSpPr>
+        <p:spPr>
+          <a:xfrm>
+            <a:off x="533400" y="7353300"/>
+            <a:ext cx="6477000" cy="254000"/>
+          </a:xfrm>
+          <a:prstGeom prst="rect">
+            <a:avLst/>
+          </a:prstGeom>
+          <a:noFill/>
+        </p:spPr>
+        <p:txBody>
+          <a:bodyPr vert="horz" wrap="square" lIns="0" tIns="0" rIns="0" bIns="0" rtlCol="0">
+            <a:noAutofit/>
+          </a:bodyPr>
+          <a:lstStyle/>
+          <a:p>
+            <a:r>
+              <a:rPr lang="en-US" sz="1200" b="1">
+                <a:solidFill>
+                  <a:srgbClr val="111111"/>
+                </a:solidFill>
+                <a:latin typeface="Times New Roman" panose="02020603050405020304" pitchFamily="18" charset="0"/>
+              </a:rPr>
+              <a:t>Tools &amp; Technologies Used</a:t>
+            </a:r>
+          </a:p>
+        </p:txBody>
+      </p:sp>
+      <p:sp>
+        <p:nvSpPr>
+          <p:cNvPr id="17" name="TextBox 16">
+            <a:extLst>
+              <a:ext uri="{FF2B5EF4-FFF2-40B4-BE49-F238E27FC236}">
+                <a16:creationId xmlns:a16="http://schemas.microsoft.com/office/drawing/2014/main" id="{B53D2C9A-C8F0-C013-D5FE-C63150AA29EB}"/>
+              </a:ext>
+            </a:extLst>
+          </p:cNvPr>
+          <p:cNvSpPr txBox="1"/>
+          <p:nvPr/>
+        </p:nvSpPr>
+        <p:spPr>
+          <a:xfrm>
+            <a:off x="673100" y="7658100"/>
+            <a:ext cx="6273800" cy="914400"/>
+          </a:xfrm>
+          <a:prstGeom prst="rect">
+            <a:avLst/>
+          </a:prstGeom>
+          <a:noFill/>
+        </p:spPr>
+        <p:txBody>
+          <a:bodyPr vert="horz" wrap="square" lIns="0" tIns="0" rIns="0" bIns="0" rtlCol="0">
+            <a:noAutofit/>
+          </a:bodyPr>
+          <a:lstStyle/>
+          <a:p>
+            <a:pPr>
+              <a:lnSpc>
+                <a:spcPct val="150000"/>
+              </a:lnSpc>
+            </a:pPr>
+            <a:r>
+              <a:rPr lang="en-US" sz="1200">
+                <a:solidFill>
+                  <a:srgbClr val="111111"/>
+                </a:solidFill>
+                <a:latin typeface="Times New Roman" panose="02020603050405020304" pitchFamily="18" charset="0"/>
+              </a:rPr>
+              <a:t>Frontend (Design): React, TypeScript, Vite</a:t>
+            </a:r>
+          </a:p>
+          <a:p>
+            <a:pPr>
+              <a:lnSpc>
+                <a:spcPct val="150000"/>
+              </a:lnSpc>
+            </a:pPr>
+            <a:r>
+              <a:rPr lang="en-US" sz="1200">
+                <a:solidFill>
+                  <a:srgbClr val="111111"/>
+                </a:solidFill>
+                <a:latin typeface="Times New Roman" panose="02020603050405020304" pitchFamily="18" charset="0"/>
+              </a:rPr>
+              <a:t>Backend (API): Java, Spring Boot REST</a:t>
+            </a:r>
+          </a:p>
+          <a:p>
+            <a:pPr>
+              <a:lnSpc>
+                <a:spcPct val="150000"/>
+              </a:lnSpc>
+            </a:pPr>
+            <a:r>
+              <a:rPr lang="en-US" sz="1200">
+                <a:solidFill>
+                  <a:srgbClr val="111111"/>
+                </a:solidFill>
+                <a:latin typeface="Times New Roman" panose="02020603050405020304" pitchFamily="18" charset="0"/>
+              </a:rPr>
+              <a:t>Database: MySQL (local), PostgreSQL configuration</a:t>
+            </a:r>
+          </a:p>
+          <a:p>
+            <a:pPr>
+              <a:lnSpc>
+                <a:spcPct val="150000"/>
+              </a:lnSpc>
+            </a:pPr>
+            <a:r>
+              <a:rPr lang="en-US" sz="1200">
+                <a:solidFill>
+                  <a:srgbClr val="111111"/>
+                </a:solidFill>
+                <a:latin typeface="Times New Roman" panose="02020603050405020304" pitchFamily="18" charset="0"/>
+              </a:rPr>
+              <a:t>Security / Testing: Spring Security, JWT, H2</a:t>
+            </a:r>
+          </a:p>
+        </p:txBody>
+      </p:sp>
+      <p:sp>
+        <p:nvSpPr>
+          <p:cNvPr id="18" name="TextBox 17">
+            <a:extLst>
+              <a:ext uri="{FF2B5EF4-FFF2-40B4-BE49-F238E27FC236}">
+                <a16:creationId xmlns:a16="http://schemas.microsoft.com/office/drawing/2014/main" id="{022670B2-3788-FE55-D5CE-FD7592FC9792}"/>
+              </a:ext>
+            </a:extLst>
+          </p:cNvPr>
+          <p:cNvSpPr txBox="1"/>
+          <p:nvPr/>
+        </p:nvSpPr>
+        <p:spPr>
+          <a:xfrm>
+            <a:off x="533400" y="8788400"/>
+            <a:ext cx="6477000" cy="254000"/>
+          </a:xfrm>
+          <a:prstGeom prst="rect">
+            <a:avLst/>
+          </a:prstGeom>
+          <a:noFill/>
+        </p:spPr>
+        <p:txBody>
+          <a:bodyPr vert="horz" wrap="square" lIns="0" tIns="0" rIns="0" bIns="0" rtlCol="0">
+            <a:noAutofit/>
+          </a:bodyPr>
+          <a:lstStyle/>
+          <a:p>
+            <a:pPr algn="ctr"/>
+            <a:r>
+              <a:rPr lang="en-US" sz="1200" b="1">
+                <a:solidFill>
+                  <a:srgbClr val="111111"/>
+                </a:solidFill>
+                <a:latin typeface="Times New Roman" panose="02020603050405020304" pitchFamily="18" charset="0"/>
+              </a:rPr>
+              <a:t>Approval Committee</a:t>
+            </a:r>
+          </a:p>
+        </p:txBody>
+      </p:sp>
+      <p:cxnSp>
+        <p:nvCxnSpPr>
+          <p:cNvPr id="19" name="Straight Arrow Connector 18">
+            <a:extLst>
+              <a:ext uri="{FF2B5EF4-FFF2-40B4-BE49-F238E27FC236}">
+                <a16:creationId xmlns:a16="http://schemas.microsoft.com/office/drawing/2014/main" id="{8F4FBA4E-C71B-5824-6F1E-8B04408CFEF6}"/>
+              </a:ext>
+            </a:extLst>
+          </p:cNvPr>
+          <p:cNvCxnSpPr/>
+          <p:nvPr/>
+        </p:nvCxnSpPr>
+        <p:spPr>
+          <a:xfrm>
+            <a:off x="533400" y="9601200"/>
+            <a:ext cx="1879600" cy="0"/>
+          </a:xfrm>
+          <a:prstGeom prst="straightConnector1">
+            <a:avLst/>
+          </a:prstGeom>
+          <a:ln w="10160">
             <a:solidFill>
-              <a:srgbClr val="B9CEC5"/>
+              <a:srgbClr val="333333"/>
             </a:solidFill>
           </a:ln>
         </p:spPr>
         <p:style>
           <a:lnRef idx="2">
-            <a:schemeClr val="accent1">
-              <a:shade val="15000"/>
-            </a:schemeClr>
+            <a:schemeClr val="accent1"/>
           </a:lnRef>
-          <a:fillRef idx="1">
+          <a:fillRef idx="0">
             <a:schemeClr val="accent1"/>
           </a:fillRef>
-          <a:effectRef idx="0">
+          <a:effectRef idx="1">
             <a:schemeClr val="accent1"/>
           </a:effectRef>
           <a:fontRef idx="minor">
-            <a:schemeClr val="lt1"/>
+            <a:schemeClr val="tx1"/>
           </a:fontRef>
         </p:style>
-        <p:txBody>
-          <a:bodyPr rtlCol="0" anchor="ctr"/>
+      </p:cxnSp>
+      <p:cxnSp>
+        <p:nvCxnSpPr>
+          <p:cNvPr id="20" name="Straight Arrow Connector 19">
+            <a:extLst>
+              <a:ext uri="{FF2B5EF4-FFF2-40B4-BE49-F238E27FC236}">
+                <a16:creationId xmlns:a16="http://schemas.microsoft.com/office/drawing/2014/main" id="{64409A66-8BD6-B68D-1917-D31C7E544EC5}"/>
+              </a:ext>
+            </a:extLst>
+          </p:cNvPr>
+          <p:cNvCxnSpPr/>
+          <p:nvPr/>
+        </p:nvCxnSpPr>
+        <p:spPr>
+          <a:xfrm>
+            <a:off x="2819400" y="9601200"/>
+            <a:ext cx="1955800" cy="0"/>
+          </a:xfrm>
+          <a:prstGeom prst="straightConnector1">
+            <a:avLst/>
+          </a:prstGeom>
+          <a:ln w="10160">
+            <a:solidFill>
+              <a:srgbClr val="333333"/>
+            </a:solidFill>
+          </a:ln>
+        </p:spPr>
+        <p:style>
+          <a:lnRef idx="2">
+            <a:schemeClr val="accent1"/>
+          </a:lnRef>
+          <a:fillRef idx="0">
+            <a:schemeClr val="accent1"/>
+          </a:fillRef>
+          <a:effectRef idx="1">
+            <a:schemeClr val="accent1"/>
+          </a:effectRef>
+          <a:fontRef idx="minor">
+            <a:schemeClr val="tx1"/>
+          </a:fontRef>
+        </p:style>
+      </p:cxnSp>
+      <p:cxnSp>
+        <p:nvCxnSpPr>
+          <p:cNvPr id="21" name="Straight Arrow Connector 20">
+            <a:extLst>
+              <a:ext uri="{FF2B5EF4-FFF2-40B4-BE49-F238E27FC236}">
+                <a16:creationId xmlns:a16="http://schemas.microsoft.com/office/drawing/2014/main" id="{A811444A-E471-C305-FF10-B0C363B837E7}"/>
+              </a:ext>
+            </a:extLst>
+          </p:cNvPr>
+          <p:cNvCxnSpPr/>
+          <p:nvPr/>
+        </p:nvCxnSpPr>
+        <p:spPr>
+          <a:xfrm>
+            <a:off x="5143500" y="9601200"/>
+            <a:ext cx="1879600" cy="0"/>
+          </a:xfrm>
+          <a:prstGeom prst="straightConnector1">
+            <a:avLst/>
+          </a:prstGeom>
+          <a:ln w="10160">
+            <a:solidFill>
+              <a:srgbClr val="333333"/>
+            </a:solidFill>
+          </a:ln>
+        </p:spPr>
+        <p:style>
+          <a:lnRef idx="2">
+            <a:schemeClr val="accent1"/>
+          </a:lnRef>
+          <a:fillRef idx="0">
+            <a:schemeClr val="accent1"/>
+          </a:fillRef>
+          <a:effectRef idx="1">
+            <a:schemeClr val="accent1"/>
+          </a:effectRef>
+          <a:fontRef idx="minor">
+            <a:schemeClr val="tx1"/>
+          </a:fontRef>
+        </p:style>
+      </p:cxnSp>
+      <p:sp>
+        <p:nvSpPr>
+          <p:cNvPr id="22" name="TextBox 21">
+            <a:extLst>
+              <a:ext uri="{FF2B5EF4-FFF2-40B4-BE49-F238E27FC236}">
+                <a16:creationId xmlns:a16="http://schemas.microsoft.com/office/drawing/2014/main" id="{399DBADF-8E7A-F732-DD1C-6BDF11A84C2D}"/>
+              </a:ext>
+            </a:extLst>
+          </p:cNvPr>
+          <p:cNvSpPr txBox="1"/>
+          <p:nvPr/>
+        </p:nvSpPr>
+        <p:spPr>
+          <a:xfrm>
+            <a:off x="444500" y="9690100"/>
+            <a:ext cx="2032000" cy="304800"/>
+          </a:xfrm>
+          <a:prstGeom prst="rect">
+            <a:avLst/>
+          </a:prstGeom>
+          <a:noFill/>
+        </p:spPr>
+        <p:txBody>
+          <a:bodyPr vert="horz" wrap="square" lIns="0" tIns="0" rIns="0" bIns="0" rtlCol="0">
+            <a:noAutofit/>
+          </a:bodyPr>
           <a:lstStyle/>
           <a:p>
             <a:pPr algn="ctr"/>
-            <a:endParaRPr lang="en-US"/>
-          </a:p>
-        </p:txBody>
-      </p:sp>
-      <p:sp>
-        <p:nvSpPr>
-          <p:cNvPr id="6" name="TextBox 5">
-            <a:extLst>
-              <a:ext uri="{FF2B5EF4-FFF2-40B4-BE49-F238E27FC236}">
-                <a16:creationId xmlns:a16="http://schemas.microsoft.com/office/drawing/2014/main" id="{3EBA8E7A-563F-2CC6-8979-DB67D359A06A}"/>
-              </a:ext>
-            </a:extLst>
-          </p:cNvPr>
-          <p:cNvSpPr txBox="1"/>
-          <p:nvPr/>
-        </p:nvSpPr>
-        <p:spPr>
-          <a:xfrm>
-            <a:off x="5753100" y="635000"/>
-            <a:ext cx="1092200" cy="246221"/>
-          </a:xfrm>
-          <a:prstGeom prst="rect">
-            <a:avLst/>
-          </a:prstGeom>
-          <a:noFill/>
-        </p:spPr>
-        <p:txBody>
-          <a:bodyPr vert="horz" wrap="square" lIns="0" tIns="0" rIns="0" bIns="0" rtlCol="0">
-            <a:spAutoFit/>
-          </a:bodyPr>
-          <a:lstStyle/>
-          <a:p>
-            <a:r>
-              <a:rPr lang="en-US" sz="800" b="1">
-                <a:solidFill>
-                  <a:srgbClr val="526965"/>
-                </a:solidFill>
-                <a:latin typeface="Aptos" panose="020B0004020202020204" pitchFamily="34" charset="0"/>
-              </a:rPr>
-              <a:t>COLLEGE LOGO</a:t>
-            </a:r>
-          </a:p>
-          <a:p>
-            <a:r>
-              <a:rPr lang="en-US" sz="800" b="1">
-                <a:solidFill>
-                  <a:srgbClr val="526965"/>
-                </a:solidFill>
-                <a:latin typeface="Aptos" panose="020B0004020202020204" pitchFamily="34" charset="0"/>
-              </a:rPr>
-              <a:t>PLACEHOLDER</a:t>
-            </a:r>
-          </a:p>
-        </p:txBody>
-      </p:sp>
-      <p:sp>
-        <p:nvSpPr>
-          <p:cNvPr id="7" name="TextBox 6">
-            <a:extLst>
-              <a:ext uri="{FF2B5EF4-FFF2-40B4-BE49-F238E27FC236}">
-                <a16:creationId xmlns:a16="http://schemas.microsoft.com/office/drawing/2014/main" id="{A3BBA18B-6B54-F1C4-884D-2A64C1F1A76E}"/>
-              </a:ext>
-            </a:extLst>
-          </p:cNvPr>
-          <p:cNvSpPr txBox="1"/>
-          <p:nvPr/>
-        </p:nvSpPr>
-        <p:spPr>
-          <a:xfrm>
-            <a:off x="609600" y="1485900"/>
-            <a:ext cx="6350000" cy="276999"/>
-          </a:xfrm>
-          <a:prstGeom prst="rect">
-            <a:avLst/>
-          </a:prstGeom>
-          <a:noFill/>
-        </p:spPr>
-        <p:txBody>
-          <a:bodyPr vert="horz" wrap="square" lIns="0" tIns="0" rIns="0" bIns="0" rtlCol="0">
-            <a:spAutoFit/>
-          </a:bodyPr>
-          <a:lstStyle/>
-          <a:p>
             <a:r>
               <a:rPr lang="en-US" sz="900">
                 <a:solidFill>
-                  <a:srgbClr val="526965"/>
+                  <a:srgbClr val="111111"/>
                 </a:solidFill>
-                <a:latin typeface="Aptos" panose="020B0004020202020204" pitchFamily="34" charset="0"/>
+                <a:latin typeface="Times New Roman" panose="02020603050405020304" pitchFamily="18" charset="0"/>
               </a:rPr>
-              <a:t>Student: Deepak Kumar  |  Register No.: 9224116032</a:t>
-            </a:r>
-          </a:p>
-          <a:p>
+              <a:t>Internal Examiner</a:t>
+            </a:r>
+          </a:p>
+        </p:txBody>
+      </p:sp>
+      <p:sp>
+        <p:nvSpPr>
+          <p:cNvPr id="23" name="TextBox 22">
+            <a:extLst>
+              <a:ext uri="{FF2B5EF4-FFF2-40B4-BE49-F238E27FC236}">
+                <a16:creationId xmlns:a16="http://schemas.microsoft.com/office/drawing/2014/main" id="{8D67A0BA-3C6B-C995-986B-146E1ED414BC}"/>
+              </a:ext>
+            </a:extLst>
+          </p:cNvPr>
+          <p:cNvSpPr txBox="1"/>
+          <p:nvPr/>
+        </p:nvSpPr>
+        <p:spPr>
+          <a:xfrm>
+            <a:off x="2705100" y="9690100"/>
+            <a:ext cx="2159000" cy="304800"/>
+          </a:xfrm>
+          <a:prstGeom prst="rect">
+            <a:avLst/>
+          </a:prstGeom>
+          <a:noFill/>
+        </p:spPr>
+        <p:txBody>
+          <a:bodyPr vert="horz" wrap="square" lIns="0" tIns="0" rIns="0" bIns="0" rtlCol="0">
+            <a:noAutofit/>
+          </a:bodyPr>
+          <a:lstStyle/>
+          <a:p>
+            <a:pPr algn="ctr"/>
             <a:r>
               <a:rPr lang="en-US" sz="900">
                 <a:solidFill>
-                  <a:srgbClr val="526965"/>
+                  <a:srgbClr val="111111"/>
                 </a:solidFill>
-                <a:latin typeface="Aptos" panose="020B0004020202020204" pitchFamily="34" charset="0"/>
+                <a:latin typeface="Times New Roman" panose="02020603050405020304" pitchFamily="18" charset="0"/>
               </a:rPr>
-              <a:t>Department: Computer Applications  |  Guide: [FILL]</a:t>
-            </a:r>
-          </a:p>
-        </p:txBody>
-      </p:sp>
-      <p:sp>
-        <p:nvSpPr>
-          <p:cNvPr id="8" name="TextBox 7">
-            <a:extLst>
-              <a:ext uri="{FF2B5EF4-FFF2-40B4-BE49-F238E27FC236}">
-                <a16:creationId xmlns:a16="http://schemas.microsoft.com/office/drawing/2014/main" id="{31FE6D34-EC6E-F754-32C2-479E8C87BB82}"/>
+              <a:t>Deputy Director - CDOE</a:t>
+            </a:r>
+          </a:p>
+        </p:txBody>
+      </p:sp>
+      <p:sp>
+        <p:nvSpPr>
+          <p:cNvPr id="24" name="TextBox 23">
+            <a:extLst>
+              <a:ext uri="{FF2B5EF4-FFF2-40B4-BE49-F238E27FC236}">
+                <a16:creationId xmlns:a16="http://schemas.microsoft.com/office/drawing/2014/main" id="{B4CD0937-7345-D66B-88DD-8DC878F04977}"/>
               </a:ext>
             </a:extLst>
           </p:cNvPr>
@@ -3640,8 +4292,8 @@
         </p:nvSpPr>
         <p:spPr>
           <a:xfrm>
-            <a:off x="609600" y="2070100"/>
-            <a:ext cx="6350000" cy="138499"/>
+            <a:off x="5080000" y="9690100"/>
+            <a:ext cx="2032000" cy="304800"/>
           </a:xfrm>
           <a:prstGeom prst="rect">
             <a:avLst/>
@@ -3650,392 +4302,19 @@
         </p:spPr>
         <p:txBody>
           <a:bodyPr vert="horz" wrap="square" lIns="0" tIns="0" rIns="0" bIns="0" rtlCol="0">
-            <a:spAutoFit/>
+            <a:noAutofit/>
           </a:bodyPr>
           <a:lstStyle/>
           <a:p>
+            <a:pPr algn="ctr"/>
             <a:r>
               <a:rPr lang="en-US" sz="900">
                 <a:solidFill>
-                  <a:srgbClr val="526965"/>
+                  <a:srgbClr val="111111"/>
                 </a:solidFill>
-                <a:latin typeface="Aptos" panose="020B0004020202020204" pitchFamily="34" charset="0"/>
+                <a:latin typeface="Times New Roman" panose="02020603050405020304" pitchFamily="18" charset="0"/>
               </a:rPr>
-              <a:t>Semester: [FILL]  |  Batch: [FILL]  |  KARE / CDOE</a:t>
-            </a:r>
-          </a:p>
-        </p:txBody>
-      </p:sp>
-      <p:sp>
-        <p:nvSpPr>
-          <p:cNvPr id="9" name="Rectangle 8">
-            <a:extLst>
-              <a:ext uri="{FF2B5EF4-FFF2-40B4-BE49-F238E27FC236}">
-                <a16:creationId xmlns:a16="http://schemas.microsoft.com/office/drawing/2014/main" id="{6ACF0254-DDE1-50F8-9CF1-878F4AA330EA}"/>
-              </a:ext>
-            </a:extLst>
-          </p:cNvPr>
-          <p:cNvSpPr/>
-          <p:nvPr/>
-        </p:nvSpPr>
-        <p:spPr>
-          <a:xfrm>
-            <a:off x="609600" y="2501900"/>
-            <a:ext cx="6350000" cy="12700"/>
-          </a:xfrm>
-          <a:prstGeom prst="rect">
-            <a:avLst/>
-          </a:prstGeom>
-          <a:solidFill>
-            <a:srgbClr val="D7E3DE"/>
-          </a:solidFill>
-          <a:ln w="19050" cap="flat" cmpd="sng" algn="ctr">
-            <a:noFill/>
-            <a:prstDash val="solid"/>
-            <a:miter lim="800000"/>
-          </a:ln>
-          <a:effectLst/>
-          <a:extLst>
-            <a:ext uri="{91240B29-F687-4F45-9708-019B960494DF}">
-              <a14:hiddenLine xmlns:a14="http://schemas.microsoft.com/office/drawing/2010/main" w="19050" cap="flat" cmpd="sng" algn="ctr">
-                <a:solidFill>
-                  <a:schemeClr val="accent1">
-                    <a:shade val="15000"/>
-                  </a:schemeClr>
-                </a:solidFill>
-                <a:prstDash val="solid"/>
-                <a:miter lim="800000"/>
-              </a14:hiddenLine>
-            </a:ext>
-          </a:extLst>
-        </p:spPr>
-        <p:style>
-          <a:lnRef idx="2">
-            <a:schemeClr val="accent1">
-              <a:shade val="15000"/>
-            </a:schemeClr>
-          </a:lnRef>
-          <a:fillRef idx="1">
-            <a:schemeClr val="accent1"/>
-          </a:fillRef>
-          <a:effectRef idx="0">
-            <a:schemeClr val="accent1"/>
-          </a:effectRef>
-          <a:fontRef idx="minor">
-            <a:schemeClr val="lt1"/>
-          </a:fontRef>
-        </p:style>
-        <p:txBody>
-          <a:bodyPr rtlCol="0" anchor="ctr"/>
-          <a:lstStyle/>
-          <a:p>
-            <a:pPr algn="ctr"/>
-            <a:endParaRPr lang="en-US"/>
-          </a:p>
-        </p:txBody>
-      </p:sp>
-      <p:sp>
-        <p:nvSpPr>
-          <p:cNvPr id="10" name="TextBox 9">
-            <a:extLst>
-              <a:ext uri="{FF2B5EF4-FFF2-40B4-BE49-F238E27FC236}">
-                <a16:creationId xmlns:a16="http://schemas.microsoft.com/office/drawing/2014/main" id="{643D39E0-292A-31CD-81BE-77E2917DACBA}"/>
-              </a:ext>
-            </a:extLst>
-          </p:cNvPr>
-          <p:cNvSpPr txBox="1"/>
-          <p:nvPr/>
-        </p:nvSpPr>
-        <p:spPr>
-          <a:xfrm>
-            <a:off x="609600" y="2717800"/>
-            <a:ext cx="6350000" cy="215444"/>
-          </a:xfrm>
-          <a:prstGeom prst="rect">
-            <a:avLst/>
-          </a:prstGeom>
-          <a:noFill/>
-        </p:spPr>
-        <p:txBody>
-          <a:bodyPr vert="horz" wrap="square" lIns="0" tIns="0" rIns="0" bIns="0" rtlCol="0">
-            <a:spAutoFit/>
-          </a:bodyPr>
-          <a:lstStyle/>
-          <a:p>
-            <a:r>
-              <a:rPr lang="en-US" sz="1400" b="1">
-                <a:solidFill>
-                  <a:srgbClr val="28796F"/>
-                </a:solidFill>
-                <a:latin typeface="Aptos" panose="020B0004020202020204" pitchFamily="34" charset="0"/>
-              </a:rPr>
-              <a:t>ABSTRACT</a:t>
-            </a:r>
-          </a:p>
-        </p:txBody>
-      </p:sp>
-      <p:sp>
-        <p:nvSpPr>
-          <p:cNvPr id="11" name="TextBox 10">
-            <a:extLst>
-              <a:ext uri="{FF2B5EF4-FFF2-40B4-BE49-F238E27FC236}">
-                <a16:creationId xmlns:a16="http://schemas.microsoft.com/office/drawing/2014/main" id="{504B2268-5319-C026-D1C2-CA90C2E05C53}"/>
-              </a:ext>
-            </a:extLst>
-          </p:cNvPr>
-          <p:cNvSpPr txBox="1"/>
-          <p:nvPr/>
-        </p:nvSpPr>
-        <p:spPr>
-          <a:xfrm>
-            <a:off x="609600" y="3149600"/>
-            <a:ext cx="6350000" cy="2982355"/>
-          </a:xfrm>
-          <a:prstGeom prst="rect">
-            <a:avLst/>
-          </a:prstGeom>
-          <a:noFill/>
-        </p:spPr>
-        <p:txBody>
-          <a:bodyPr vert="horz" wrap="square" lIns="0" tIns="0" rIns="0" bIns="0" rtlCol="0">
-            <a:spAutoFit/>
-          </a:bodyPr>
-          <a:lstStyle/>
-          <a:p>
-            <a:r>
-              <a:rPr lang="en-US" sz="1020">
-                <a:solidFill>
-                  <a:srgbClr val="203A3A"/>
-                </a:solidFill>
-                <a:latin typeface="Aptos" panose="020B0004020202020204" pitchFamily="34" charset="0"/>
-              </a:rPr>
-              <a:t>Pregnancy involves appointments, personal records, daily routines, and ongoing conversations with healthcare professionals. When details are scattered across calendars, notes, and memory, users may find it difficult to keep track of care-related activities or prepare questions for a visit. MaatriCare is a web-based pregnancy support and care-coordination application designed to bring these organizational activities together in one authenticated workspace.</a:t>
-            </a:r>
-          </a:p>
-          <a:p>
-            <a:endParaRPr lang="en-US" sz="1020">
-              <a:solidFill>
-                <a:srgbClr val="203A3A"/>
-              </a:solidFill>
-              <a:latin typeface="Aptos" panose="020B0004020202020204" pitchFamily="34" charset="0"/>
-            </a:endParaRPr>
-          </a:p>
-          <a:p>
-            <a:r>
-              <a:rPr lang="en-US" sz="1020">
-                <a:solidFill>
-                  <a:srgbClr val="203A3A"/>
-                </a:solidFill>
-                <a:latin typeface="Aptos" panose="020B0004020202020204" pitchFamily="34" charset="0"/>
-              </a:rPr>
-              <a:t>The application provides pregnancy profile and progress information, appointment management, visit-question preparation, daily care tracking, a private symptom journal, pregnancy milestones, educational guides and resources, healthcare summaries, emergency contacts, and reminder preferences. Users can select recorded information for a report and control whether a report is shared through a time-limited link. The interface supports recording and reviewing information; it does not diagnose medical conditions, recommend treatment, or replace professional or emergency care.</a:t>
-            </a:r>
-          </a:p>
-          <a:p>
-            <a:endParaRPr lang="en-US" sz="1020">
-              <a:solidFill>
-                <a:srgbClr val="203A3A"/>
-              </a:solidFill>
-              <a:latin typeface="Aptos" panose="020B0004020202020204" pitchFamily="34" charset="0"/>
-            </a:endParaRPr>
-          </a:p>
-          <a:p>
-            <a:r>
-              <a:rPr lang="en-US" sz="1020">
-                <a:solidFill>
-                  <a:srgbClr val="203A3A"/>
-                </a:solidFill>
-                <a:latin typeface="Aptos" panose="020B0004020202020204" pitchFamily="34" charset="0"/>
-              </a:rPr>
-              <a:t>MaatriCare is implemented as a React and TypeScript frontend using Vite, with a Java Spring Boot REST backend. The backend uses Spring Security and JWT authentication, request validation, Spring Data JPA, and relational database support. MySQL is used for local development; PostgreSQL is configured for the production-oriented profile. Flyway migrations define the schema, while focused H2-backed tests verify selected backend behavior. User-owned records include pregnancy profiles, appointments, tasks, wellbeing records, symptoms, milestones, visit questions and answers, report shares, emergency contacts, and scheduled push reminders.</a:t>
-            </a:r>
-          </a:p>
-        </p:txBody>
-      </p:sp>
-      <p:sp>
-        <p:nvSpPr>
-          <p:cNvPr id="12" name="TextBox 11">
-            <a:extLst>
-              <a:ext uri="{FF2B5EF4-FFF2-40B4-BE49-F238E27FC236}">
-                <a16:creationId xmlns:a16="http://schemas.microsoft.com/office/drawing/2014/main" id="{D776A606-D67D-1D1D-7C90-7632620989A8}"/>
-              </a:ext>
-            </a:extLst>
-          </p:cNvPr>
-          <p:cNvSpPr txBox="1"/>
-          <p:nvPr/>
-        </p:nvSpPr>
-        <p:spPr>
-          <a:xfrm>
-            <a:off x="609600" y="9334500"/>
-            <a:ext cx="6350000" cy="276999"/>
-          </a:xfrm>
-          <a:prstGeom prst="rect">
-            <a:avLst/>
-          </a:prstGeom>
-          <a:noFill/>
-        </p:spPr>
-        <p:txBody>
-          <a:bodyPr vert="horz" wrap="square" lIns="0" tIns="0" rIns="0" bIns="0" rtlCol="0">
-            <a:spAutoFit/>
-          </a:bodyPr>
-          <a:lstStyle/>
-          <a:p>
-            <a:r>
-              <a:rPr lang="en-US" sz="900" b="1">
-                <a:solidFill>
-                  <a:srgbClr val="28796F"/>
-                </a:solidFill>
-                <a:latin typeface="Aptos" panose="020B0004020202020204" pitchFamily="34" charset="0"/>
-              </a:rPr>
-              <a:t>Keywords: pregnancy support; care coordination; appointment management; private journal; Web Push; React; Spring Boot</a:t>
-            </a:r>
-          </a:p>
-        </p:txBody>
-      </p:sp>
-      <p:sp>
-        <p:nvSpPr>
-          <p:cNvPr id="13" name="Rectangle 12">
-            <a:extLst>
-              <a:ext uri="{FF2B5EF4-FFF2-40B4-BE49-F238E27FC236}">
-                <a16:creationId xmlns:a16="http://schemas.microsoft.com/office/drawing/2014/main" id="{5870D36E-8EDA-36A2-0D59-3598178E1594}"/>
-              </a:ext>
-            </a:extLst>
-          </p:cNvPr>
-          <p:cNvSpPr/>
-          <p:nvPr/>
-        </p:nvSpPr>
-        <p:spPr>
-          <a:xfrm>
-            <a:off x="609600" y="10033000"/>
-            <a:ext cx="6350000" cy="12700"/>
-          </a:xfrm>
-          <a:prstGeom prst="rect">
-            <a:avLst/>
-          </a:prstGeom>
-          <a:solidFill>
-            <a:srgbClr val="D7E3DE"/>
-          </a:solidFill>
-          <a:ln w="19050" cap="flat" cmpd="sng" algn="ctr">
-            <a:noFill/>
-            <a:prstDash val="solid"/>
-            <a:miter lim="800000"/>
-          </a:ln>
-          <a:effectLst/>
-          <a:extLst>
-            <a:ext uri="{91240B29-F687-4F45-9708-019B960494DF}">
-              <a14:hiddenLine xmlns:a14="http://schemas.microsoft.com/office/drawing/2010/main" w="19050" cap="flat" cmpd="sng" algn="ctr">
-                <a:solidFill>
-                  <a:schemeClr val="accent1">
-                    <a:shade val="15000"/>
-                  </a:schemeClr>
-                </a:solidFill>
-                <a:prstDash val="solid"/>
-                <a:miter lim="800000"/>
-              </a14:hiddenLine>
-            </a:ext>
-          </a:extLst>
-        </p:spPr>
-        <p:style>
-          <a:lnRef idx="2">
-            <a:schemeClr val="accent1">
-              <a:shade val="15000"/>
-            </a:schemeClr>
-          </a:lnRef>
-          <a:fillRef idx="1">
-            <a:schemeClr val="accent1"/>
-          </a:fillRef>
-          <a:effectRef idx="0">
-            <a:schemeClr val="accent1"/>
-          </a:effectRef>
-          <a:fontRef idx="minor">
-            <a:schemeClr val="lt1"/>
-          </a:fontRef>
-        </p:style>
-        <p:txBody>
-          <a:bodyPr rtlCol="0" anchor="ctr"/>
-          <a:lstStyle/>
-          <a:p>
-            <a:pPr algn="ctr"/>
-            <a:endParaRPr lang="en-US"/>
-          </a:p>
-        </p:txBody>
-      </p:sp>
-      <p:sp>
-        <p:nvSpPr>
-          <p:cNvPr id="14" name="TextBox 13">
-            <a:extLst>
-              <a:ext uri="{FF2B5EF4-FFF2-40B4-BE49-F238E27FC236}">
-                <a16:creationId xmlns:a16="http://schemas.microsoft.com/office/drawing/2014/main" id="{B8866241-6B51-6E5C-621E-3DD18712901B}"/>
-              </a:ext>
-            </a:extLst>
-          </p:cNvPr>
-          <p:cNvSpPr txBox="1"/>
-          <p:nvPr/>
-        </p:nvSpPr>
-        <p:spPr>
-          <a:xfrm>
-            <a:off x="609600" y="10172700"/>
-            <a:ext cx="5080000" cy="123111"/>
-          </a:xfrm>
-          <a:prstGeom prst="rect">
-            <a:avLst/>
-          </a:prstGeom>
-          <a:noFill/>
-        </p:spPr>
-        <p:txBody>
-          <a:bodyPr vert="horz" wrap="square" lIns="0" tIns="0" rIns="0" bIns="0" rtlCol="0">
-            <a:spAutoFit/>
-          </a:bodyPr>
-          <a:lstStyle/>
-          <a:p>
-            <a:r>
-              <a:rPr lang="en-US" sz="800">
-                <a:solidFill>
-                  <a:srgbClr val="526965"/>
-                </a:solidFill>
-                <a:latin typeface="Aptos" panose="020B0004020202020204" pitchFamily="34" charset="0"/>
-              </a:rPr>
-              <a:t>Review 2 Abstract | MaatriCare</a:t>
-            </a:r>
-          </a:p>
-        </p:txBody>
-      </p:sp>
-      <p:sp>
-        <p:nvSpPr>
-          <p:cNvPr id="15" name="TextBox 14">
-            <a:extLst>
-              <a:ext uri="{FF2B5EF4-FFF2-40B4-BE49-F238E27FC236}">
-                <a16:creationId xmlns:a16="http://schemas.microsoft.com/office/drawing/2014/main" id="{C7EB9EBA-B0FD-3702-2CA1-65E906A471FB}"/>
-              </a:ext>
-            </a:extLst>
-          </p:cNvPr>
-          <p:cNvSpPr txBox="1"/>
-          <p:nvPr/>
-        </p:nvSpPr>
-        <p:spPr>
-          <a:xfrm>
-            <a:off x="6477000" y="10172700"/>
-            <a:ext cx="482600" cy="123111"/>
-          </a:xfrm>
-          <a:prstGeom prst="rect">
-            <a:avLst/>
-          </a:prstGeom>
-          <a:noFill/>
-        </p:spPr>
-        <p:txBody>
-          <a:bodyPr vert="horz" wrap="square" lIns="0" tIns="0" rIns="0" bIns="0" rtlCol="0">
-            <a:spAutoFit/>
-          </a:bodyPr>
-          <a:lstStyle/>
-          <a:p>
-            <a:r>
-              <a:rPr lang="en-US" sz="800" b="1">
-                <a:solidFill>
-                  <a:srgbClr val="28796F"/>
-                </a:solidFill>
-                <a:latin typeface="Aptos" panose="020B0004020202020204" pitchFamily="34" charset="0"/>
-              </a:rPr>
-              <a:t>1 / 2</a:t>
+              <a:t>Director - CDOE</a:t>
             </a:r>
           </a:p>
         </p:txBody>
@@ -4043,7 +4322,7 @@
     </p:spTree>
     <p:extLst>
       <p:ext uri="{BB962C8B-B14F-4D97-AF65-F5344CB8AC3E}">
-        <p14:creationId xmlns:p14="http://schemas.microsoft.com/office/powerpoint/2010/main" val="2529691723"/>
+        <p14:creationId xmlns:p14="http://schemas.microsoft.com/office/powerpoint/2010/main" val="3358949908"/>
       </p:ext>
     </p:extLst>
   </p:cSld>
@@ -4056,6 +4335,14 @@
 <file path=ppt/slides/slide2.xml><?xml version="1.0" encoding="utf-8"?>
 <p:sld xmlns:a="http://schemas.openxmlformats.org/drawingml/2006/main" xmlns:r="http://schemas.openxmlformats.org/officeDocument/2006/relationships" xmlns:p="http://schemas.openxmlformats.org/presentationml/2006/main">
   <p:cSld>
+    <p:bg>
+      <p:bgPr>
+        <a:solidFill>
+          <a:srgbClr val="FFFFFF"/>
+        </a:solidFill>
+        <a:effectLst/>
+      </p:bgPr>
+    </p:bg>
     <p:spTree>
       <p:nvGrpSpPr>
         <p:cNvPr id="1" name=""/>
@@ -4070,12 +4357,217 @@
           <a:chExt cx="0" cy="0"/>
         </a:xfrm>
       </p:grpSpPr>
-      <p:sp>
-        <p:nvSpPr>
-          <p:cNvPr id="2" name="Rectangle 1">
-            <a:extLst>
-              <a:ext uri="{FF2B5EF4-FFF2-40B4-BE49-F238E27FC236}">
-                <a16:creationId xmlns:a16="http://schemas.microsoft.com/office/drawing/2014/main" id="{4A9FB7BD-D519-5678-9D16-F64AFC54DD21}"/>
+      <p:pic>
+        <p:nvPicPr>
+          <p:cNvPr id="2" name="Picture 1">
+            <a:extLst>
+              <a:ext uri="{FF2B5EF4-FFF2-40B4-BE49-F238E27FC236}">
+                <a16:creationId xmlns:a16="http://schemas.microsoft.com/office/drawing/2014/main" id="{1AD6EA29-C2F5-8143-770E-686E456F0B70}"/>
+              </a:ext>
+            </a:extLst>
+          </p:cNvPr>
+          <p:cNvPicPr>
+            <a:picLocks noChangeAspect="1"/>
+          </p:cNvPicPr>
+          <p:nvPr/>
+        </p:nvPicPr>
+        <p:blipFill>
+          <a:blip r:embed="rId2">
+            <a:extLst>
+              <a:ext uri="{28A0092B-C50C-407E-A947-70E740481C1C}">
+                <a14:useLocalDpi xmlns:a14="http://schemas.microsoft.com/office/drawing/2010/main" val="0"/>
+              </a:ext>
+            </a:extLst>
+          </a:blip>
+          <a:srcRect/>
+          <a:stretch>
+            <a:fillRect/>
+          </a:stretch>
+        </p:blipFill>
+        <p:spPr bwMode="auto">
+          <a:xfrm>
+            <a:off x="508000" y="165100"/>
+            <a:ext cx="6540500" cy="1633313"/>
+          </a:xfrm>
+          <a:prstGeom prst="rect">
+            <a:avLst/>
+          </a:prstGeom>
+          <a:noFill/>
+          <a:ln>
+            <a:noFill/>
+          </a:ln>
+        </p:spPr>
+      </p:pic>
+      <p:sp>
+        <p:nvSpPr>
+          <p:cNvPr id="3" name="TextBox 2">
+            <a:extLst>
+              <a:ext uri="{FF2B5EF4-FFF2-40B4-BE49-F238E27FC236}">
+                <a16:creationId xmlns:a16="http://schemas.microsoft.com/office/drawing/2014/main" id="{9B8F722F-20F0-66EF-90CD-75282AD9069D}"/>
+              </a:ext>
+            </a:extLst>
+          </p:cNvPr>
+          <p:cNvSpPr txBox="1"/>
+          <p:nvPr/>
+        </p:nvSpPr>
+        <p:spPr>
+          <a:xfrm>
+            <a:off x="444500" y="1917700"/>
+            <a:ext cx="6667500" cy="254000"/>
+          </a:xfrm>
+          <a:prstGeom prst="rect">
+            <a:avLst/>
+          </a:prstGeom>
+          <a:noFill/>
+        </p:spPr>
+        <p:txBody>
+          <a:bodyPr vert="horz" wrap="square" lIns="0" tIns="0" rIns="0" bIns="0" rtlCol="0">
+            <a:noAutofit/>
+          </a:bodyPr>
+          <a:lstStyle/>
+          <a:p>
+            <a:pPr algn="ctr"/>
+            <a:r>
+              <a:rPr lang="en-US" sz="1200" b="1">
+                <a:solidFill>
+                  <a:srgbClr val="111111"/>
+                </a:solidFill>
+                <a:latin typeface="Times New Roman" panose="02020603050405020304" pitchFamily="18" charset="0"/>
+              </a:rPr>
+              <a:t>CENTRE FOR DISTANCE AND ONLINE EDUCATION (CDOE)</a:t>
+            </a:r>
+          </a:p>
+        </p:txBody>
+      </p:sp>
+      <p:cxnSp>
+        <p:nvCxnSpPr>
+          <p:cNvPr id="4" name="Straight Arrow Connector 3">
+            <a:extLst>
+              <a:ext uri="{FF2B5EF4-FFF2-40B4-BE49-F238E27FC236}">
+                <a16:creationId xmlns:a16="http://schemas.microsoft.com/office/drawing/2014/main" id="{2678D9BB-58E0-2BE2-781C-8235BFC6D490}"/>
+              </a:ext>
+            </a:extLst>
+          </p:cNvPr>
+          <p:cNvCxnSpPr/>
+          <p:nvPr/>
+        </p:nvCxnSpPr>
+        <p:spPr>
+          <a:xfrm>
+            <a:off x="508000" y="2235200"/>
+            <a:ext cx="6540500" cy="0"/>
+          </a:xfrm>
+          <a:prstGeom prst="straightConnector1">
+            <a:avLst/>
+          </a:prstGeom>
+          <a:ln w="10160">
+            <a:solidFill>
+              <a:srgbClr val="555555"/>
+            </a:solidFill>
+          </a:ln>
+        </p:spPr>
+        <p:style>
+          <a:lnRef idx="2">
+            <a:schemeClr val="accent1"/>
+          </a:lnRef>
+          <a:fillRef idx="0">
+            <a:schemeClr val="accent1"/>
+          </a:fillRef>
+          <a:effectRef idx="1">
+            <a:schemeClr val="accent1"/>
+          </a:effectRef>
+          <a:fontRef idx="minor">
+            <a:schemeClr val="tx1"/>
+          </a:fontRef>
+        </p:style>
+      </p:cxnSp>
+      <p:sp>
+        <p:nvSpPr>
+          <p:cNvPr id="5" name="TextBox 4">
+            <a:extLst>
+              <a:ext uri="{FF2B5EF4-FFF2-40B4-BE49-F238E27FC236}">
+                <a16:creationId xmlns:a16="http://schemas.microsoft.com/office/drawing/2014/main" id="{DEFD62C1-CC3B-2378-7230-950865175C04}"/>
+              </a:ext>
+            </a:extLst>
+          </p:cNvPr>
+          <p:cNvSpPr txBox="1"/>
+          <p:nvPr/>
+        </p:nvSpPr>
+        <p:spPr>
+          <a:xfrm>
+            <a:off x="508000" y="2374900"/>
+            <a:ext cx="6540500" cy="304800"/>
+          </a:xfrm>
+          <a:prstGeom prst="rect">
+            <a:avLst/>
+          </a:prstGeom>
+          <a:noFill/>
+        </p:spPr>
+        <p:txBody>
+          <a:bodyPr vert="horz" wrap="square" lIns="0" tIns="0" rIns="0" bIns="0" rtlCol="0">
+            <a:noAutofit/>
+          </a:bodyPr>
+          <a:lstStyle/>
+          <a:p>
+            <a:pPr algn="ctr"/>
+            <a:r>
+              <a:rPr lang="en-US" sz="1400" b="1">
+                <a:solidFill>
+                  <a:srgbClr val="111111"/>
+                </a:solidFill>
+                <a:latin typeface="Times New Roman" panose="02020603050405020304" pitchFamily="18" charset="0"/>
+              </a:rPr>
+              <a:t>ENTITY RELATIONSHIP DIAGRAM (ER)</a:t>
+            </a:r>
+          </a:p>
+        </p:txBody>
+      </p:sp>
+      <p:sp>
+        <p:nvSpPr>
+          <p:cNvPr id="6" name="TextBox 5">
+            <a:extLst>
+              <a:ext uri="{FF2B5EF4-FFF2-40B4-BE49-F238E27FC236}">
+                <a16:creationId xmlns:a16="http://schemas.microsoft.com/office/drawing/2014/main" id="{5725668A-DCCC-EA63-3659-F2A18DD9D60E}"/>
+              </a:ext>
+            </a:extLst>
+          </p:cNvPr>
+          <p:cNvSpPr txBox="1"/>
+          <p:nvPr/>
+        </p:nvSpPr>
+        <p:spPr>
+          <a:xfrm>
+            <a:off x="508000" y="2705100"/>
+            <a:ext cx="6540500" cy="203200"/>
+          </a:xfrm>
+          <a:prstGeom prst="rect">
+            <a:avLst/>
+          </a:prstGeom>
+          <a:noFill/>
+        </p:spPr>
+        <p:txBody>
+          <a:bodyPr vert="horz" wrap="square" lIns="0" tIns="0" rIns="0" bIns="0" rtlCol="0">
+            <a:noAutofit/>
+          </a:bodyPr>
+          <a:lstStyle/>
+          <a:p>
+            <a:pPr algn="ctr"/>
+            <a:r>
+              <a:rPr lang="en-US" sz="900">
+                <a:solidFill>
+                  <a:srgbClr val="333333"/>
+                </a:solidFill>
+                <a:latin typeface="Times New Roman" panose="02020603050405020304" pitchFamily="18" charset="0"/>
+              </a:rPr>
+              <a:t>MaatriCare - simplified implemented relational schema</a:t>
+            </a:r>
+          </a:p>
+        </p:txBody>
+      </p:sp>
+      <p:sp>
+        <p:nvSpPr>
+          <p:cNvPr id="7" name="Rectangle 6">
+            <a:extLst>
+              <a:ext uri="{FF2B5EF4-FFF2-40B4-BE49-F238E27FC236}">
+                <a16:creationId xmlns:a16="http://schemas.microsoft.com/office/drawing/2014/main" id="{97FDC72E-91A2-46BD-1403-BCF7AC709A22}"/>
               </a:ext>
             </a:extLst>
           </p:cNvPr>
@@ -4084,34 +4576,20 @@
         </p:nvSpPr>
         <p:spPr>
           <a:xfrm>
-            <a:off x="0" y="0"/>
-            <a:ext cx="152400" cy="10693400"/>
+            <a:off x="2317750" y="3048000"/>
+            <a:ext cx="2921000" cy="622300"/>
           </a:xfrm>
           <a:prstGeom prst="rect">
             <a:avLst/>
           </a:prstGeom>
           <a:solidFill>
-            <a:srgbClr val="28796F"/>
+            <a:srgbClr val="FFFFFF"/>
           </a:solidFill>
-          <a:ln w="19050" cap="flat" cmpd="sng" algn="ctr">
-            <a:noFill/>
-            <a:prstDash val="solid"/>
-            <a:miter lim="800000"/>
+          <a:ln w="10160">
+            <a:solidFill>
+              <a:srgbClr val="333333"/>
+            </a:solidFill>
           </a:ln>
-          <a:effectLst/>
-          <a:extLst>
-            <a:ext uri="{91240B29-F687-4F45-9708-019B960494DF}">
-              <a14:hiddenLine xmlns:a14="http://schemas.microsoft.com/office/drawing/2010/main" w="19050" cap="flat" cmpd="sng" algn="ctr">
-                <a:solidFill>
-                  <a:schemeClr val="accent1">
-                    <a:shade val="15000"/>
-                  </a:schemeClr>
-                </a:solidFill>
-                <a:prstDash val="solid"/>
-                <a:miter lim="800000"/>
-              </a14:hiddenLine>
-            </a:ext>
-          </a:extLst>
         </p:spPr>
         <p:style>
           <a:lnRef idx="2">
@@ -4140,483 +4618,10 @@
       </p:sp>
       <p:sp>
         <p:nvSpPr>
-          <p:cNvPr id="3" name="TextBox 2">
-            <a:extLst>
-              <a:ext uri="{FF2B5EF4-FFF2-40B4-BE49-F238E27FC236}">
-                <a16:creationId xmlns:a16="http://schemas.microsoft.com/office/drawing/2014/main" id="{A92DB017-2935-9243-D3CC-BEECA2876E21}"/>
-              </a:ext>
-            </a:extLst>
-          </p:cNvPr>
-          <p:cNvSpPr txBox="1"/>
-          <p:nvPr/>
-        </p:nvSpPr>
-        <p:spPr>
-          <a:xfrm>
-            <a:off x="609600" y="533400"/>
-            <a:ext cx="6350000" cy="276999"/>
-          </a:xfrm>
-          <a:prstGeom prst="rect">
-            <a:avLst/>
-          </a:prstGeom>
-          <a:noFill/>
-        </p:spPr>
-        <p:txBody>
-          <a:bodyPr vert="horz" wrap="square" lIns="0" tIns="0" rIns="0" bIns="0" rtlCol="0">
-            <a:spAutoFit/>
-          </a:bodyPr>
-          <a:lstStyle/>
-          <a:p>
-            <a:r>
-              <a:rPr lang="en-US" b="1">
-                <a:solidFill>
-                  <a:srgbClr val="173B38"/>
-                </a:solidFill>
-                <a:latin typeface="Aptos" panose="020B0004020202020204" pitchFamily="34" charset="0"/>
-              </a:rPr>
-              <a:t>PROJECT SUMMARY</a:t>
-            </a:r>
-          </a:p>
-        </p:txBody>
-      </p:sp>
-      <p:sp>
-        <p:nvSpPr>
-          <p:cNvPr id="4" name="TextBox 3">
-            <a:extLst>
-              <a:ext uri="{FF2B5EF4-FFF2-40B4-BE49-F238E27FC236}">
-                <a16:creationId xmlns:a16="http://schemas.microsoft.com/office/drawing/2014/main" id="{08755E87-92C7-AD99-C5A8-7A504773CC37}"/>
-              </a:ext>
-            </a:extLst>
-          </p:cNvPr>
-          <p:cNvSpPr txBox="1"/>
-          <p:nvPr/>
-        </p:nvSpPr>
-        <p:spPr>
-          <a:xfrm>
-            <a:off x="609600" y="1066800"/>
-            <a:ext cx="6350000" cy="184666"/>
-          </a:xfrm>
-          <a:prstGeom prst="rect">
-            <a:avLst/>
-          </a:prstGeom>
-          <a:noFill/>
-        </p:spPr>
-        <p:txBody>
-          <a:bodyPr vert="horz" wrap="square" lIns="0" tIns="0" rIns="0" bIns="0" rtlCol="0">
-            <a:spAutoFit/>
-          </a:bodyPr>
-          <a:lstStyle/>
-          <a:p>
-            <a:r>
-              <a:rPr lang="en-US" sz="1200" b="1">
-                <a:solidFill>
-                  <a:srgbClr val="28796F"/>
-                </a:solidFill>
-                <a:latin typeface="Aptos" panose="020B0004020202020204" pitchFamily="34" charset="0"/>
-              </a:rPr>
-              <a:t>Problem addressed</a:t>
-            </a:r>
-          </a:p>
-        </p:txBody>
-      </p:sp>
-      <p:sp>
-        <p:nvSpPr>
-          <p:cNvPr id="5" name="TextBox 4">
-            <a:extLst>
-              <a:ext uri="{FF2B5EF4-FFF2-40B4-BE49-F238E27FC236}">
-                <a16:creationId xmlns:a16="http://schemas.microsoft.com/office/drawing/2014/main" id="{593A90A0-69D9-EF32-FD51-FA5F00A1A2C5}"/>
-              </a:ext>
-            </a:extLst>
-          </p:cNvPr>
-          <p:cNvSpPr txBox="1"/>
-          <p:nvPr/>
-        </p:nvSpPr>
-        <p:spPr>
-          <a:xfrm>
-            <a:off x="609600" y="1422400"/>
-            <a:ext cx="6350000" cy="484748"/>
-          </a:xfrm>
-          <a:prstGeom prst="rect">
-            <a:avLst/>
-          </a:prstGeom>
-          <a:noFill/>
-        </p:spPr>
-        <p:txBody>
-          <a:bodyPr vert="horz" wrap="square" lIns="0" tIns="0" rIns="0" bIns="0" rtlCol="0">
-            <a:spAutoFit/>
-          </a:bodyPr>
-          <a:lstStyle/>
-          <a:p>
-            <a:r>
-              <a:rPr lang="en-US" sz="1050">
-                <a:solidFill>
-                  <a:srgbClr val="203A3A"/>
-                </a:solidFill>
-                <a:latin typeface="Aptos" panose="020B0004020202020204" pitchFamily="34" charset="0"/>
-              </a:rPr>
-              <a:t>Pregnancy-related tasks and information can be difficult to manage across separate tools. MaatriCare offers a single place for users to maintain their own records and prepare for discussions with their healthcare professionals.</a:t>
-            </a:r>
-          </a:p>
-        </p:txBody>
-      </p:sp>
-      <p:sp>
-        <p:nvSpPr>
-          <p:cNvPr id="6" name="TextBox 5">
-            <a:extLst>
-              <a:ext uri="{FF2B5EF4-FFF2-40B4-BE49-F238E27FC236}">
-                <a16:creationId xmlns:a16="http://schemas.microsoft.com/office/drawing/2014/main" id="{C4A24645-23C5-DC3C-7161-BE3FB81B0084}"/>
-              </a:ext>
-            </a:extLst>
-          </p:cNvPr>
-          <p:cNvSpPr txBox="1"/>
-          <p:nvPr/>
-        </p:nvSpPr>
-        <p:spPr>
-          <a:xfrm>
-            <a:off x="609600" y="2374900"/>
-            <a:ext cx="6350000" cy="184666"/>
-          </a:xfrm>
-          <a:prstGeom prst="rect">
-            <a:avLst/>
-          </a:prstGeom>
-          <a:noFill/>
-        </p:spPr>
-        <p:txBody>
-          <a:bodyPr vert="horz" wrap="square" lIns="0" tIns="0" rIns="0" bIns="0" rtlCol="0">
-            <a:spAutoFit/>
-          </a:bodyPr>
-          <a:lstStyle/>
-          <a:p>
-            <a:r>
-              <a:rPr lang="en-US" sz="1200" b="1">
-                <a:solidFill>
-                  <a:srgbClr val="28796F"/>
-                </a:solidFill>
-                <a:latin typeface="Aptos" panose="020B0004020202020204" pitchFamily="34" charset="0"/>
-              </a:rPr>
-              <a:t>Objectives</a:t>
-            </a:r>
-          </a:p>
-        </p:txBody>
-      </p:sp>
-      <p:sp>
-        <p:nvSpPr>
-          <p:cNvPr id="7" name="TextBox 6">
-            <a:extLst>
-              <a:ext uri="{FF2B5EF4-FFF2-40B4-BE49-F238E27FC236}">
-                <a16:creationId xmlns:a16="http://schemas.microsoft.com/office/drawing/2014/main" id="{55E925B0-08EF-E64F-6E60-82416098D8BC}"/>
-              </a:ext>
-            </a:extLst>
-          </p:cNvPr>
-          <p:cNvSpPr txBox="1"/>
-          <p:nvPr/>
-        </p:nvSpPr>
-        <p:spPr>
-          <a:xfrm>
-            <a:off x="711200" y="2743200"/>
-            <a:ext cx="6223000" cy="615553"/>
-          </a:xfrm>
-          <a:prstGeom prst="rect">
-            <a:avLst/>
-          </a:prstGeom>
-          <a:noFill/>
-        </p:spPr>
-        <p:txBody>
-          <a:bodyPr vert="horz" wrap="square" lIns="0" tIns="0" rIns="0" bIns="0" rtlCol="0">
-            <a:spAutoFit/>
-          </a:bodyPr>
-          <a:lstStyle/>
-          <a:p>
-            <a:r>
-              <a:rPr lang="en-US" sz="1000">
-                <a:solidFill>
-                  <a:srgbClr val="203A3A"/>
-                </a:solidFill>
-                <a:latin typeface="Aptos" panose="020B0004020202020204" pitchFamily="34" charset="0"/>
-              </a:rPr>
-              <a:t>1. Organize pregnancy profile, appointments, daily care tasks, wellbeing records, and milestones.</a:t>
-            </a:r>
-          </a:p>
-          <a:p>
-            <a:r>
-              <a:rPr lang="en-US" sz="1000">
-                <a:solidFill>
-                  <a:srgbClr val="203A3A"/>
-                </a:solidFill>
-                <a:latin typeface="Aptos" panose="020B0004020202020204" pitchFamily="34" charset="0"/>
-              </a:rPr>
-              <a:t>2. Support private symptom journaling and user-controlled sharing of selected summaries.</a:t>
-            </a:r>
-          </a:p>
-          <a:p>
-            <a:r>
-              <a:rPr lang="en-US" sz="1000">
-                <a:solidFill>
-                  <a:srgbClr val="203A3A"/>
-                </a:solidFill>
-                <a:latin typeface="Aptos" panose="020B0004020202020204" pitchFamily="34" charset="0"/>
-              </a:rPr>
-              <a:t>3. Provide general educational resources and tools for preparing healthcare questions.</a:t>
-            </a:r>
-          </a:p>
-          <a:p>
-            <a:r>
-              <a:rPr lang="en-US" sz="1000">
-                <a:solidFill>
-                  <a:srgbClr val="203A3A"/>
-                </a:solidFill>
-                <a:latin typeface="Aptos" panose="020B0004020202020204" pitchFamily="34" charset="0"/>
-              </a:rPr>
-              <a:t>4. Offer configurable reminders, including opt-in scheduled browser push with timezone-aware delivery.</a:t>
-            </a:r>
-          </a:p>
-        </p:txBody>
-      </p:sp>
-      <p:sp>
-        <p:nvSpPr>
-          <p:cNvPr id="8" name="TextBox 7">
-            <a:extLst>
-              <a:ext uri="{FF2B5EF4-FFF2-40B4-BE49-F238E27FC236}">
-                <a16:creationId xmlns:a16="http://schemas.microsoft.com/office/drawing/2014/main" id="{DB9D75DB-8DC4-F58D-933B-4C34D81BC5B0}"/>
-              </a:ext>
-            </a:extLst>
-          </p:cNvPr>
-          <p:cNvSpPr txBox="1"/>
-          <p:nvPr/>
-        </p:nvSpPr>
-        <p:spPr>
-          <a:xfrm>
-            <a:off x="609600" y="4229100"/>
-            <a:ext cx="6350000" cy="184666"/>
-          </a:xfrm>
-          <a:prstGeom prst="rect">
-            <a:avLst/>
-          </a:prstGeom>
-          <a:noFill/>
-        </p:spPr>
-        <p:txBody>
-          <a:bodyPr vert="horz" wrap="square" lIns="0" tIns="0" rIns="0" bIns="0" rtlCol="0">
-            <a:spAutoFit/>
-          </a:bodyPr>
-          <a:lstStyle/>
-          <a:p>
-            <a:r>
-              <a:rPr lang="en-US" sz="1200" b="1">
-                <a:solidFill>
-                  <a:srgbClr val="28796F"/>
-                </a:solidFill>
-                <a:latin typeface="Aptos" panose="020B0004020202020204" pitchFamily="34" charset="0"/>
-              </a:rPr>
-              <a:t>Method and system design</a:t>
-            </a:r>
-          </a:p>
-        </p:txBody>
-      </p:sp>
-      <p:sp>
-        <p:nvSpPr>
-          <p:cNvPr id="9" name="TextBox 8">
-            <a:extLst>
-              <a:ext uri="{FF2B5EF4-FFF2-40B4-BE49-F238E27FC236}">
-                <a16:creationId xmlns:a16="http://schemas.microsoft.com/office/drawing/2014/main" id="{DE960748-654E-C4C5-6F39-1AF78CCD2DD6}"/>
-              </a:ext>
-            </a:extLst>
-          </p:cNvPr>
-          <p:cNvSpPr txBox="1"/>
-          <p:nvPr/>
-        </p:nvSpPr>
-        <p:spPr>
-          <a:xfrm>
-            <a:off x="609600" y="4584700"/>
-            <a:ext cx="6350000" cy="769441"/>
-          </a:xfrm>
-          <a:prstGeom prst="rect">
-            <a:avLst/>
-          </a:prstGeom>
-          <a:noFill/>
-        </p:spPr>
-        <p:txBody>
-          <a:bodyPr vert="horz" wrap="square" lIns="0" tIns="0" rIns="0" bIns="0" rtlCol="0">
-            <a:spAutoFit/>
-          </a:bodyPr>
-          <a:lstStyle/>
-          <a:p>
-            <a:r>
-              <a:rPr lang="en-US" sz="1000">
-                <a:solidFill>
-                  <a:srgbClr val="203A3A"/>
-                </a:solidFill>
-                <a:latin typeface="Aptos" panose="020B0004020202020204" pitchFamily="34" charset="0"/>
-              </a:rPr>
-              <a:t>The frontend communicates with authenticated REST endpoints. The backend validates requests, checks user ownership, persists records through JPA repositories, and exposes profile, tracking, education, report, and reminder services. Scheduled Web Push uses a service worker and browser subscription keys; device credentials are stored separately from the user authentication token. Reminder payloads use generic text, and notification snoozes use expiring, one-time capabilities. Reminder scheduling defaults to Asia/Kolkata (Delhi time).</a:t>
-            </a:r>
-          </a:p>
-        </p:txBody>
-      </p:sp>
-      <p:sp>
-        <p:nvSpPr>
-          <p:cNvPr id="10" name="TextBox 9">
-            <a:extLst>
-              <a:ext uri="{FF2B5EF4-FFF2-40B4-BE49-F238E27FC236}">
-                <a16:creationId xmlns:a16="http://schemas.microsoft.com/office/drawing/2014/main" id="{0CCE9E57-7F13-96E0-7017-B033081F9869}"/>
-              </a:ext>
-            </a:extLst>
-          </p:cNvPr>
-          <p:cNvSpPr txBox="1"/>
-          <p:nvPr/>
-        </p:nvSpPr>
-        <p:spPr>
-          <a:xfrm>
-            <a:off x="609600" y="6413500"/>
-            <a:ext cx="6350000" cy="184666"/>
-          </a:xfrm>
-          <a:prstGeom prst="rect">
-            <a:avLst/>
-          </a:prstGeom>
-          <a:noFill/>
-        </p:spPr>
-        <p:txBody>
-          <a:bodyPr vert="horz" wrap="square" lIns="0" tIns="0" rIns="0" bIns="0" rtlCol="0">
-            <a:spAutoFit/>
-          </a:bodyPr>
-          <a:lstStyle/>
-          <a:p>
-            <a:r>
-              <a:rPr lang="en-US" sz="1200" b="1">
-                <a:solidFill>
-                  <a:srgbClr val="28796F"/>
-                </a:solidFill>
-                <a:latin typeface="Aptos" panose="020B0004020202020204" pitchFamily="34" charset="0"/>
-              </a:rPr>
-              <a:t>Current status and limitations</a:t>
-            </a:r>
-          </a:p>
-        </p:txBody>
-      </p:sp>
-      <p:sp>
-        <p:nvSpPr>
-          <p:cNvPr id="11" name="TextBox 10">
-            <a:extLst>
-              <a:ext uri="{FF2B5EF4-FFF2-40B4-BE49-F238E27FC236}">
-                <a16:creationId xmlns:a16="http://schemas.microsoft.com/office/drawing/2014/main" id="{30620C1E-0279-ABBA-6008-2FA696F0213E}"/>
-              </a:ext>
-            </a:extLst>
-          </p:cNvPr>
-          <p:cNvSpPr txBox="1"/>
-          <p:nvPr/>
-        </p:nvSpPr>
-        <p:spPr>
-          <a:xfrm>
-            <a:off x="609600" y="6769100"/>
-            <a:ext cx="6350000" cy="769441"/>
-          </a:xfrm>
-          <a:prstGeom prst="rect">
-            <a:avLst/>
-          </a:prstGeom>
-          <a:noFill/>
-        </p:spPr>
-        <p:txBody>
-          <a:bodyPr vert="horz" wrap="square" lIns="0" tIns="0" rIns="0" bIns="0" rtlCol="0">
-            <a:spAutoFit/>
-          </a:bodyPr>
-          <a:lstStyle/>
-          <a:p>
-            <a:r>
-              <a:rPr lang="en-US" sz="1000">
-                <a:solidFill>
-                  <a:srgbClr val="203A3A"/>
-                </a:solidFill>
-                <a:latin typeface="Aptos" panose="020B0004020202020204" pitchFamily="34" charset="0"/>
-              </a:rPr>
-              <a:t>The application modules described are implemented in the project workspace. Focused tests cover timezone defaults and validation, reminder schedules and category preferences, deduplication, one-time snooze actions, and retention. The frontend production build passes. Live push delivery has not yet been demonstrated because deployment VAPID keys and HTTPS configuration are not supplied. This project is an organizational and educational aid, not a clinical diagnostic or treatment system.</a:t>
-            </a:r>
-          </a:p>
-        </p:txBody>
-      </p:sp>
-      <p:sp>
-        <p:nvSpPr>
-          <p:cNvPr id="12" name="TextBox 11">
-            <a:extLst>
-              <a:ext uri="{FF2B5EF4-FFF2-40B4-BE49-F238E27FC236}">
-                <a16:creationId xmlns:a16="http://schemas.microsoft.com/office/drawing/2014/main" id="{9B2D14EE-DAAB-CF0C-CB4A-924DE0DD1702}"/>
-              </a:ext>
-            </a:extLst>
-          </p:cNvPr>
-          <p:cNvSpPr txBox="1"/>
-          <p:nvPr/>
-        </p:nvSpPr>
-        <p:spPr>
-          <a:xfrm>
-            <a:off x="609600" y="8407400"/>
-            <a:ext cx="6350000" cy="184666"/>
-          </a:xfrm>
-          <a:prstGeom prst="rect">
-            <a:avLst/>
-          </a:prstGeom>
-          <a:noFill/>
-        </p:spPr>
-        <p:txBody>
-          <a:bodyPr vert="horz" wrap="square" lIns="0" tIns="0" rIns="0" bIns="0" rtlCol="0">
-            <a:spAutoFit/>
-          </a:bodyPr>
-          <a:lstStyle/>
-          <a:p>
-            <a:r>
-              <a:rPr lang="en-US" sz="1200" b="1">
-                <a:solidFill>
-                  <a:srgbClr val="28796F"/>
-                </a:solidFill>
-                <a:latin typeface="Aptos" panose="020B0004020202020204" pitchFamily="34" charset="0"/>
-              </a:rPr>
-              <a:t>Future work</a:t>
-            </a:r>
-          </a:p>
-        </p:txBody>
-      </p:sp>
-      <p:sp>
-        <p:nvSpPr>
-          <p:cNvPr id="13" name="TextBox 12">
-            <a:extLst>
-              <a:ext uri="{FF2B5EF4-FFF2-40B4-BE49-F238E27FC236}">
-                <a16:creationId xmlns:a16="http://schemas.microsoft.com/office/drawing/2014/main" id="{E6524DC3-AEA9-A3C9-FF42-4C2E83AA0CAF}"/>
-              </a:ext>
-            </a:extLst>
-          </p:cNvPr>
-          <p:cNvSpPr txBox="1"/>
-          <p:nvPr/>
-        </p:nvSpPr>
-        <p:spPr>
-          <a:xfrm>
-            <a:off x="609600" y="8763000"/>
-            <a:ext cx="6350000" cy="461665"/>
-          </a:xfrm>
-          <a:prstGeom prst="rect">
-            <a:avLst/>
-          </a:prstGeom>
-          <a:noFill/>
-        </p:spPr>
-        <p:txBody>
-          <a:bodyPr vert="horz" wrap="square" lIns="0" tIns="0" rIns="0" bIns="0" rtlCol="0">
-            <a:spAutoFit/>
-          </a:bodyPr>
-          <a:lstStyle/>
-          <a:p>
-            <a:r>
-              <a:rPr lang="en-US" sz="1000">
-                <a:solidFill>
-                  <a:srgbClr val="203A3A"/>
-                </a:solidFill>
-                <a:latin typeface="Aptos" panose="020B0004020202020204" pitchFamily="34" charset="0"/>
-              </a:rPr>
-              <a:t>Configure production VAPID keys and public HTTPS; validate live delivery on a real device; expand database and frontend testing; complete accessibility and privacy reviews; and prepare the final project report using the official institutional template.</a:t>
-            </a:r>
-          </a:p>
-        </p:txBody>
-      </p:sp>
-      <p:sp>
-        <p:nvSpPr>
-          <p:cNvPr id="14" name="Rectangle 13">
-            <a:extLst>
-              <a:ext uri="{FF2B5EF4-FFF2-40B4-BE49-F238E27FC236}">
-                <a16:creationId xmlns:a16="http://schemas.microsoft.com/office/drawing/2014/main" id="{2D161CAC-763C-3A0B-E1D1-7B99008E369A}"/>
+          <p:cNvPr id="8" name="Rectangle 7">
+            <a:extLst>
+              <a:ext uri="{FF2B5EF4-FFF2-40B4-BE49-F238E27FC236}">
+                <a16:creationId xmlns:a16="http://schemas.microsoft.com/office/drawing/2014/main" id="{FF46CDE9-1C47-9398-2EDB-A0082A5B7C57}"/>
               </a:ext>
             </a:extLst>
           </p:cNvPr>
@@ -4625,34 +4630,20 @@
         </p:nvSpPr>
         <p:spPr>
           <a:xfrm>
-            <a:off x="609600" y="10033000"/>
-            <a:ext cx="6350000" cy="12700"/>
+            <a:off x="2317750" y="3048000"/>
+            <a:ext cx="2921000" cy="228600"/>
           </a:xfrm>
           <a:prstGeom prst="rect">
             <a:avLst/>
           </a:prstGeom>
           <a:solidFill>
-            <a:srgbClr val="D7E3DE"/>
+            <a:srgbClr val="E9EEF0"/>
           </a:solidFill>
-          <a:ln w="19050" cap="flat" cmpd="sng" algn="ctr">
-            <a:noFill/>
-            <a:prstDash val="solid"/>
-            <a:miter lim="800000"/>
+          <a:ln w="10160">
+            <a:solidFill>
+              <a:srgbClr val="333333"/>
+            </a:solidFill>
           </a:ln>
-          <a:effectLst/>
-          <a:extLst>
-            <a:ext uri="{91240B29-F687-4F45-9708-019B960494DF}">
-              <a14:hiddenLine xmlns:a14="http://schemas.microsoft.com/office/drawing/2010/main" w="19050" cap="flat" cmpd="sng" algn="ctr">
-                <a:solidFill>
-                  <a:schemeClr val="accent1">
-                    <a:shade val="15000"/>
-                  </a:schemeClr>
-                </a:solidFill>
-                <a:prstDash val="solid"/>
-                <a:miter lim="800000"/>
-              </a14:hiddenLine>
-            </a:ext>
-          </a:extLst>
         </p:spPr>
         <p:style>
           <a:lnRef idx="2">
@@ -4681,10 +4672,10 @@
       </p:sp>
       <p:sp>
         <p:nvSpPr>
-          <p:cNvPr id="15" name="TextBox 14">
-            <a:extLst>
-              <a:ext uri="{FF2B5EF4-FFF2-40B4-BE49-F238E27FC236}">
-                <a16:creationId xmlns:a16="http://schemas.microsoft.com/office/drawing/2014/main" id="{62E0409F-25BE-6B34-D987-FB4BF51AE60F}"/>
+          <p:cNvPr id="9" name="TextBox 8">
+            <a:extLst>
+              <a:ext uri="{FF2B5EF4-FFF2-40B4-BE49-F238E27FC236}">
+                <a16:creationId xmlns:a16="http://schemas.microsoft.com/office/drawing/2014/main" id="{4C01BBF5-D5BD-6572-D809-73CC5CD89D6E}"/>
               </a:ext>
             </a:extLst>
           </p:cNvPr>
@@ -4693,8 +4684,8 @@
         </p:nvSpPr>
         <p:spPr>
           <a:xfrm>
-            <a:off x="609600" y="10172700"/>
-            <a:ext cx="5080000" cy="123111"/>
+            <a:off x="2381250" y="3073400"/>
+            <a:ext cx="2794000" cy="177800"/>
           </a:xfrm>
           <a:prstGeom prst="rect">
             <a:avLst/>
@@ -4703,19 +4694,290 @@
         </p:spPr>
         <p:txBody>
           <a:bodyPr vert="horz" wrap="square" lIns="0" tIns="0" rIns="0" bIns="0" rtlCol="0">
-            <a:spAutoFit/>
+            <a:noAutofit/>
+          </a:bodyPr>
+          <a:lstStyle/>
+          <a:p>
+            <a:r>
+              <a:rPr lang="en-US" sz="900" b="1">
+                <a:solidFill>
+                  <a:srgbClr val="111111"/>
+                </a:solidFill>
+                <a:latin typeface="Times New Roman" panose="02020603050405020304" pitchFamily="18" charset="0"/>
+              </a:rPr>
+              <a:t>users</a:t>
+            </a:r>
+          </a:p>
+        </p:txBody>
+      </p:sp>
+      <p:sp>
+        <p:nvSpPr>
+          <p:cNvPr id="10" name="TextBox 9">
+            <a:extLst>
+              <a:ext uri="{FF2B5EF4-FFF2-40B4-BE49-F238E27FC236}">
+                <a16:creationId xmlns:a16="http://schemas.microsoft.com/office/drawing/2014/main" id="{13463785-E2B7-7D34-7C6E-26C6F42B2C52}"/>
+              </a:ext>
+            </a:extLst>
+          </p:cNvPr>
+          <p:cNvSpPr txBox="1"/>
+          <p:nvPr/>
+        </p:nvSpPr>
+        <p:spPr>
+          <a:xfrm>
+            <a:off x="2381250" y="3314700"/>
+            <a:ext cx="2794000" cy="304800"/>
+          </a:xfrm>
+          <a:prstGeom prst="rect">
+            <a:avLst/>
+          </a:prstGeom>
+          <a:noFill/>
+        </p:spPr>
+        <p:txBody>
+          <a:bodyPr vert="horz" wrap="square" lIns="0" tIns="0" rIns="0" bIns="0" rtlCol="0">
+            <a:noAutofit/>
           </a:bodyPr>
           <a:lstStyle/>
           <a:p>
             <a:r>
               <a:rPr lang="en-US" sz="800">
                 <a:solidFill>
-                  <a:srgbClr val="526965"/>
+                  <a:srgbClr val="111111"/>
                 </a:solidFill>
-                <a:latin typeface="Aptos" panose="020B0004020202020204" pitchFamily="34" charset="0"/>
+                <a:latin typeface="Times New Roman" panose="02020603050405020304" pitchFamily="18" charset="0"/>
               </a:rPr>
-              <a:t>Review 2 Abstract | MaatriCare</a:t>
-            </a:r>
+              <a:t>id PK | email UNIQUE | timezone_id</a:t>
+            </a:r>
+          </a:p>
+        </p:txBody>
+      </p:sp>
+      <p:cxnSp>
+        <p:nvCxnSpPr>
+          <p:cNvPr id="11" name="Straight Arrow Connector 10">
+            <a:extLst>
+              <a:ext uri="{FF2B5EF4-FFF2-40B4-BE49-F238E27FC236}">
+                <a16:creationId xmlns:a16="http://schemas.microsoft.com/office/drawing/2014/main" id="{66D7CD87-068F-299B-9D92-91C18A440E49}"/>
+              </a:ext>
+            </a:extLst>
+          </p:cNvPr>
+          <p:cNvCxnSpPr/>
+          <p:nvPr/>
+        </p:nvCxnSpPr>
+        <p:spPr>
+          <a:xfrm>
+            <a:off x="3778250" y="3670300"/>
+            <a:ext cx="0" cy="4673600"/>
+          </a:xfrm>
+          <a:prstGeom prst="straightConnector1">
+            <a:avLst/>
+          </a:prstGeom>
+          <a:ln w="13970">
+            <a:solidFill>
+              <a:srgbClr val="444444"/>
+            </a:solidFill>
+          </a:ln>
+        </p:spPr>
+        <p:style>
+          <a:lnRef idx="2">
+            <a:schemeClr val="accent1"/>
+          </a:lnRef>
+          <a:fillRef idx="0">
+            <a:schemeClr val="accent1"/>
+          </a:fillRef>
+          <a:effectRef idx="1">
+            <a:schemeClr val="accent1"/>
+          </a:effectRef>
+          <a:fontRef idx="minor">
+            <a:schemeClr val="tx1"/>
+          </a:fontRef>
+        </p:style>
+      </p:cxnSp>
+      <p:cxnSp>
+        <p:nvCxnSpPr>
+          <p:cNvPr id="12" name="Straight Arrow Connector 11">
+            <a:extLst>
+              <a:ext uri="{FF2B5EF4-FFF2-40B4-BE49-F238E27FC236}">
+                <a16:creationId xmlns:a16="http://schemas.microsoft.com/office/drawing/2014/main" id="{920A2687-4864-21F0-F275-F2DEF8C8E3E2}"/>
+              </a:ext>
+            </a:extLst>
+          </p:cNvPr>
+          <p:cNvCxnSpPr/>
+          <p:nvPr/>
+        </p:nvCxnSpPr>
+        <p:spPr>
+          <a:xfrm>
+            <a:off x="3365500" y="4146550"/>
+            <a:ext cx="412750" cy="0"/>
+          </a:xfrm>
+          <a:prstGeom prst="straightConnector1">
+            <a:avLst/>
+          </a:prstGeom>
+          <a:ln w="10160">
+            <a:solidFill>
+              <a:srgbClr val="555555"/>
+            </a:solidFill>
+          </a:ln>
+        </p:spPr>
+        <p:style>
+          <a:lnRef idx="2">
+            <a:schemeClr val="accent1"/>
+          </a:lnRef>
+          <a:fillRef idx="0">
+            <a:schemeClr val="accent1"/>
+          </a:fillRef>
+          <a:effectRef idx="1">
+            <a:schemeClr val="accent1"/>
+          </a:effectRef>
+          <a:fontRef idx="minor">
+            <a:schemeClr val="tx1"/>
+          </a:fontRef>
+        </p:style>
+      </p:cxnSp>
+      <p:sp>
+        <p:nvSpPr>
+          <p:cNvPr id="13" name="TextBox 12">
+            <a:extLst>
+              <a:ext uri="{FF2B5EF4-FFF2-40B4-BE49-F238E27FC236}">
+                <a16:creationId xmlns:a16="http://schemas.microsoft.com/office/drawing/2014/main" id="{7EEE421B-95C6-7C55-5603-6A69EC04B27F}"/>
+              </a:ext>
+            </a:extLst>
+          </p:cNvPr>
+          <p:cNvSpPr txBox="1"/>
+          <p:nvPr/>
+        </p:nvSpPr>
+        <p:spPr>
+          <a:xfrm>
+            <a:off x="3390900" y="3937000"/>
+            <a:ext cx="355600" cy="165100"/>
+          </a:xfrm>
+          <a:prstGeom prst="rect">
+            <a:avLst/>
+          </a:prstGeom>
+          <a:noFill/>
+        </p:spPr>
+        <p:txBody>
+          <a:bodyPr vert="horz" wrap="square" lIns="0" tIns="0" rIns="0" bIns="0" rtlCol="0">
+            <a:noAutofit/>
+          </a:bodyPr>
+          <a:lstStyle/>
+          <a:p>
+            <a:pPr algn="ctr"/>
+            <a:r>
+              <a:rPr lang="en-US" sz="650">
+                <a:solidFill>
+                  <a:srgbClr val="444444"/>
+                </a:solidFill>
+                <a:latin typeface="Times New Roman" panose="02020603050405020304" pitchFamily="18" charset="0"/>
+              </a:rPr>
+              <a:t>1:1</a:t>
+            </a:r>
+          </a:p>
+        </p:txBody>
+      </p:sp>
+      <p:sp>
+        <p:nvSpPr>
+          <p:cNvPr id="14" name="Rectangle 13">
+            <a:extLst>
+              <a:ext uri="{FF2B5EF4-FFF2-40B4-BE49-F238E27FC236}">
+                <a16:creationId xmlns:a16="http://schemas.microsoft.com/office/drawing/2014/main" id="{5149837D-C022-A214-76B9-BBBC7C7D46A7}"/>
+              </a:ext>
+            </a:extLst>
+          </p:cNvPr>
+          <p:cNvSpPr/>
+          <p:nvPr/>
+        </p:nvSpPr>
+        <p:spPr>
+          <a:xfrm>
+            <a:off x="444500" y="3835400"/>
+            <a:ext cx="2921000" cy="622300"/>
+          </a:xfrm>
+          <a:prstGeom prst="rect">
+            <a:avLst/>
+          </a:prstGeom>
+          <a:solidFill>
+            <a:srgbClr val="FFFFFF"/>
+          </a:solidFill>
+          <a:ln w="10160">
+            <a:solidFill>
+              <a:srgbClr val="333333"/>
+            </a:solidFill>
+          </a:ln>
+        </p:spPr>
+        <p:style>
+          <a:lnRef idx="2">
+            <a:schemeClr val="accent1">
+              <a:shade val="15000"/>
+            </a:schemeClr>
+          </a:lnRef>
+          <a:fillRef idx="1">
+            <a:schemeClr val="accent1"/>
+          </a:fillRef>
+          <a:effectRef idx="0">
+            <a:schemeClr val="accent1"/>
+          </a:effectRef>
+          <a:fontRef idx="minor">
+            <a:schemeClr val="lt1"/>
+          </a:fontRef>
+        </p:style>
+        <p:txBody>
+          <a:bodyPr rtlCol="0" anchor="ctr"/>
+          <a:lstStyle/>
+          <a:p>
+            <a:pPr algn="ctr"/>
+            <a:endParaRPr lang="en-US"/>
+          </a:p>
+        </p:txBody>
+      </p:sp>
+      <p:sp>
+        <p:nvSpPr>
+          <p:cNvPr id="15" name="Rectangle 14">
+            <a:extLst>
+              <a:ext uri="{FF2B5EF4-FFF2-40B4-BE49-F238E27FC236}">
+                <a16:creationId xmlns:a16="http://schemas.microsoft.com/office/drawing/2014/main" id="{FB9E0533-22F0-E0C6-5ED8-72A35D350D7B}"/>
+              </a:ext>
+            </a:extLst>
+          </p:cNvPr>
+          <p:cNvSpPr/>
+          <p:nvPr/>
+        </p:nvSpPr>
+        <p:spPr>
+          <a:xfrm>
+            <a:off x="444500" y="3835400"/>
+            <a:ext cx="2921000" cy="228600"/>
+          </a:xfrm>
+          <a:prstGeom prst="rect">
+            <a:avLst/>
+          </a:prstGeom>
+          <a:solidFill>
+            <a:srgbClr val="E9EEF0"/>
+          </a:solidFill>
+          <a:ln w="10160">
+            <a:solidFill>
+              <a:srgbClr val="333333"/>
+            </a:solidFill>
+          </a:ln>
+        </p:spPr>
+        <p:style>
+          <a:lnRef idx="2">
+            <a:schemeClr val="accent1">
+              <a:shade val="15000"/>
+            </a:schemeClr>
+          </a:lnRef>
+          <a:fillRef idx="1">
+            <a:schemeClr val="accent1"/>
+          </a:fillRef>
+          <a:effectRef idx="0">
+            <a:schemeClr val="accent1"/>
+          </a:effectRef>
+          <a:fontRef idx="minor">
+            <a:schemeClr val="lt1"/>
+          </a:fontRef>
+        </p:style>
+        <p:txBody>
+          <a:bodyPr rtlCol="0" anchor="ctr"/>
+          <a:lstStyle/>
+          <a:p>
+            <a:pPr algn="ctr"/>
+            <a:endParaRPr lang="en-US"/>
           </a:p>
         </p:txBody>
       </p:sp>
@@ -4724,7 +4986,7 @@
           <p:cNvPr id="16" name="TextBox 15">
             <a:extLst>
               <a:ext uri="{FF2B5EF4-FFF2-40B4-BE49-F238E27FC236}">
-                <a16:creationId xmlns:a16="http://schemas.microsoft.com/office/drawing/2014/main" id="{CC7BA4A1-266F-D6B7-BF2E-ADD7F411747D}"/>
+                <a16:creationId xmlns:a16="http://schemas.microsoft.com/office/drawing/2014/main" id="{3006F591-29CF-D662-EE1E-09B864501688}"/>
               </a:ext>
             </a:extLst>
           </p:cNvPr>
@@ -4733,8 +4995,8 @@
         </p:nvSpPr>
         <p:spPr>
           <a:xfrm>
-            <a:off x="6477000" y="10172700"/>
-            <a:ext cx="482600" cy="123111"/>
+            <a:off x="508000" y="3860800"/>
+            <a:ext cx="2794000" cy="177800"/>
           </a:xfrm>
           <a:prstGeom prst="rect">
             <a:avLst/>
@@ -4743,18 +5005,3074 @@
         </p:spPr>
         <p:txBody>
           <a:bodyPr vert="horz" wrap="square" lIns="0" tIns="0" rIns="0" bIns="0" rtlCol="0">
-            <a:spAutoFit/>
+            <a:noAutofit/>
           </a:bodyPr>
           <a:lstStyle/>
           <a:p>
             <a:r>
-              <a:rPr lang="en-US" sz="800" b="1">
+              <a:rPr lang="en-US" sz="900" b="1">
                 <a:solidFill>
-                  <a:srgbClr val="28796F"/>
+                  <a:srgbClr val="111111"/>
                 </a:solidFill>
-                <a:latin typeface="Aptos" panose="020B0004020202020204" pitchFamily="34" charset="0"/>
+                <a:latin typeface="Times New Roman" panose="02020603050405020304" pitchFamily="18" charset="0"/>
               </a:rPr>
-              <a:t>2 / 2</a:t>
+              <a:t>pregnancy_profiles</a:t>
+            </a:r>
+          </a:p>
+        </p:txBody>
+      </p:sp>
+      <p:sp>
+        <p:nvSpPr>
+          <p:cNvPr id="17" name="TextBox 16">
+            <a:extLst>
+              <a:ext uri="{FF2B5EF4-FFF2-40B4-BE49-F238E27FC236}">
+                <a16:creationId xmlns:a16="http://schemas.microsoft.com/office/drawing/2014/main" id="{95D93ACD-7323-84C8-9F21-975C5C8254CA}"/>
+              </a:ext>
+            </a:extLst>
+          </p:cNvPr>
+          <p:cNvSpPr txBox="1"/>
+          <p:nvPr/>
+        </p:nvSpPr>
+        <p:spPr>
+          <a:xfrm>
+            <a:off x="508000" y="4102100"/>
+            <a:ext cx="2794000" cy="304800"/>
+          </a:xfrm>
+          <a:prstGeom prst="rect">
+            <a:avLst/>
+          </a:prstGeom>
+          <a:noFill/>
+        </p:spPr>
+        <p:txBody>
+          <a:bodyPr vert="horz" wrap="square" lIns="0" tIns="0" rIns="0" bIns="0" rtlCol="0">
+            <a:noAutofit/>
+          </a:bodyPr>
+          <a:lstStyle/>
+          <a:p>
+            <a:r>
+              <a:rPr lang="en-US" sz="800">
+                <a:solidFill>
+                  <a:srgbClr val="111111"/>
+                </a:solidFill>
+                <a:latin typeface="Times New Roman" panose="02020603050405020304" pitchFamily="18" charset="0"/>
+              </a:rPr>
+              <a:t>id PK | user_id FK UNIQUE</a:t>
+            </a:r>
+          </a:p>
+        </p:txBody>
+      </p:sp>
+      <p:cxnSp>
+        <p:nvCxnSpPr>
+          <p:cNvPr id="18" name="Straight Arrow Connector 17">
+            <a:extLst>
+              <a:ext uri="{FF2B5EF4-FFF2-40B4-BE49-F238E27FC236}">
+                <a16:creationId xmlns:a16="http://schemas.microsoft.com/office/drawing/2014/main" id="{24ACD574-1061-D534-64F1-BFA436A3999B}"/>
+              </a:ext>
+            </a:extLst>
+          </p:cNvPr>
+          <p:cNvCxnSpPr/>
+          <p:nvPr/>
+        </p:nvCxnSpPr>
+        <p:spPr>
+          <a:xfrm>
+            <a:off x="3778250" y="4146550"/>
+            <a:ext cx="412750" cy="0"/>
+          </a:xfrm>
+          <a:prstGeom prst="straightConnector1">
+            <a:avLst/>
+          </a:prstGeom>
+          <a:ln w="10160">
+            <a:solidFill>
+              <a:srgbClr val="555555"/>
+            </a:solidFill>
+          </a:ln>
+        </p:spPr>
+        <p:style>
+          <a:lnRef idx="2">
+            <a:schemeClr val="accent1"/>
+          </a:lnRef>
+          <a:fillRef idx="0">
+            <a:schemeClr val="accent1"/>
+          </a:fillRef>
+          <a:effectRef idx="1">
+            <a:schemeClr val="accent1"/>
+          </a:effectRef>
+          <a:fontRef idx="minor">
+            <a:schemeClr val="tx1"/>
+          </a:fontRef>
+        </p:style>
+      </p:cxnSp>
+      <p:sp>
+        <p:nvSpPr>
+          <p:cNvPr id="19" name="TextBox 18">
+            <a:extLst>
+              <a:ext uri="{FF2B5EF4-FFF2-40B4-BE49-F238E27FC236}">
+                <a16:creationId xmlns:a16="http://schemas.microsoft.com/office/drawing/2014/main" id="{8B43F4B0-0B76-030C-9D95-7C2CA33B9A64}"/>
+              </a:ext>
+            </a:extLst>
+          </p:cNvPr>
+          <p:cNvSpPr txBox="1"/>
+          <p:nvPr/>
+        </p:nvSpPr>
+        <p:spPr>
+          <a:xfrm>
+            <a:off x="3810000" y="3937000"/>
+            <a:ext cx="355600" cy="165100"/>
+          </a:xfrm>
+          <a:prstGeom prst="rect">
+            <a:avLst/>
+          </a:prstGeom>
+          <a:noFill/>
+        </p:spPr>
+        <p:txBody>
+          <a:bodyPr vert="horz" wrap="square" lIns="0" tIns="0" rIns="0" bIns="0" rtlCol="0">
+            <a:noAutofit/>
+          </a:bodyPr>
+          <a:lstStyle/>
+          <a:p>
+            <a:pPr algn="ctr"/>
+            <a:r>
+              <a:rPr lang="en-US" sz="650">
+                <a:solidFill>
+                  <a:srgbClr val="444444"/>
+                </a:solidFill>
+                <a:latin typeface="Times New Roman" panose="02020603050405020304" pitchFamily="18" charset="0"/>
+              </a:rPr>
+              <a:t>1:N</a:t>
+            </a:r>
+          </a:p>
+        </p:txBody>
+      </p:sp>
+      <p:sp>
+        <p:nvSpPr>
+          <p:cNvPr id="20" name="Rectangle 19">
+            <a:extLst>
+              <a:ext uri="{FF2B5EF4-FFF2-40B4-BE49-F238E27FC236}">
+                <a16:creationId xmlns:a16="http://schemas.microsoft.com/office/drawing/2014/main" id="{6E653AD6-4CED-AE52-B2A7-25FAD67D556C}"/>
+              </a:ext>
+            </a:extLst>
+          </p:cNvPr>
+          <p:cNvSpPr/>
+          <p:nvPr/>
+        </p:nvSpPr>
+        <p:spPr>
+          <a:xfrm>
+            <a:off x="4191000" y="3835400"/>
+            <a:ext cx="2921000" cy="622300"/>
+          </a:xfrm>
+          <a:prstGeom prst="rect">
+            <a:avLst/>
+          </a:prstGeom>
+          <a:solidFill>
+            <a:srgbClr val="FFFFFF"/>
+          </a:solidFill>
+          <a:ln w="10160">
+            <a:solidFill>
+              <a:srgbClr val="333333"/>
+            </a:solidFill>
+          </a:ln>
+        </p:spPr>
+        <p:style>
+          <a:lnRef idx="2">
+            <a:schemeClr val="accent1">
+              <a:shade val="15000"/>
+            </a:schemeClr>
+          </a:lnRef>
+          <a:fillRef idx="1">
+            <a:schemeClr val="accent1"/>
+          </a:fillRef>
+          <a:effectRef idx="0">
+            <a:schemeClr val="accent1"/>
+          </a:effectRef>
+          <a:fontRef idx="minor">
+            <a:schemeClr val="lt1"/>
+          </a:fontRef>
+        </p:style>
+        <p:txBody>
+          <a:bodyPr rtlCol="0" anchor="ctr"/>
+          <a:lstStyle/>
+          <a:p>
+            <a:pPr algn="ctr"/>
+            <a:endParaRPr lang="en-US"/>
+          </a:p>
+        </p:txBody>
+      </p:sp>
+      <p:sp>
+        <p:nvSpPr>
+          <p:cNvPr id="21" name="Rectangle 20">
+            <a:extLst>
+              <a:ext uri="{FF2B5EF4-FFF2-40B4-BE49-F238E27FC236}">
+                <a16:creationId xmlns:a16="http://schemas.microsoft.com/office/drawing/2014/main" id="{3A534B97-FB80-DFD3-A0E9-6E00478BD9AB}"/>
+              </a:ext>
+            </a:extLst>
+          </p:cNvPr>
+          <p:cNvSpPr/>
+          <p:nvPr/>
+        </p:nvSpPr>
+        <p:spPr>
+          <a:xfrm>
+            <a:off x="4191000" y="3835400"/>
+            <a:ext cx="2921000" cy="228600"/>
+          </a:xfrm>
+          <a:prstGeom prst="rect">
+            <a:avLst/>
+          </a:prstGeom>
+          <a:solidFill>
+            <a:srgbClr val="E9EEF0"/>
+          </a:solidFill>
+          <a:ln w="10160">
+            <a:solidFill>
+              <a:srgbClr val="333333"/>
+            </a:solidFill>
+          </a:ln>
+        </p:spPr>
+        <p:style>
+          <a:lnRef idx="2">
+            <a:schemeClr val="accent1">
+              <a:shade val="15000"/>
+            </a:schemeClr>
+          </a:lnRef>
+          <a:fillRef idx="1">
+            <a:schemeClr val="accent1"/>
+          </a:fillRef>
+          <a:effectRef idx="0">
+            <a:schemeClr val="accent1"/>
+          </a:effectRef>
+          <a:fontRef idx="minor">
+            <a:schemeClr val="lt1"/>
+          </a:fontRef>
+        </p:style>
+        <p:txBody>
+          <a:bodyPr rtlCol="0" anchor="ctr"/>
+          <a:lstStyle/>
+          <a:p>
+            <a:pPr algn="ctr"/>
+            <a:endParaRPr lang="en-US"/>
+          </a:p>
+        </p:txBody>
+      </p:sp>
+      <p:sp>
+        <p:nvSpPr>
+          <p:cNvPr id="22" name="TextBox 21">
+            <a:extLst>
+              <a:ext uri="{FF2B5EF4-FFF2-40B4-BE49-F238E27FC236}">
+                <a16:creationId xmlns:a16="http://schemas.microsoft.com/office/drawing/2014/main" id="{3FCDEF79-DFC5-1F7E-F8E2-788426505026}"/>
+              </a:ext>
+            </a:extLst>
+          </p:cNvPr>
+          <p:cNvSpPr txBox="1"/>
+          <p:nvPr/>
+        </p:nvSpPr>
+        <p:spPr>
+          <a:xfrm>
+            <a:off x="4254500" y="3860800"/>
+            <a:ext cx="2794000" cy="177800"/>
+          </a:xfrm>
+          <a:prstGeom prst="rect">
+            <a:avLst/>
+          </a:prstGeom>
+          <a:noFill/>
+        </p:spPr>
+        <p:txBody>
+          <a:bodyPr vert="horz" wrap="square" lIns="0" tIns="0" rIns="0" bIns="0" rtlCol="0">
+            <a:noAutofit/>
+          </a:bodyPr>
+          <a:lstStyle/>
+          <a:p>
+            <a:r>
+              <a:rPr lang="en-US" sz="900" b="1">
+                <a:solidFill>
+                  <a:srgbClr val="111111"/>
+                </a:solidFill>
+                <a:latin typeface="Times New Roman" panose="02020603050405020304" pitchFamily="18" charset="0"/>
+              </a:rPr>
+              <a:t>appointments</a:t>
+            </a:r>
+          </a:p>
+        </p:txBody>
+      </p:sp>
+      <p:sp>
+        <p:nvSpPr>
+          <p:cNvPr id="23" name="TextBox 22">
+            <a:extLst>
+              <a:ext uri="{FF2B5EF4-FFF2-40B4-BE49-F238E27FC236}">
+                <a16:creationId xmlns:a16="http://schemas.microsoft.com/office/drawing/2014/main" id="{F914D7CD-77C7-C327-5ECB-7479CF724076}"/>
+              </a:ext>
+            </a:extLst>
+          </p:cNvPr>
+          <p:cNvSpPr txBox="1"/>
+          <p:nvPr/>
+        </p:nvSpPr>
+        <p:spPr>
+          <a:xfrm>
+            <a:off x="4254500" y="4102100"/>
+            <a:ext cx="2794000" cy="304800"/>
+          </a:xfrm>
+          <a:prstGeom prst="rect">
+            <a:avLst/>
+          </a:prstGeom>
+          <a:noFill/>
+        </p:spPr>
+        <p:txBody>
+          <a:bodyPr vert="horz" wrap="square" lIns="0" tIns="0" rIns="0" bIns="0" rtlCol="0">
+            <a:noAutofit/>
+          </a:bodyPr>
+          <a:lstStyle/>
+          <a:p>
+            <a:r>
+              <a:rPr lang="en-US" sz="800">
+                <a:solidFill>
+                  <a:srgbClr val="111111"/>
+                </a:solidFill>
+                <a:latin typeface="Times New Roman" panose="02020603050405020304" pitchFamily="18" charset="0"/>
+              </a:rPr>
+              <a:t>id PK | user_id FK | starts_at</a:t>
+            </a:r>
+          </a:p>
+        </p:txBody>
+      </p:sp>
+      <p:cxnSp>
+        <p:nvCxnSpPr>
+          <p:cNvPr id="24" name="Straight Arrow Connector 23">
+            <a:extLst>
+              <a:ext uri="{FF2B5EF4-FFF2-40B4-BE49-F238E27FC236}">
+                <a16:creationId xmlns:a16="http://schemas.microsoft.com/office/drawing/2014/main" id="{D3392E1E-9371-9870-61AE-FED611D36B88}"/>
+              </a:ext>
+            </a:extLst>
+          </p:cNvPr>
+          <p:cNvCxnSpPr/>
+          <p:nvPr/>
+        </p:nvCxnSpPr>
+        <p:spPr>
+          <a:xfrm>
+            <a:off x="3365500" y="4883150"/>
+            <a:ext cx="412750" cy="0"/>
+          </a:xfrm>
+          <a:prstGeom prst="straightConnector1">
+            <a:avLst/>
+          </a:prstGeom>
+          <a:ln w="10160">
+            <a:solidFill>
+              <a:srgbClr val="555555"/>
+            </a:solidFill>
+          </a:ln>
+        </p:spPr>
+        <p:style>
+          <a:lnRef idx="2">
+            <a:schemeClr val="accent1"/>
+          </a:lnRef>
+          <a:fillRef idx="0">
+            <a:schemeClr val="accent1"/>
+          </a:fillRef>
+          <a:effectRef idx="1">
+            <a:schemeClr val="accent1"/>
+          </a:effectRef>
+          <a:fontRef idx="minor">
+            <a:schemeClr val="tx1"/>
+          </a:fontRef>
+        </p:style>
+      </p:cxnSp>
+      <p:sp>
+        <p:nvSpPr>
+          <p:cNvPr id="25" name="TextBox 24">
+            <a:extLst>
+              <a:ext uri="{FF2B5EF4-FFF2-40B4-BE49-F238E27FC236}">
+                <a16:creationId xmlns:a16="http://schemas.microsoft.com/office/drawing/2014/main" id="{E75A9195-5086-51EE-367D-7F536B339E80}"/>
+              </a:ext>
+            </a:extLst>
+          </p:cNvPr>
+          <p:cNvSpPr txBox="1"/>
+          <p:nvPr/>
+        </p:nvSpPr>
+        <p:spPr>
+          <a:xfrm>
+            <a:off x="3390900" y="4673600"/>
+            <a:ext cx="355600" cy="165100"/>
+          </a:xfrm>
+          <a:prstGeom prst="rect">
+            <a:avLst/>
+          </a:prstGeom>
+          <a:noFill/>
+        </p:spPr>
+        <p:txBody>
+          <a:bodyPr vert="horz" wrap="square" lIns="0" tIns="0" rIns="0" bIns="0" rtlCol="0">
+            <a:noAutofit/>
+          </a:bodyPr>
+          <a:lstStyle/>
+          <a:p>
+            <a:pPr algn="ctr"/>
+            <a:r>
+              <a:rPr lang="en-US" sz="650">
+                <a:solidFill>
+                  <a:srgbClr val="444444"/>
+                </a:solidFill>
+                <a:latin typeface="Times New Roman" panose="02020603050405020304" pitchFamily="18" charset="0"/>
+              </a:rPr>
+              <a:t>1:N</a:t>
+            </a:r>
+          </a:p>
+        </p:txBody>
+      </p:sp>
+      <p:sp>
+        <p:nvSpPr>
+          <p:cNvPr id="26" name="Rectangle 25">
+            <a:extLst>
+              <a:ext uri="{FF2B5EF4-FFF2-40B4-BE49-F238E27FC236}">
+                <a16:creationId xmlns:a16="http://schemas.microsoft.com/office/drawing/2014/main" id="{4934706B-F9F5-B5BE-B4BE-C66D305A93B9}"/>
+              </a:ext>
+            </a:extLst>
+          </p:cNvPr>
+          <p:cNvSpPr/>
+          <p:nvPr/>
+        </p:nvSpPr>
+        <p:spPr>
+          <a:xfrm>
+            <a:off x="444500" y="4572000"/>
+            <a:ext cx="2921000" cy="622300"/>
+          </a:xfrm>
+          <a:prstGeom prst="rect">
+            <a:avLst/>
+          </a:prstGeom>
+          <a:solidFill>
+            <a:srgbClr val="FFFFFF"/>
+          </a:solidFill>
+          <a:ln w="10160">
+            <a:solidFill>
+              <a:srgbClr val="333333"/>
+            </a:solidFill>
+          </a:ln>
+        </p:spPr>
+        <p:style>
+          <a:lnRef idx="2">
+            <a:schemeClr val="accent1">
+              <a:shade val="15000"/>
+            </a:schemeClr>
+          </a:lnRef>
+          <a:fillRef idx="1">
+            <a:schemeClr val="accent1"/>
+          </a:fillRef>
+          <a:effectRef idx="0">
+            <a:schemeClr val="accent1"/>
+          </a:effectRef>
+          <a:fontRef idx="minor">
+            <a:schemeClr val="lt1"/>
+          </a:fontRef>
+        </p:style>
+        <p:txBody>
+          <a:bodyPr rtlCol="0" anchor="ctr"/>
+          <a:lstStyle/>
+          <a:p>
+            <a:pPr algn="ctr"/>
+            <a:endParaRPr lang="en-US"/>
+          </a:p>
+        </p:txBody>
+      </p:sp>
+      <p:sp>
+        <p:nvSpPr>
+          <p:cNvPr id="27" name="Rectangle 26">
+            <a:extLst>
+              <a:ext uri="{FF2B5EF4-FFF2-40B4-BE49-F238E27FC236}">
+                <a16:creationId xmlns:a16="http://schemas.microsoft.com/office/drawing/2014/main" id="{67513D45-32EE-F5F2-9427-1010409F2575}"/>
+              </a:ext>
+            </a:extLst>
+          </p:cNvPr>
+          <p:cNvSpPr/>
+          <p:nvPr/>
+        </p:nvSpPr>
+        <p:spPr>
+          <a:xfrm>
+            <a:off x="444500" y="4572000"/>
+            <a:ext cx="2921000" cy="228600"/>
+          </a:xfrm>
+          <a:prstGeom prst="rect">
+            <a:avLst/>
+          </a:prstGeom>
+          <a:solidFill>
+            <a:srgbClr val="E9EEF0"/>
+          </a:solidFill>
+          <a:ln w="10160">
+            <a:solidFill>
+              <a:srgbClr val="333333"/>
+            </a:solidFill>
+          </a:ln>
+        </p:spPr>
+        <p:style>
+          <a:lnRef idx="2">
+            <a:schemeClr val="accent1">
+              <a:shade val="15000"/>
+            </a:schemeClr>
+          </a:lnRef>
+          <a:fillRef idx="1">
+            <a:schemeClr val="accent1"/>
+          </a:fillRef>
+          <a:effectRef idx="0">
+            <a:schemeClr val="accent1"/>
+          </a:effectRef>
+          <a:fontRef idx="minor">
+            <a:schemeClr val="lt1"/>
+          </a:fontRef>
+        </p:style>
+        <p:txBody>
+          <a:bodyPr rtlCol="0" anchor="ctr"/>
+          <a:lstStyle/>
+          <a:p>
+            <a:pPr algn="ctr"/>
+            <a:endParaRPr lang="en-US"/>
+          </a:p>
+        </p:txBody>
+      </p:sp>
+      <p:sp>
+        <p:nvSpPr>
+          <p:cNvPr id="28" name="TextBox 27">
+            <a:extLst>
+              <a:ext uri="{FF2B5EF4-FFF2-40B4-BE49-F238E27FC236}">
+                <a16:creationId xmlns:a16="http://schemas.microsoft.com/office/drawing/2014/main" id="{3C328411-B475-75C1-6A5D-A29FAAA28999}"/>
+              </a:ext>
+            </a:extLst>
+          </p:cNvPr>
+          <p:cNvSpPr txBox="1"/>
+          <p:nvPr/>
+        </p:nvSpPr>
+        <p:spPr>
+          <a:xfrm>
+            <a:off x="508000" y="4597400"/>
+            <a:ext cx="2794000" cy="177800"/>
+          </a:xfrm>
+          <a:prstGeom prst="rect">
+            <a:avLst/>
+          </a:prstGeom>
+          <a:noFill/>
+        </p:spPr>
+        <p:txBody>
+          <a:bodyPr vert="horz" wrap="square" lIns="0" tIns="0" rIns="0" bIns="0" rtlCol="0">
+            <a:noAutofit/>
+          </a:bodyPr>
+          <a:lstStyle/>
+          <a:p>
+            <a:r>
+              <a:rPr lang="en-US" sz="900" b="1">
+                <a:solidFill>
+                  <a:srgbClr val="111111"/>
+                </a:solidFill>
+                <a:latin typeface="Times New Roman" panose="02020603050405020304" pitchFamily="18" charset="0"/>
+              </a:rPr>
+              <a:t>care_tasks</a:t>
+            </a:r>
+          </a:p>
+        </p:txBody>
+      </p:sp>
+      <p:sp>
+        <p:nvSpPr>
+          <p:cNvPr id="29" name="TextBox 28">
+            <a:extLst>
+              <a:ext uri="{FF2B5EF4-FFF2-40B4-BE49-F238E27FC236}">
+                <a16:creationId xmlns:a16="http://schemas.microsoft.com/office/drawing/2014/main" id="{A7883D2B-C5C9-AA86-9B59-E1C4FAE6B526}"/>
+              </a:ext>
+            </a:extLst>
+          </p:cNvPr>
+          <p:cNvSpPr txBox="1"/>
+          <p:nvPr/>
+        </p:nvSpPr>
+        <p:spPr>
+          <a:xfrm>
+            <a:off x="508000" y="4838700"/>
+            <a:ext cx="2794000" cy="304800"/>
+          </a:xfrm>
+          <a:prstGeom prst="rect">
+            <a:avLst/>
+          </a:prstGeom>
+          <a:noFill/>
+        </p:spPr>
+        <p:txBody>
+          <a:bodyPr vert="horz" wrap="square" lIns="0" tIns="0" rIns="0" bIns="0" rtlCol="0">
+            <a:noAutofit/>
+          </a:bodyPr>
+          <a:lstStyle/>
+          <a:p>
+            <a:r>
+              <a:rPr lang="en-US" sz="800">
+                <a:solidFill>
+                  <a:srgbClr val="111111"/>
+                </a:solidFill>
+                <a:latin typeface="Times New Roman" panose="02020603050405020304" pitchFamily="18" charset="0"/>
+              </a:rPr>
+              <a:t>id PK | user_id FK | task_detail_id FK</a:t>
+            </a:r>
+          </a:p>
+        </p:txBody>
+      </p:sp>
+      <p:cxnSp>
+        <p:nvCxnSpPr>
+          <p:cNvPr id="30" name="Straight Arrow Connector 29">
+            <a:extLst>
+              <a:ext uri="{FF2B5EF4-FFF2-40B4-BE49-F238E27FC236}">
+                <a16:creationId xmlns:a16="http://schemas.microsoft.com/office/drawing/2014/main" id="{A4192F43-5906-67BE-C8A4-B3A72FBA3C2E}"/>
+              </a:ext>
+            </a:extLst>
+          </p:cNvPr>
+          <p:cNvCxnSpPr/>
+          <p:nvPr/>
+        </p:nvCxnSpPr>
+        <p:spPr>
+          <a:xfrm>
+            <a:off x="3778250" y="4883150"/>
+            <a:ext cx="412750" cy="0"/>
+          </a:xfrm>
+          <a:prstGeom prst="straightConnector1">
+            <a:avLst/>
+          </a:prstGeom>
+          <a:ln w="10160">
+            <a:solidFill>
+              <a:srgbClr val="555555"/>
+            </a:solidFill>
+          </a:ln>
+        </p:spPr>
+        <p:style>
+          <a:lnRef idx="2">
+            <a:schemeClr val="accent1"/>
+          </a:lnRef>
+          <a:fillRef idx="0">
+            <a:schemeClr val="accent1"/>
+          </a:fillRef>
+          <a:effectRef idx="1">
+            <a:schemeClr val="accent1"/>
+          </a:effectRef>
+          <a:fontRef idx="minor">
+            <a:schemeClr val="tx1"/>
+          </a:fontRef>
+        </p:style>
+      </p:cxnSp>
+      <p:sp>
+        <p:nvSpPr>
+          <p:cNvPr id="31" name="TextBox 30">
+            <a:extLst>
+              <a:ext uri="{FF2B5EF4-FFF2-40B4-BE49-F238E27FC236}">
+                <a16:creationId xmlns:a16="http://schemas.microsoft.com/office/drawing/2014/main" id="{34D8CEEA-43AF-3741-F9BD-73A1A36FC6EE}"/>
+              </a:ext>
+            </a:extLst>
+          </p:cNvPr>
+          <p:cNvSpPr txBox="1"/>
+          <p:nvPr/>
+        </p:nvSpPr>
+        <p:spPr>
+          <a:xfrm>
+            <a:off x="3810000" y="4673600"/>
+            <a:ext cx="355600" cy="165100"/>
+          </a:xfrm>
+          <a:prstGeom prst="rect">
+            <a:avLst/>
+          </a:prstGeom>
+          <a:noFill/>
+        </p:spPr>
+        <p:txBody>
+          <a:bodyPr vert="horz" wrap="square" lIns="0" tIns="0" rIns="0" bIns="0" rtlCol="0">
+            <a:noAutofit/>
+          </a:bodyPr>
+          <a:lstStyle/>
+          <a:p>
+            <a:pPr algn="ctr"/>
+            <a:r>
+              <a:rPr lang="en-US" sz="650">
+                <a:solidFill>
+                  <a:srgbClr val="444444"/>
+                </a:solidFill>
+                <a:latin typeface="Times New Roman" panose="02020603050405020304" pitchFamily="18" charset="0"/>
+              </a:rPr>
+              <a:t>1:N</a:t>
+            </a:r>
+          </a:p>
+        </p:txBody>
+      </p:sp>
+      <p:sp>
+        <p:nvSpPr>
+          <p:cNvPr id="32" name="Rectangle 31">
+            <a:extLst>
+              <a:ext uri="{FF2B5EF4-FFF2-40B4-BE49-F238E27FC236}">
+                <a16:creationId xmlns:a16="http://schemas.microsoft.com/office/drawing/2014/main" id="{B7718871-EA49-77E3-4869-F3981223E687}"/>
+              </a:ext>
+            </a:extLst>
+          </p:cNvPr>
+          <p:cNvSpPr/>
+          <p:nvPr/>
+        </p:nvSpPr>
+        <p:spPr>
+          <a:xfrm>
+            <a:off x="4191000" y="4572000"/>
+            <a:ext cx="2921000" cy="622300"/>
+          </a:xfrm>
+          <a:prstGeom prst="rect">
+            <a:avLst/>
+          </a:prstGeom>
+          <a:solidFill>
+            <a:srgbClr val="FFFFFF"/>
+          </a:solidFill>
+          <a:ln w="10160">
+            <a:solidFill>
+              <a:srgbClr val="333333"/>
+            </a:solidFill>
+          </a:ln>
+        </p:spPr>
+        <p:style>
+          <a:lnRef idx="2">
+            <a:schemeClr val="accent1">
+              <a:shade val="15000"/>
+            </a:schemeClr>
+          </a:lnRef>
+          <a:fillRef idx="1">
+            <a:schemeClr val="accent1"/>
+          </a:fillRef>
+          <a:effectRef idx="0">
+            <a:schemeClr val="accent1"/>
+          </a:effectRef>
+          <a:fontRef idx="minor">
+            <a:schemeClr val="lt1"/>
+          </a:fontRef>
+        </p:style>
+        <p:txBody>
+          <a:bodyPr rtlCol="0" anchor="ctr"/>
+          <a:lstStyle/>
+          <a:p>
+            <a:pPr algn="ctr"/>
+            <a:endParaRPr lang="en-US"/>
+          </a:p>
+        </p:txBody>
+      </p:sp>
+      <p:sp>
+        <p:nvSpPr>
+          <p:cNvPr id="33" name="Rectangle 32">
+            <a:extLst>
+              <a:ext uri="{FF2B5EF4-FFF2-40B4-BE49-F238E27FC236}">
+                <a16:creationId xmlns:a16="http://schemas.microsoft.com/office/drawing/2014/main" id="{EE2DA3FC-832A-39F0-B6D9-0E45899835CF}"/>
+              </a:ext>
+            </a:extLst>
+          </p:cNvPr>
+          <p:cNvSpPr/>
+          <p:nvPr/>
+        </p:nvSpPr>
+        <p:spPr>
+          <a:xfrm>
+            <a:off x="4191000" y="4572000"/>
+            <a:ext cx="2921000" cy="228600"/>
+          </a:xfrm>
+          <a:prstGeom prst="rect">
+            <a:avLst/>
+          </a:prstGeom>
+          <a:solidFill>
+            <a:srgbClr val="E9EEF0"/>
+          </a:solidFill>
+          <a:ln w="10160">
+            <a:solidFill>
+              <a:srgbClr val="333333"/>
+            </a:solidFill>
+          </a:ln>
+        </p:spPr>
+        <p:style>
+          <a:lnRef idx="2">
+            <a:schemeClr val="accent1">
+              <a:shade val="15000"/>
+            </a:schemeClr>
+          </a:lnRef>
+          <a:fillRef idx="1">
+            <a:schemeClr val="accent1"/>
+          </a:fillRef>
+          <a:effectRef idx="0">
+            <a:schemeClr val="accent1"/>
+          </a:effectRef>
+          <a:fontRef idx="minor">
+            <a:schemeClr val="lt1"/>
+          </a:fontRef>
+        </p:style>
+        <p:txBody>
+          <a:bodyPr rtlCol="0" anchor="ctr"/>
+          <a:lstStyle/>
+          <a:p>
+            <a:pPr algn="ctr"/>
+            <a:endParaRPr lang="en-US"/>
+          </a:p>
+        </p:txBody>
+      </p:sp>
+      <p:sp>
+        <p:nvSpPr>
+          <p:cNvPr id="34" name="TextBox 33">
+            <a:extLst>
+              <a:ext uri="{FF2B5EF4-FFF2-40B4-BE49-F238E27FC236}">
+                <a16:creationId xmlns:a16="http://schemas.microsoft.com/office/drawing/2014/main" id="{E7350CF5-3350-030C-7A66-3820857100B1}"/>
+              </a:ext>
+            </a:extLst>
+          </p:cNvPr>
+          <p:cNvSpPr txBox="1"/>
+          <p:nvPr/>
+        </p:nvSpPr>
+        <p:spPr>
+          <a:xfrm>
+            <a:off x="4254500" y="4597400"/>
+            <a:ext cx="2794000" cy="177800"/>
+          </a:xfrm>
+          <a:prstGeom prst="rect">
+            <a:avLst/>
+          </a:prstGeom>
+          <a:noFill/>
+        </p:spPr>
+        <p:txBody>
+          <a:bodyPr vert="horz" wrap="square" lIns="0" tIns="0" rIns="0" bIns="0" rtlCol="0">
+            <a:noAutofit/>
+          </a:bodyPr>
+          <a:lstStyle/>
+          <a:p>
+            <a:r>
+              <a:rPr lang="en-US" sz="900" b="1">
+                <a:solidFill>
+                  <a:srgbClr val="111111"/>
+                </a:solidFill>
+                <a:latin typeface="Times New Roman" panose="02020603050405020304" pitchFamily="18" charset="0"/>
+              </a:rPr>
+              <a:t>daily_wellbeing</a:t>
+            </a:r>
+          </a:p>
+        </p:txBody>
+      </p:sp>
+      <p:sp>
+        <p:nvSpPr>
+          <p:cNvPr id="35" name="TextBox 34">
+            <a:extLst>
+              <a:ext uri="{FF2B5EF4-FFF2-40B4-BE49-F238E27FC236}">
+                <a16:creationId xmlns:a16="http://schemas.microsoft.com/office/drawing/2014/main" id="{D32EBCD7-EDB0-6488-33B6-BFA99EFFAF08}"/>
+              </a:ext>
+            </a:extLst>
+          </p:cNvPr>
+          <p:cNvSpPr txBox="1"/>
+          <p:nvPr/>
+        </p:nvSpPr>
+        <p:spPr>
+          <a:xfrm>
+            <a:off x="4254500" y="4838700"/>
+            <a:ext cx="2794000" cy="304800"/>
+          </a:xfrm>
+          <a:prstGeom prst="rect">
+            <a:avLst/>
+          </a:prstGeom>
+          <a:noFill/>
+        </p:spPr>
+        <p:txBody>
+          <a:bodyPr vert="horz" wrap="square" lIns="0" tIns="0" rIns="0" bIns="0" rtlCol="0">
+            <a:noAutofit/>
+          </a:bodyPr>
+          <a:lstStyle/>
+          <a:p>
+            <a:r>
+              <a:rPr lang="en-US" sz="800">
+                <a:solidFill>
+                  <a:srgbClr val="111111"/>
+                </a:solidFill>
+                <a:latin typeface="Times New Roman" panose="02020603050405020304" pitchFamily="18" charset="0"/>
+              </a:rPr>
+              <a:t>user_id FK | entry_date UNIQUE</a:t>
+            </a:r>
+          </a:p>
+        </p:txBody>
+      </p:sp>
+      <p:cxnSp>
+        <p:nvCxnSpPr>
+          <p:cNvPr id="36" name="Straight Arrow Connector 35">
+            <a:extLst>
+              <a:ext uri="{FF2B5EF4-FFF2-40B4-BE49-F238E27FC236}">
+                <a16:creationId xmlns:a16="http://schemas.microsoft.com/office/drawing/2014/main" id="{3F79B079-BF07-CDE2-68E1-DEEAE550A9FD}"/>
+              </a:ext>
+            </a:extLst>
+          </p:cNvPr>
+          <p:cNvCxnSpPr/>
+          <p:nvPr/>
+        </p:nvCxnSpPr>
+        <p:spPr>
+          <a:xfrm>
+            <a:off x="3365500" y="5619750"/>
+            <a:ext cx="412750" cy="0"/>
+          </a:xfrm>
+          <a:prstGeom prst="straightConnector1">
+            <a:avLst/>
+          </a:prstGeom>
+          <a:ln w="10160">
+            <a:solidFill>
+              <a:srgbClr val="555555"/>
+            </a:solidFill>
+          </a:ln>
+        </p:spPr>
+        <p:style>
+          <a:lnRef idx="2">
+            <a:schemeClr val="accent1"/>
+          </a:lnRef>
+          <a:fillRef idx="0">
+            <a:schemeClr val="accent1"/>
+          </a:fillRef>
+          <a:effectRef idx="1">
+            <a:schemeClr val="accent1"/>
+          </a:effectRef>
+          <a:fontRef idx="minor">
+            <a:schemeClr val="tx1"/>
+          </a:fontRef>
+        </p:style>
+      </p:cxnSp>
+      <p:sp>
+        <p:nvSpPr>
+          <p:cNvPr id="37" name="TextBox 36">
+            <a:extLst>
+              <a:ext uri="{FF2B5EF4-FFF2-40B4-BE49-F238E27FC236}">
+                <a16:creationId xmlns:a16="http://schemas.microsoft.com/office/drawing/2014/main" id="{014FF566-7802-C7C3-0EA1-A99319EA3AB9}"/>
+              </a:ext>
+            </a:extLst>
+          </p:cNvPr>
+          <p:cNvSpPr txBox="1"/>
+          <p:nvPr/>
+        </p:nvSpPr>
+        <p:spPr>
+          <a:xfrm>
+            <a:off x="3390900" y="5410200"/>
+            <a:ext cx="355600" cy="165100"/>
+          </a:xfrm>
+          <a:prstGeom prst="rect">
+            <a:avLst/>
+          </a:prstGeom>
+          <a:noFill/>
+        </p:spPr>
+        <p:txBody>
+          <a:bodyPr vert="horz" wrap="square" lIns="0" tIns="0" rIns="0" bIns="0" rtlCol="0">
+            <a:noAutofit/>
+          </a:bodyPr>
+          <a:lstStyle/>
+          <a:p>
+            <a:pPr algn="ctr"/>
+            <a:r>
+              <a:rPr lang="en-US" sz="650">
+                <a:solidFill>
+                  <a:srgbClr val="444444"/>
+                </a:solidFill>
+                <a:latin typeface="Times New Roman" panose="02020603050405020304" pitchFamily="18" charset="0"/>
+              </a:rPr>
+              <a:t>1:N</a:t>
+            </a:r>
+          </a:p>
+        </p:txBody>
+      </p:sp>
+      <p:sp>
+        <p:nvSpPr>
+          <p:cNvPr id="38" name="Rectangle 37">
+            <a:extLst>
+              <a:ext uri="{FF2B5EF4-FFF2-40B4-BE49-F238E27FC236}">
+                <a16:creationId xmlns:a16="http://schemas.microsoft.com/office/drawing/2014/main" id="{48D83D17-84B5-BA0A-D118-3F4EE6CE3000}"/>
+              </a:ext>
+            </a:extLst>
+          </p:cNvPr>
+          <p:cNvSpPr/>
+          <p:nvPr/>
+        </p:nvSpPr>
+        <p:spPr>
+          <a:xfrm>
+            <a:off x="444500" y="5308600"/>
+            <a:ext cx="2921000" cy="622300"/>
+          </a:xfrm>
+          <a:prstGeom prst="rect">
+            <a:avLst/>
+          </a:prstGeom>
+          <a:solidFill>
+            <a:srgbClr val="FFFFFF"/>
+          </a:solidFill>
+          <a:ln w="10160">
+            <a:solidFill>
+              <a:srgbClr val="333333"/>
+            </a:solidFill>
+          </a:ln>
+        </p:spPr>
+        <p:style>
+          <a:lnRef idx="2">
+            <a:schemeClr val="accent1">
+              <a:shade val="15000"/>
+            </a:schemeClr>
+          </a:lnRef>
+          <a:fillRef idx="1">
+            <a:schemeClr val="accent1"/>
+          </a:fillRef>
+          <a:effectRef idx="0">
+            <a:schemeClr val="accent1"/>
+          </a:effectRef>
+          <a:fontRef idx="minor">
+            <a:schemeClr val="lt1"/>
+          </a:fontRef>
+        </p:style>
+        <p:txBody>
+          <a:bodyPr rtlCol="0" anchor="ctr"/>
+          <a:lstStyle/>
+          <a:p>
+            <a:pPr algn="ctr"/>
+            <a:endParaRPr lang="en-US"/>
+          </a:p>
+        </p:txBody>
+      </p:sp>
+      <p:sp>
+        <p:nvSpPr>
+          <p:cNvPr id="39" name="Rectangle 38">
+            <a:extLst>
+              <a:ext uri="{FF2B5EF4-FFF2-40B4-BE49-F238E27FC236}">
+                <a16:creationId xmlns:a16="http://schemas.microsoft.com/office/drawing/2014/main" id="{49089613-5636-E983-BBB2-BBE8A5126D74}"/>
+              </a:ext>
+            </a:extLst>
+          </p:cNvPr>
+          <p:cNvSpPr/>
+          <p:nvPr/>
+        </p:nvSpPr>
+        <p:spPr>
+          <a:xfrm>
+            <a:off x="444500" y="5308600"/>
+            <a:ext cx="2921000" cy="228600"/>
+          </a:xfrm>
+          <a:prstGeom prst="rect">
+            <a:avLst/>
+          </a:prstGeom>
+          <a:solidFill>
+            <a:srgbClr val="E9EEF0"/>
+          </a:solidFill>
+          <a:ln w="10160">
+            <a:solidFill>
+              <a:srgbClr val="333333"/>
+            </a:solidFill>
+          </a:ln>
+        </p:spPr>
+        <p:style>
+          <a:lnRef idx="2">
+            <a:schemeClr val="accent1">
+              <a:shade val="15000"/>
+            </a:schemeClr>
+          </a:lnRef>
+          <a:fillRef idx="1">
+            <a:schemeClr val="accent1"/>
+          </a:fillRef>
+          <a:effectRef idx="0">
+            <a:schemeClr val="accent1"/>
+          </a:effectRef>
+          <a:fontRef idx="minor">
+            <a:schemeClr val="lt1"/>
+          </a:fontRef>
+        </p:style>
+        <p:txBody>
+          <a:bodyPr rtlCol="0" anchor="ctr"/>
+          <a:lstStyle/>
+          <a:p>
+            <a:pPr algn="ctr"/>
+            <a:endParaRPr lang="en-US"/>
+          </a:p>
+        </p:txBody>
+      </p:sp>
+      <p:sp>
+        <p:nvSpPr>
+          <p:cNvPr id="40" name="TextBox 39">
+            <a:extLst>
+              <a:ext uri="{FF2B5EF4-FFF2-40B4-BE49-F238E27FC236}">
+                <a16:creationId xmlns:a16="http://schemas.microsoft.com/office/drawing/2014/main" id="{249E0015-E64F-0904-01E6-AFC0443DC959}"/>
+              </a:ext>
+            </a:extLst>
+          </p:cNvPr>
+          <p:cNvSpPr txBox="1"/>
+          <p:nvPr/>
+        </p:nvSpPr>
+        <p:spPr>
+          <a:xfrm>
+            <a:off x="508000" y="5334000"/>
+            <a:ext cx="2794000" cy="177800"/>
+          </a:xfrm>
+          <a:prstGeom prst="rect">
+            <a:avLst/>
+          </a:prstGeom>
+          <a:noFill/>
+        </p:spPr>
+        <p:txBody>
+          <a:bodyPr vert="horz" wrap="square" lIns="0" tIns="0" rIns="0" bIns="0" rtlCol="0">
+            <a:noAutofit/>
+          </a:bodyPr>
+          <a:lstStyle/>
+          <a:p>
+            <a:r>
+              <a:rPr lang="en-US" sz="900" b="1">
+                <a:solidFill>
+                  <a:srgbClr val="111111"/>
+                </a:solidFill>
+                <a:latin typeface="Times New Roman" panose="02020603050405020304" pitchFamily="18" charset="0"/>
+              </a:rPr>
+              <a:t>symptom_entries</a:t>
+            </a:r>
+          </a:p>
+        </p:txBody>
+      </p:sp>
+      <p:sp>
+        <p:nvSpPr>
+          <p:cNvPr id="41" name="TextBox 40">
+            <a:extLst>
+              <a:ext uri="{FF2B5EF4-FFF2-40B4-BE49-F238E27FC236}">
+                <a16:creationId xmlns:a16="http://schemas.microsoft.com/office/drawing/2014/main" id="{1B3814A3-7FC6-4A6F-AAD7-6810766DC162}"/>
+              </a:ext>
+            </a:extLst>
+          </p:cNvPr>
+          <p:cNvSpPr txBox="1"/>
+          <p:nvPr/>
+        </p:nvSpPr>
+        <p:spPr>
+          <a:xfrm>
+            <a:off x="508000" y="5575300"/>
+            <a:ext cx="2794000" cy="304800"/>
+          </a:xfrm>
+          <a:prstGeom prst="rect">
+            <a:avLst/>
+          </a:prstGeom>
+          <a:noFill/>
+        </p:spPr>
+        <p:txBody>
+          <a:bodyPr vert="horz" wrap="square" lIns="0" tIns="0" rIns="0" bIns="0" rtlCol="0">
+            <a:noAutofit/>
+          </a:bodyPr>
+          <a:lstStyle/>
+          <a:p>
+            <a:r>
+              <a:rPr lang="en-US" sz="800">
+                <a:solidFill>
+                  <a:srgbClr val="111111"/>
+                </a:solidFill>
+                <a:latin typeface="Times New Roman" panose="02020603050405020304" pitchFamily="18" charset="0"/>
+              </a:rPr>
+              <a:t>id PK | user_id FK | severity</a:t>
+            </a:r>
+          </a:p>
+        </p:txBody>
+      </p:sp>
+      <p:cxnSp>
+        <p:nvCxnSpPr>
+          <p:cNvPr id="42" name="Straight Arrow Connector 41">
+            <a:extLst>
+              <a:ext uri="{FF2B5EF4-FFF2-40B4-BE49-F238E27FC236}">
+                <a16:creationId xmlns:a16="http://schemas.microsoft.com/office/drawing/2014/main" id="{73786FAC-D57D-BA93-E009-5E3FF68D1E76}"/>
+              </a:ext>
+            </a:extLst>
+          </p:cNvPr>
+          <p:cNvCxnSpPr/>
+          <p:nvPr/>
+        </p:nvCxnSpPr>
+        <p:spPr>
+          <a:xfrm>
+            <a:off x="3778250" y="5619750"/>
+            <a:ext cx="412750" cy="0"/>
+          </a:xfrm>
+          <a:prstGeom prst="straightConnector1">
+            <a:avLst/>
+          </a:prstGeom>
+          <a:ln w="10160">
+            <a:solidFill>
+              <a:srgbClr val="555555"/>
+            </a:solidFill>
+          </a:ln>
+        </p:spPr>
+        <p:style>
+          <a:lnRef idx="2">
+            <a:schemeClr val="accent1"/>
+          </a:lnRef>
+          <a:fillRef idx="0">
+            <a:schemeClr val="accent1"/>
+          </a:fillRef>
+          <a:effectRef idx="1">
+            <a:schemeClr val="accent1"/>
+          </a:effectRef>
+          <a:fontRef idx="minor">
+            <a:schemeClr val="tx1"/>
+          </a:fontRef>
+        </p:style>
+      </p:cxnSp>
+      <p:sp>
+        <p:nvSpPr>
+          <p:cNvPr id="43" name="TextBox 42">
+            <a:extLst>
+              <a:ext uri="{FF2B5EF4-FFF2-40B4-BE49-F238E27FC236}">
+                <a16:creationId xmlns:a16="http://schemas.microsoft.com/office/drawing/2014/main" id="{E597B037-753B-F769-036D-E8CD32CDCD2C}"/>
+              </a:ext>
+            </a:extLst>
+          </p:cNvPr>
+          <p:cNvSpPr txBox="1"/>
+          <p:nvPr/>
+        </p:nvSpPr>
+        <p:spPr>
+          <a:xfrm>
+            <a:off x="3810000" y="5410200"/>
+            <a:ext cx="355600" cy="165100"/>
+          </a:xfrm>
+          <a:prstGeom prst="rect">
+            <a:avLst/>
+          </a:prstGeom>
+          <a:noFill/>
+        </p:spPr>
+        <p:txBody>
+          <a:bodyPr vert="horz" wrap="square" lIns="0" tIns="0" rIns="0" bIns="0" rtlCol="0">
+            <a:noAutofit/>
+          </a:bodyPr>
+          <a:lstStyle/>
+          <a:p>
+            <a:pPr algn="ctr"/>
+            <a:r>
+              <a:rPr lang="en-US" sz="650">
+                <a:solidFill>
+                  <a:srgbClr val="444444"/>
+                </a:solidFill>
+                <a:latin typeface="Times New Roman" panose="02020603050405020304" pitchFamily="18" charset="0"/>
+              </a:rPr>
+              <a:t>1:N</a:t>
+            </a:r>
+          </a:p>
+        </p:txBody>
+      </p:sp>
+      <p:sp>
+        <p:nvSpPr>
+          <p:cNvPr id="44" name="Rectangle 43">
+            <a:extLst>
+              <a:ext uri="{FF2B5EF4-FFF2-40B4-BE49-F238E27FC236}">
+                <a16:creationId xmlns:a16="http://schemas.microsoft.com/office/drawing/2014/main" id="{EF44FF70-3FEB-972A-6E1C-7FB29A113DF3}"/>
+              </a:ext>
+            </a:extLst>
+          </p:cNvPr>
+          <p:cNvSpPr/>
+          <p:nvPr/>
+        </p:nvSpPr>
+        <p:spPr>
+          <a:xfrm>
+            <a:off x="4191000" y="5308600"/>
+            <a:ext cx="2921000" cy="622300"/>
+          </a:xfrm>
+          <a:prstGeom prst="rect">
+            <a:avLst/>
+          </a:prstGeom>
+          <a:solidFill>
+            <a:srgbClr val="FFFFFF"/>
+          </a:solidFill>
+          <a:ln w="10160">
+            <a:solidFill>
+              <a:srgbClr val="333333"/>
+            </a:solidFill>
+          </a:ln>
+        </p:spPr>
+        <p:style>
+          <a:lnRef idx="2">
+            <a:schemeClr val="accent1">
+              <a:shade val="15000"/>
+            </a:schemeClr>
+          </a:lnRef>
+          <a:fillRef idx="1">
+            <a:schemeClr val="accent1"/>
+          </a:fillRef>
+          <a:effectRef idx="0">
+            <a:schemeClr val="accent1"/>
+          </a:effectRef>
+          <a:fontRef idx="minor">
+            <a:schemeClr val="lt1"/>
+          </a:fontRef>
+        </p:style>
+        <p:txBody>
+          <a:bodyPr rtlCol="0" anchor="ctr"/>
+          <a:lstStyle/>
+          <a:p>
+            <a:pPr algn="ctr"/>
+            <a:endParaRPr lang="en-US"/>
+          </a:p>
+        </p:txBody>
+      </p:sp>
+      <p:sp>
+        <p:nvSpPr>
+          <p:cNvPr id="45" name="Rectangle 44">
+            <a:extLst>
+              <a:ext uri="{FF2B5EF4-FFF2-40B4-BE49-F238E27FC236}">
+                <a16:creationId xmlns:a16="http://schemas.microsoft.com/office/drawing/2014/main" id="{2B9A9F12-415E-83D3-5961-1F22E40C6CB4}"/>
+              </a:ext>
+            </a:extLst>
+          </p:cNvPr>
+          <p:cNvSpPr/>
+          <p:nvPr/>
+        </p:nvSpPr>
+        <p:spPr>
+          <a:xfrm>
+            <a:off x="4191000" y="5308600"/>
+            <a:ext cx="2921000" cy="228600"/>
+          </a:xfrm>
+          <a:prstGeom prst="rect">
+            <a:avLst/>
+          </a:prstGeom>
+          <a:solidFill>
+            <a:srgbClr val="E9EEF0"/>
+          </a:solidFill>
+          <a:ln w="10160">
+            <a:solidFill>
+              <a:srgbClr val="333333"/>
+            </a:solidFill>
+          </a:ln>
+        </p:spPr>
+        <p:style>
+          <a:lnRef idx="2">
+            <a:schemeClr val="accent1">
+              <a:shade val="15000"/>
+            </a:schemeClr>
+          </a:lnRef>
+          <a:fillRef idx="1">
+            <a:schemeClr val="accent1"/>
+          </a:fillRef>
+          <a:effectRef idx="0">
+            <a:schemeClr val="accent1"/>
+          </a:effectRef>
+          <a:fontRef idx="minor">
+            <a:schemeClr val="lt1"/>
+          </a:fontRef>
+        </p:style>
+        <p:txBody>
+          <a:bodyPr rtlCol="0" anchor="ctr"/>
+          <a:lstStyle/>
+          <a:p>
+            <a:pPr algn="ctr"/>
+            <a:endParaRPr lang="en-US"/>
+          </a:p>
+        </p:txBody>
+      </p:sp>
+      <p:sp>
+        <p:nvSpPr>
+          <p:cNvPr id="46" name="TextBox 45">
+            <a:extLst>
+              <a:ext uri="{FF2B5EF4-FFF2-40B4-BE49-F238E27FC236}">
+                <a16:creationId xmlns:a16="http://schemas.microsoft.com/office/drawing/2014/main" id="{4F020A9D-7296-C8B1-97B7-0FBA7BEAC903}"/>
+              </a:ext>
+            </a:extLst>
+          </p:cNvPr>
+          <p:cNvSpPr txBox="1"/>
+          <p:nvPr/>
+        </p:nvSpPr>
+        <p:spPr>
+          <a:xfrm>
+            <a:off x="4254500" y="5334000"/>
+            <a:ext cx="2794000" cy="177800"/>
+          </a:xfrm>
+          <a:prstGeom prst="rect">
+            <a:avLst/>
+          </a:prstGeom>
+          <a:noFill/>
+        </p:spPr>
+        <p:txBody>
+          <a:bodyPr vert="horz" wrap="square" lIns="0" tIns="0" rIns="0" bIns="0" rtlCol="0">
+            <a:noAutofit/>
+          </a:bodyPr>
+          <a:lstStyle/>
+          <a:p>
+            <a:r>
+              <a:rPr lang="en-US" sz="900" b="1">
+                <a:solidFill>
+                  <a:srgbClr val="111111"/>
+                </a:solidFill>
+                <a:latin typeface="Times New Roman" panose="02020603050405020304" pitchFamily="18" charset="0"/>
+              </a:rPr>
+              <a:t>pregnancy_milestones</a:t>
+            </a:r>
+          </a:p>
+        </p:txBody>
+      </p:sp>
+      <p:sp>
+        <p:nvSpPr>
+          <p:cNvPr id="47" name="TextBox 46">
+            <a:extLst>
+              <a:ext uri="{FF2B5EF4-FFF2-40B4-BE49-F238E27FC236}">
+                <a16:creationId xmlns:a16="http://schemas.microsoft.com/office/drawing/2014/main" id="{048555F9-AAC7-31D8-B434-332BC575D25E}"/>
+              </a:ext>
+            </a:extLst>
+          </p:cNvPr>
+          <p:cNvSpPr txBox="1"/>
+          <p:nvPr/>
+        </p:nvSpPr>
+        <p:spPr>
+          <a:xfrm>
+            <a:off x="4254500" y="5575300"/>
+            <a:ext cx="2794000" cy="304800"/>
+          </a:xfrm>
+          <a:prstGeom prst="rect">
+            <a:avLst/>
+          </a:prstGeom>
+          <a:noFill/>
+        </p:spPr>
+        <p:txBody>
+          <a:bodyPr vert="horz" wrap="square" lIns="0" tIns="0" rIns="0" bIns="0" rtlCol="0">
+            <a:noAutofit/>
+          </a:bodyPr>
+          <a:lstStyle/>
+          <a:p>
+            <a:r>
+              <a:rPr lang="en-US" sz="800">
+                <a:solidFill>
+                  <a:srgbClr val="111111"/>
+                </a:solidFill>
+                <a:latin typeface="Times New Roman" panose="02020603050405020304" pitchFamily="18" charset="0"/>
+              </a:rPr>
+              <a:t>id PK | user_id FK | week_number</a:t>
+            </a:r>
+          </a:p>
+        </p:txBody>
+      </p:sp>
+      <p:cxnSp>
+        <p:nvCxnSpPr>
+          <p:cNvPr id="48" name="Straight Arrow Connector 47">
+            <a:extLst>
+              <a:ext uri="{FF2B5EF4-FFF2-40B4-BE49-F238E27FC236}">
+                <a16:creationId xmlns:a16="http://schemas.microsoft.com/office/drawing/2014/main" id="{36A08DE0-A462-1321-713B-AE3D6C8BD7A1}"/>
+              </a:ext>
+            </a:extLst>
+          </p:cNvPr>
+          <p:cNvCxnSpPr/>
+          <p:nvPr/>
+        </p:nvCxnSpPr>
+        <p:spPr>
+          <a:xfrm>
+            <a:off x="3365500" y="6356350"/>
+            <a:ext cx="412750" cy="0"/>
+          </a:xfrm>
+          <a:prstGeom prst="straightConnector1">
+            <a:avLst/>
+          </a:prstGeom>
+          <a:ln w="10160">
+            <a:solidFill>
+              <a:srgbClr val="555555"/>
+            </a:solidFill>
+          </a:ln>
+        </p:spPr>
+        <p:style>
+          <a:lnRef idx="2">
+            <a:schemeClr val="accent1"/>
+          </a:lnRef>
+          <a:fillRef idx="0">
+            <a:schemeClr val="accent1"/>
+          </a:fillRef>
+          <a:effectRef idx="1">
+            <a:schemeClr val="accent1"/>
+          </a:effectRef>
+          <a:fontRef idx="minor">
+            <a:schemeClr val="tx1"/>
+          </a:fontRef>
+        </p:style>
+      </p:cxnSp>
+      <p:sp>
+        <p:nvSpPr>
+          <p:cNvPr id="49" name="TextBox 48">
+            <a:extLst>
+              <a:ext uri="{FF2B5EF4-FFF2-40B4-BE49-F238E27FC236}">
+                <a16:creationId xmlns:a16="http://schemas.microsoft.com/office/drawing/2014/main" id="{2E0BD29B-20B8-4651-6135-829EC17D649D}"/>
+              </a:ext>
+            </a:extLst>
+          </p:cNvPr>
+          <p:cNvSpPr txBox="1"/>
+          <p:nvPr/>
+        </p:nvSpPr>
+        <p:spPr>
+          <a:xfrm>
+            <a:off x="3390900" y="6146800"/>
+            <a:ext cx="355600" cy="165100"/>
+          </a:xfrm>
+          <a:prstGeom prst="rect">
+            <a:avLst/>
+          </a:prstGeom>
+          <a:noFill/>
+        </p:spPr>
+        <p:txBody>
+          <a:bodyPr vert="horz" wrap="square" lIns="0" tIns="0" rIns="0" bIns="0" rtlCol="0">
+            <a:noAutofit/>
+          </a:bodyPr>
+          <a:lstStyle/>
+          <a:p>
+            <a:pPr algn="ctr"/>
+            <a:r>
+              <a:rPr lang="en-US" sz="650">
+                <a:solidFill>
+                  <a:srgbClr val="444444"/>
+                </a:solidFill>
+                <a:latin typeface="Times New Roman" panose="02020603050405020304" pitchFamily="18" charset="0"/>
+              </a:rPr>
+              <a:t>1:N</a:t>
+            </a:r>
+          </a:p>
+        </p:txBody>
+      </p:sp>
+      <p:sp>
+        <p:nvSpPr>
+          <p:cNvPr id="50" name="Rectangle 49">
+            <a:extLst>
+              <a:ext uri="{FF2B5EF4-FFF2-40B4-BE49-F238E27FC236}">
+                <a16:creationId xmlns:a16="http://schemas.microsoft.com/office/drawing/2014/main" id="{6D040E40-2A8F-9AAF-D2DB-0C532569A2D1}"/>
+              </a:ext>
+            </a:extLst>
+          </p:cNvPr>
+          <p:cNvSpPr/>
+          <p:nvPr/>
+        </p:nvSpPr>
+        <p:spPr>
+          <a:xfrm>
+            <a:off x="444500" y="6045200"/>
+            <a:ext cx="2921000" cy="622300"/>
+          </a:xfrm>
+          <a:prstGeom prst="rect">
+            <a:avLst/>
+          </a:prstGeom>
+          <a:solidFill>
+            <a:srgbClr val="FFFFFF"/>
+          </a:solidFill>
+          <a:ln w="10160">
+            <a:solidFill>
+              <a:srgbClr val="333333"/>
+            </a:solidFill>
+          </a:ln>
+        </p:spPr>
+        <p:style>
+          <a:lnRef idx="2">
+            <a:schemeClr val="accent1">
+              <a:shade val="15000"/>
+            </a:schemeClr>
+          </a:lnRef>
+          <a:fillRef idx="1">
+            <a:schemeClr val="accent1"/>
+          </a:fillRef>
+          <a:effectRef idx="0">
+            <a:schemeClr val="accent1"/>
+          </a:effectRef>
+          <a:fontRef idx="minor">
+            <a:schemeClr val="lt1"/>
+          </a:fontRef>
+        </p:style>
+        <p:txBody>
+          <a:bodyPr rtlCol="0" anchor="ctr"/>
+          <a:lstStyle/>
+          <a:p>
+            <a:pPr algn="ctr"/>
+            <a:endParaRPr lang="en-US"/>
+          </a:p>
+        </p:txBody>
+      </p:sp>
+      <p:sp>
+        <p:nvSpPr>
+          <p:cNvPr id="51" name="Rectangle 50">
+            <a:extLst>
+              <a:ext uri="{FF2B5EF4-FFF2-40B4-BE49-F238E27FC236}">
+                <a16:creationId xmlns:a16="http://schemas.microsoft.com/office/drawing/2014/main" id="{2058FD09-6A4C-4588-ECF0-389B226FE5D8}"/>
+              </a:ext>
+            </a:extLst>
+          </p:cNvPr>
+          <p:cNvSpPr/>
+          <p:nvPr/>
+        </p:nvSpPr>
+        <p:spPr>
+          <a:xfrm>
+            <a:off x="444500" y="6045200"/>
+            <a:ext cx="2921000" cy="228600"/>
+          </a:xfrm>
+          <a:prstGeom prst="rect">
+            <a:avLst/>
+          </a:prstGeom>
+          <a:solidFill>
+            <a:srgbClr val="E9EEF0"/>
+          </a:solidFill>
+          <a:ln w="10160">
+            <a:solidFill>
+              <a:srgbClr val="333333"/>
+            </a:solidFill>
+          </a:ln>
+        </p:spPr>
+        <p:style>
+          <a:lnRef idx="2">
+            <a:schemeClr val="accent1">
+              <a:shade val="15000"/>
+            </a:schemeClr>
+          </a:lnRef>
+          <a:fillRef idx="1">
+            <a:schemeClr val="accent1"/>
+          </a:fillRef>
+          <a:effectRef idx="0">
+            <a:schemeClr val="accent1"/>
+          </a:effectRef>
+          <a:fontRef idx="minor">
+            <a:schemeClr val="lt1"/>
+          </a:fontRef>
+        </p:style>
+        <p:txBody>
+          <a:bodyPr rtlCol="0" anchor="ctr"/>
+          <a:lstStyle/>
+          <a:p>
+            <a:pPr algn="ctr"/>
+            <a:endParaRPr lang="en-US"/>
+          </a:p>
+        </p:txBody>
+      </p:sp>
+      <p:sp>
+        <p:nvSpPr>
+          <p:cNvPr id="52" name="TextBox 51">
+            <a:extLst>
+              <a:ext uri="{FF2B5EF4-FFF2-40B4-BE49-F238E27FC236}">
+                <a16:creationId xmlns:a16="http://schemas.microsoft.com/office/drawing/2014/main" id="{BB952FED-74C4-48FA-4D8B-85AB75B4F29A}"/>
+              </a:ext>
+            </a:extLst>
+          </p:cNvPr>
+          <p:cNvSpPr txBox="1"/>
+          <p:nvPr/>
+        </p:nvSpPr>
+        <p:spPr>
+          <a:xfrm>
+            <a:off x="508000" y="6070600"/>
+            <a:ext cx="2794000" cy="177800"/>
+          </a:xfrm>
+          <a:prstGeom prst="rect">
+            <a:avLst/>
+          </a:prstGeom>
+          <a:noFill/>
+        </p:spPr>
+        <p:txBody>
+          <a:bodyPr vert="horz" wrap="square" lIns="0" tIns="0" rIns="0" bIns="0" rtlCol="0">
+            <a:noAutofit/>
+          </a:bodyPr>
+          <a:lstStyle/>
+          <a:p>
+            <a:r>
+              <a:rPr lang="en-US" sz="900" b="1">
+                <a:solidFill>
+                  <a:srgbClr val="111111"/>
+                </a:solidFill>
+                <a:latin typeface="Times New Roman" panose="02020603050405020304" pitchFamily="18" charset="0"/>
+              </a:rPr>
+              <a:t>emergency_contacts</a:t>
+            </a:r>
+          </a:p>
+        </p:txBody>
+      </p:sp>
+      <p:sp>
+        <p:nvSpPr>
+          <p:cNvPr id="53" name="TextBox 52">
+            <a:extLst>
+              <a:ext uri="{FF2B5EF4-FFF2-40B4-BE49-F238E27FC236}">
+                <a16:creationId xmlns:a16="http://schemas.microsoft.com/office/drawing/2014/main" id="{8AF73961-C637-1D53-6F16-5F50B465404D}"/>
+              </a:ext>
+            </a:extLst>
+          </p:cNvPr>
+          <p:cNvSpPr txBox="1"/>
+          <p:nvPr/>
+        </p:nvSpPr>
+        <p:spPr>
+          <a:xfrm>
+            <a:off x="508000" y="6311900"/>
+            <a:ext cx="2794000" cy="304800"/>
+          </a:xfrm>
+          <a:prstGeom prst="rect">
+            <a:avLst/>
+          </a:prstGeom>
+          <a:noFill/>
+        </p:spPr>
+        <p:txBody>
+          <a:bodyPr vert="horz" wrap="square" lIns="0" tIns="0" rIns="0" bIns="0" rtlCol="0">
+            <a:noAutofit/>
+          </a:bodyPr>
+          <a:lstStyle/>
+          <a:p>
+            <a:r>
+              <a:rPr lang="en-US" sz="800">
+                <a:solidFill>
+                  <a:srgbClr val="111111"/>
+                </a:solidFill>
+                <a:latin typeface="Times New Roman" panose="02020603050405020304" pitchFamily="18" charset="0"/>
+              </a:rPr>
+              <a:t>id PK | user_id FK | type</a:t>
+            </a:r>
+          </a:p>
+        </p:txBody>
+      </p:sp>
+      <p:cxnSp>
+        <p:nvCxnSpPr>
+          <p:cNvPr id="54" name="Straight Arrow Connector 53">
+            <a:extLst>
+              <a:ext uri="{FF2B5EF4-FFF2-40B4-BE49-F238E27FC236}">
+                <a16:creationId xmlns:a16="http://schemas.microsoft.com/office/drawing/2014/main" id="{6B19DF93-FDAF-2776-1290-18FEE3A9CB18}"/>
+              </a:ext>
+            </a:extLst>
+          </p:cNvPr>
+          <p:cNvCxnSpPr/>
+          <p:nvPr/>
+        </p:nvCxnSpPr>
+        <p:spPr>
+          <a:xfrm>
+            <a:off x="3778250" y="6356350"/>
+            <a:ext cx="412750" cy="0"/>
+          </a:xfrm>
+          <a:prstGeom prst="straightConnector1">
+            <a:avLst/>
+          </a:prstGeom>
+          <a:ln w="10160">
+            <a:solidFill>
+              <a:srgbClr val="555555"/>
+            </a:solidFill>
+          </a:ln>
+        </p:spPr>
+        <p:style>
+          <a:lnRef idx="2">
+            <a:schemeClr val="accent1"/>
+          </a:lnRef>
+          <a:fillRef idx="0">
+            <a:schemeClr val="accent1"/>
+          </a:fillRef>
+          <a:effectRef idx="1">
+            <a:schemeClr val="accent1"/>
+          </a:effectRef>
+          <a:fontRef idx="minor">
+            <a:schemeClr val="tx1"/>
+          </a:fontRef>
+        </p:style>
+      </p:cxnSp>
+      <p:sp>
+        <p:nvSpPr>
+          <p:cNvPr id="55" name="TextBox 54">
+            <a:extLst>
+              <a:ext uri="{FF2B5EF4-FFF2-40B4-BE49-F238E27FC236}">
+                <a16:creationId xmlns:a16="http://schemas.microsoft.com/office/drawing/2014/main" id="{4ACB76B3-2284-DF1D-5026-998C910D6279}"/>
+              </a:ext>
+            </a:extLst>
+          </p:cNvPr>
+          <p:cNvSpPr txBox="1"/>
+          <p:nvPr/>
+        </p:nvSpPr>
+        <p:spPr>
+          <a:xfrm>
+            <a:off x="3810000" y="6146800"/>
+            <a:ext cx="355600" cy="165100"/>
+          </a:xfrm>
+          <a:prstGeom prst="rect">
+            <a:avLst/>
+          </a:prstGeom>
+          <a:noFill/>
+        </p:spPr>
+        <p:txBody>
+          <a:bodyPr vert="horz" wrap="square" lIns="0" tIns="0" rIns="0" bIns="0" rtlCol="0">
+            <a:noAutofit/>
+          </a:bodyPr>
+          <a:lstStyle/>
+          <a:p>
+            <a:pPr algn="ctr"/>
+            <a:r>
+              <a:rPr lang="en-US" sz="650">
+                <a:solidFill>
+                  <a:srgbClr val="444444"/>
+                </a:solidFill>
+                <a:latin typeface="Times New Roman" panose="02020603050405020304" pitchFamily="18" charset="0"/>
+              </a:rPr>
+              <a:t>1:N</a:t>
+            </a:r>
+          </a:p>
+        </p:txBody>
+      </p:sp>
+      <p:sp>
+        <p:nvSpPr>
+          <p:cNvPr id="56" name="Rectangle 55">
+            <a:extLst>
+              <a:ext uri="{FF2B5EF4-FFF2-40B4-BE49-F238E27FC236}">
+                <a16:creationId xmlns:a16="http://schemas.microsoft.com/office/drawing/2014/main" id="{43C7F2B8-F795-D926-F899-32480772A354}"/>
+              </a:ext>
+            </a:extLst>
+          </p:cNvPr>
+          <p:cNvSpPr/>
+          <p:nvPr/>
+        </p:nvSpPr>
+        <p:spPr>
+          <a:xfrm>
+            <a:off x="4191000" y="6045200"/>
+            <a:ext cx="2921000" cy="622300"/>
+          </a:xfrm>
+          <a:prstGeom prst="rect">
+            <a:avLst/>
+          </a:prstGeom>
+          <a:solidFill>
+            <a:srgbClr val="FFFFFF"/>
+          </a:solidFill>
+          <a:ln w="10160">
+            <a:solidFill>
+              <a:srgbClr val="333333"/>
+            </a:solidFill>
+          </a:ln>
+        </p:spPr>
+        <p:style>
+          <a:lnRef idx="2">
+            <a:schemeClr val="accent1">
+              <a:shade val="15000"/>
+            </a:schemeClr>
+          </a:lnRef>
+          <a:fillRef idx="1">
+            <a:schemeClr val="accent1"/>
+          </a:fillRef>
+          <a:effectRef idx="0">
+            <a:schemeClr val="accent1"/>
+          </a:effectRef>
+          <a:fontRef idx="minor">
+            <a:schemeClr val="lt1"/>
+          </a:fontRef>
+        </p:style>
+        <p:txBody>
+          <a:bodyPr rtlCol="0" anchor="ctr"/>
+          <a:lstStyle/>
+          <a:p>
+            <a:pPr algn="ctr"/>
+            <a:endParaRPr lang="en-US"/>
+          </a:p>
+        </p:txBody>
+      </p:sp>
+      <p:sp>
+        <p:nvSpPr>
+          <p:cNvPr id="57" name="Rectangle 56">
+            <a:extLst>
+              <a:ext uri="{FF2B5EF4-FFF2-40B4-BE49-F238E27FC236}">
+                <a16:creationId xmlns:a16="http://schemas.microsoft.com/office/drawing/2014/main" id="{8E3EA316-7164-4FCB-49D4-8DD7662969BA}"/>
+              </a:ext>
+            </a:extLst>
+          </p:cNvPr>
+          <p:cNvSpPr/>
+          <p:nvPr/>
+        </p:nvSpPr>
+        <p:spPr>
+          <a:xfrm>
+            <a:off x="4191000" y="6045200"/>
+            <a:ext cx="2921000" cy="228600"/>
+          </a:xfrm>
+          <a:prstGeom prst="rect">
+            <a:avLst/>
+          </a:prstGeom>
+          <a:solidFill>
+            <a:srgbClr val="E9EEF0"/>
+          </a:solidFill>
+          <a:ln w="10160">
+            <a:solidFill>
+              <a:srgbClr val="333333"/>
+            </a:solidFill>
+          </a:ln>
+        </p:spPr>
+        <p:style>
+          <a:lnRef idx="2">
+            <a:schemeClr val="accent1">
+              <a:shade val="15000"/>
+            </a:schemeClr>
+          </a:lnRef>
+          <a:fillRef idx="1">
+            <a:schemeClr val="accent1"/>
+          </a:fillRef>
+          <a:effectRef idx="0">
+            <a:schemeClr val="accent1"/>
+          </a:effectRef>
+          <a:fontRef idx="minor">
+            <a:schemeClr val="lt1"/>
+          </a:fontRef>
+        </p:style>
+        <p:txBody>
+          <a:bodyPr rtlCol="0" anchor="ctr"/>
+          <a:lstStyle/>
+          <a:p>
+            <a:pPr algn="ctr"/>
+            <a:endParaRPr lang="en-US"/>
+          </a:p>
+        </p:txBody>
+      </p:sp>
+      <p:sp>
+        <p:nvSpPr>
+          <p:cNvPr id="58" name="TextBox 57">
+            <a:extLst>
+              <a:ext uri="{FF2B5EF4-FFF2-40B4-BE49-F238E27FC236}">
+                <a16:creationId xmlns:a16="http://schemas.microsoft.com/office/drawing/2014/main" id="{3577A279-EFB0-0B35-8A46-AD288548B5FC}"/>
+              </a:ext>
+            </a:extLst>
+          </p:cNvPr>
+          <p:cNvSpPr txBox="1"/>
+          <p:nvPr/>
+        </p:nvSpPr>
+        <p:spPr>
+          <a:xfrm>
+            <a:off x="4254500" y="6070600"/>
+            <a:ext cx="2794000" cy="177800"/>
+          </a:xfrm>
+          <a:prstGeom prst="rect">
+            <a:avLst/>
+          </a:prstGeom>
+          <a:noFill/>
+        </p:spPr>
+        <p:txBody>
+          <a:bodyPr vert="horz" wrap="square" lIns="0" tIns="0" rIns="0" bIns="0" rtlCol="0">
+            <a:noAutofit/>
+          </a:bodyPr>
+          <a:lstStyle/>
+          <a:p>
+            <a:r>
+              <a:rPr lang="en-US" sz="900" b="1">
+                <a:solidFill>
+                  <a:srgbClr val="111111"/>
+                </a:solidFill>
+                <a:latin typeface="Times New Roman" panose="02020603050405020304" pitchFamily="18" charset="0"/>
+              </a:rPr>
+              <a:t>report_shares</a:t>
+            </a:r>
+          </a:p>
+        </p:txBody>
+      </p:sp>
+      <p:sp>
+        <p:nvSpPr>
+          <p:cNvPr id="59" name="TextBox 58">
+            <a:extLst>
+              <a:ext uri="{FF2B5EF4-FFF2-40B4-BE49-F238E27FC236}">
+                <a16:creationId xmlns:a16="http://schemas.microsoft.com/office/drawing/2014/main" id="{8BB94524-CCBB-3D2D-52E7-3A0DFEE8D038}"/>
+              </a:ext>
+            </a:extLst>
+          </p:cNvPr>
+          <p:cNvSpPr txBox="1"/>
+          <p:nvPr/>
+        </p:nvSpPr>
+        <p:spPr>
+          <a:xfrm>
+            <a:off x="4254500" y="6311900"/>
+            <a:ext cx="2794000" cy="304800"/>
+          </a:xfrm>
+          <a:prstGeom prst="rect">
+            <a:avLst/>
+          </a:prstGeom>
+          <a:noFill/>
+        </p:spPr>
+        <p:txBody>
+          <a:bodyPr vert="horz" wrap="square" lIns="0" tIns="0" rIns="0" bIns="0" rtlCol="0">
+            <a:noAutofit/>
+          </a:bodyPr>
+          <a:lstStyle/>
+          <a:p>
+            <a:r>
+              <a:rPr lang="da-DK" sz="800">
+                <a:solidFill>
+                  <a:srgbClr val="111111"/>
+                </a:solidFill>
+                <a:latin typeface="Times New Roman" panose="02020603050405020304" pitchFamily="18" charset="0"/>
+              </a:rPr>
+              <a:t>id PK | user_id FK | expires_at</a:t>
+            </a:r>
+            <a:endParaRPr lang="en-US" sz="800">
+              <a:solidFill>
+                <a:srgbClr val="111111"/>
+              </a:solidFill>
+              <a:latin typeface="Times New Roman" panose="02020603050405020304" pitchFamily="18" charset="0"/>
+            </a:endParaRPr>
+          </a:p>
+        </p:txBody>
+      </p:sp>
+      <p:cxnSp>
+        <p:nvCxnSpPr>
+          <p:cNvPr id="60" name="Straight Arrow Connector 59">
+            <a:extLst>
+              <a:ext uri="{FF2B5EF4-FFF2-40B4-BE49-F238E27FC236}">
+                <a16:creationId xmlns:a16="http://schemas.microsoft.com/office/drawing/2014/main" id="{225006E7-6C86-1433-851C-B028A3CF495D}"/>
+              </a:ext>
+            </a:extLst>
+          </p:cNvPr>
+          <p:cNvCxnSpPr/>
+          <p:nvPr/>
+        </p:nvCxnSpPr>
+        <p:spPr>
+          <a:xfrm>
+            <a:off x="3365500" y="7092950"/>
+            <a:ext cx="412750" cy="0"/>
+          </a:xfrm>
+          <a:prstGeom prst="straightConnector1">
+            <a:avLst/>
+          </a:prstGeom>
+          <a:ln w="10160">
+            <a:solidFill>
+              <a:srgbClr val="555555"/>
+            </a:solidFill>
+          </a:ln>
+        </p:spPr>
+        <p:style>
+          <a:lnRef idx="2">
+            <a:schemeClr val="accent1"/>
+          </a:lnRef>
+          <a:fillRef idx="0">
+            <a:schemeClr val="accent1"/>
+          </a:fillRef>
+          <a:effectRef idx="1">
+            <a:schemeClr val="accent1"/>
+          </a:effectRef>
+          <a:fontRef idx="minor">
+            <a:schemeClr val="tx1"/>
+          </a:fontRef>
+        </p:style>
+      </p:cxnSp>
+      <p:sp>
+        <p:nvSpPr>
+          <p:cNvPr id="61" name="TextBox 60">
+            <a:extLst>
+              <a:ext uri="{FF2B5EF4-FFF2-40B4-BE49-F238E27FC236}">
+                <a16:creationId xmlns:a16="http://schemas.microsoft.com/office/drawing/2014/main" id="{074BECAF-7FA7-2B06-7D6C-EC026FB87265}"/>
+              </a:ext>
+            </a:extLst>
+          </p:cNvPr>
+          <p:cNvSpPr txBox="1"/>
+          <p:nvPr/>
+        </p:nvSpPr>
+        <p:spPr>
+          <a:xfrm>
+            <a:off x="3390900" y="6883400"/>
+            <a:ext cx="355600" cy="165100"/>
+          </a:xfrm>
+          <a:prstGeom prst="rect">
+            <a:avLst/>
+          </a:prstGeom>
+          <a:noFill/>
+        </p:spPr>
+        <p:txBody>
+          <a:bodyPr vert="horz" wrap="square" lIns="0" tIns="0" rIns="0" bIns="0" rtlCol="0">
+            <a:noAutofit/>
+          </a:bodyPr>
+          <a:lstStyle/>
+          <a:p>
+            <a:pPr algn="ctr"/>
+            <a:r>
+              <a:rPr lang="en-US" sz="650">
+                <a:solidFill>
+                  <a:srgbClr val="444444"/>
+                </a:solidFill>
+                <a:latin typeface="Times New Roman" panose="02020603050405020304" pitchFamily="18" charset="0"/>
+              </a:rPr>
+              <a:t>1:N</a:t>
+            </a:r>
+          </a:p>
+        </p:txBody>
+      </p:sp>
+      <p:sp>
+        <p:nvSpPr>
+          <p:cNvPr id="62" name="Rectangle 61">
+            <a:extLst>
+              <a:ext uri="{FF2B5EF4-FFF2-40B4-BE49-F238E27FC236}">
+                <a16:creationId xmlns:a16="http://schemas.microsoft.com/office/drawing/2014/main" id="{9A7F9296-B624-51D5-37D4-6DB13C66A043}"/>
+              </a:ext>
+            </a:extLst>
+          </p:cNvPr>
+          <p:cNvSpPr/>
+          <p:nvPr/>
+        </p:nvSpPr>
+        <p:spPr>
+          <a:xfrm>
+            <a:off x="444500" y="6781800"/>
+            <a:ext cx="2921000" cy="622300"/>
+          </a:xfrm>
+          <a:prstGeom prst="rect">
+            <a:avLst/>
+          </a:prstGeom>
+          <a:solidFill>
+            <a:srgbClr val="FFFFFF"/>
+          </a:solidFill>
+          <a:ln w="10160">
+            <a:solidFill>
+              <a:srgbClr val="333333"/>
+            </a:solidFill>
+          </a:ln>
+        </p:spPr>
+        <p:style>
+          <a:lnRef idx="2">
+            <a:schemeClr val="accent1">
+              <a:shade val="15000"/>
+            </a:schemeClr>
+          </a:lnRef>
+          <a:fillRef idx="1">
+            <a:schemeClr val="accent1"/>
+          </a:fillRef>
+          <a:effectRef idx="0">
+            <a:schemeClr val="accent1"/>
+          </a:effectRef>
+          <a:fontRef idx="minor">
+            <a:schemeClr val="lt1"/>
+          </a:fontRef>
+        </p:style>
+        <p:txBody>
+          <a:bodyPr rtlCol="0" anchor="ctr"/>
+          <a:lstStyle/>
+          <a:p>
+            <a:pPr algn="ctr"/>
+            <a:endParaRPr lang="en-US"/>
+          </a:p>
+        </p:txBody>
+      </p:sp>
+      <p:sp>
+        <p:nvSpPr>
+          <p:cNvPr id="63" name="Rectangle 62">
+            <a:extLst>
+              <a:ext uri="{FF2B5EF4-FFF2-40B4-BE49-F238E27FC236}">
+                <a16:creationId xmlns:a16="http://schemas.microsoft.com/office/drawing/2014/main" id="{F50243EA-CB7C-13CF-8F41-6E5E61AF9AAE}"/>
+              </a:ext>
+            </a:extLst>
+          </p:cNvPr>
+          <p:cNvSpPr/>
+          <p:nvPr/>
+        </p:nvSpPr>
+        <p:spPr>
+          <a:xfrm>
+            <a:off x="444500" y="6781800"/>
+            <a:ext cx="2921000" cy="228600"/>
+          </a:xfrm>
+          <a:prstGeom prst="rect">
+            <a:avLst/>
+          </a:prstGeom>
+          <a:solidFill>
+            <a:srgbClr val="E9EEF0"/>
+          </a:solidFill>
+          <a:ln w="10160">
+            <a:solidFill>
+              <a:srgbClr val="333333"/>
+            </a:solidFill>
+          </a:ln>
+        </p:spPr>
+        <p:style>
+          <a:lnRef idx="2">
+            <a:schemeClr val="accent1">
+              <a:shade val="15000"/>
+            </a:schemeClr>
+          </a:lnRef>
+          <a:fillRef idx="1">
+            <a:schemeClr val="accent1"/>
+          </a:fillRef>
+          <a:effectRef idx="0">
+            <a:schemeClr val="accent1"/>
+          </a:effectRef>
+          <a:fontRef idx="minor">
+            <a:schemeClr val="lt1"/>
+          </a:fontRef>
+        </p:style>
+        <p:txBody>
+          <a:bodyPr rtlCol="0" anchor="ctr"/>
+          <a:lstStyle/>
+          <a:p>
+            <a:pPr algn="ctr"/>
+            <a:endParaRPr lang="en-US"/>
+          </a:p>
+        </p:txBody>
+      </p:sp>
+      <p:sp>
+        <p:nvSpPr>
+          <p:cNvPr id="64" name="TextBox 63">
+            <a:extLst>
+              <a:ext uri="{FF2B5EF4-FFF2-40B4-BE49-F238E27FC236}">
+                <a16:creationId xmlns:a16="http://schemas.microsoft.com/office/drawing/2014/main" id="{2E4A93BA-F1BE-E130-4B41-77AC21F8B0FE}"/>
+              </a:ext>
+            </a:extLst>
+          </p:cNvPr>
+          <p:cNvSpPr txBox="1"/>
+          <p:nvPr/>
+        </p:nvSpPr>
+        <p:spPr>
+          <a:xfrm>
+            <a:off x="508000" y="6807200"/>
+            <a:ext cx="2794000" cy="177800"/>
+          </a:xfrm>
+          <a:prstGeom prst="rect">
+            <a:avLst/>
+          </a:prstGeom>
+          <a:noFill/>
+        </p:spPr>
+        <p:txBody>
+          <a:bodyPr vert="horz" wrap="square" lIns="0" tIns="0" rIns="0" bIns="0" rtlCol="0">
+            <a:noAutofit/>
+          </a:bodyPr>
+          <a:lstStyle/>
+          <a:p>
+            <a:r>
+              <a:rPr lang="en-US" sz="900" b="1">
+                <a:solidFill>
+                  <a:srgbClr val="111111"/>
+                </a:solidFill>
+                <a:latin typeface="Times New Roman" panose="02020603050405020304" pitchFamily="18" charset="0"/>
+              </a:rPr>
+              <a:t>push_subscriptions</a:t>
+            </a:r>
+          </a:p>
+        </p:txBody>
+      </p:sp>
+      <p:sp>
+        <p:nvSpPr>
+          <p:cNvPr id="65" name="TextBox 64">
+            <a:extLst>
+              <a:ext uri="{FF2B5EF4-FFF2-40B4-BE49-F238E27FC236}">
+                <a16:creationId xmlns:a16="http://schemas.microsoft.com/office/drawing/2014/main" id="{E6A299B9-A2BD-BEA0-F323-229AA7EEC09E}"/>
+              </a:ext>
+            </a:extLst>
+          </p:cNvPr>
+          <p:cNvSpPr txBox="1"/>
+          <p:nvPr/>
+        </p:nvSpPr>
+        <p:spPr>
+          <a:xfrm>
+            <a:off x="508000" y="7048500"/>
+            <a:ext cx="2794000" cy="304800"/>
+          </a:xfrm>
+          <a:prstGeom prst="rect">
+            <a:avLst/>
+          </a:prstGeom>
+          <a:noFill/>
+        </p:spPr>
+        <p:txBody>
+          <a:bodyPr vert="horz" wrap="square" lIns="0" tIns="0" rIns="0" bIns="0" rtlCol="0">
+            <a:noAutofit/>
+          </a:bodyPr>
+          <a:lstStyle/>
+          <a:p>
+            <a:r>
+              <a:rPr lang="en-US" sz="800">
+                <a:solidFill>
+                  <a:srgbClr val="111111"/>
+                </a:solidFill>
+                <a:latin typeface="Times New Roman" panose="02020603050405020304" pitchFamily="18" charset="0"/>
+              </a:rPr>
+              <a:t>id PK | user_id FK | endpoint_hash</a:t>
+            </a:r>
+          </a:p>
+        </p:txBody>
+      </p:sp>
+      <p:cxnSp>
+        <p:nvCxnSpPr>
+          <p:cNvPr id="66" name="Straight Arrow Connector 65">
+            <a:extLst>
+              <a:ext uri="{FF2B5EF4-FFF2-40B4-BE49-F238E27FC236}">
+                <a16:creationId xmlns:a16="http://schemas.microsoft.com/office/drawing/2014/main" id="{73485BD7-1E62-D5C4-9B88-E83E127D467D}"/>
+              </a:ext>
+            </a:extLst>
+          </p:cNvPr>
+          <p:cNvCxnSpPr/>
+          <p:nvPr/>
+        </p:nvCxnSpPr>
+        <p:spPr>
+          <a:xfrm>
+            <a:off x="3778250" y="7092950"/>
+            <a:ext cx="412750" cy="0"/>
+          </a:xfrm>
+          <a:prstGeom prst="straightConnector1">
+            <a:avLst/>
+          </a:prstGeom>
+          <a:ln w="10160">
+            <a:solidFill>
+              <a:srgbClr val="555555"/>
+            </a:solidFill>
+          </a:ln>
+        </p:spPr>
+        <p:style>
+          <a:lnRef idx="2">
+            <a:schemeClr val="accent1"/>
+          </a:lnRef>
+          <a:fillRef idx="0">
+            <a:schemeClr val="accent1"/>
+          </a:fillRef>
+          <a:effectRef idx="1">
+            <a:schemeClr val="accent1"/>
+          </a:effectRef>
+          <a:fontRef idx="minor">
+            <a:schemeClr val="tx1"/>
+          </a:fontRef>
+        </p:style>
+      </p:cxnSp>
+      <p:sp>
+        <p:nvSpPr>
+          <p:cNvPr id="67" name="TextBox 66">
+            <a:extLst>
+              <a:ext uri="{FF2B5EF4-FFF2-40B4-BE49-F238E27FC236}">
+                <a16:creationId xmlns:a16="http://schemas.microsoft.com/office/drawing/2014/main" id="{6BCBAA63-A34B-B85E-E716-E8B893CE642D}"/>
+              </a:ext>
+            </a:extLst>
+          </p:cNvPr>
+          <p:cNvSpPr txBox="1"/>
+          <p:nvPr/>
+        </p:nvSpPr>
+        <p:spPr>
+          <a:xfrm>
+            <a:off x="3810000" y="6883400"/>
+            <a:ext cx="355600" cy="165100"/>
+          </a:xfrm>
+          <a:prstGeom prst="rect">
+            <a:avLst/>
+          </a:prstGeom>
+          <a:noFill/>
+        </p:spPr>
+        <p:txBody>
+          <a:bodyPr vert="horz" wrap="square" lIns="0" tIns="0" rIns="0" bIns="0" rtlCol="0">
+            <a:noAutofit/>
+          </a:bodyPr>
+          <a:lstStyle/>
+          <a:p>
+            <a:pPr algn="ctr"/>
+            <a:r>
+              <a:rPr lang="en-US" sz="650">
+                <a:solidFill>
+                  <a:srgbClr val="444444"/>
+                </a:solidFill>
+                <a:latin typeface="Times New Roman" panose="02020603050405020304" pitchFamily="18" charset="0"/>
+              </a:rPr>
+              <a:t>1:N</a:t>
+            </a:r>
+          </a:p>
+        </p:txBody>
+      </p:sp>
+      <p:sp>
+        <p:nvSpPr>
+          <p:cNvPr id="68" name="Rectangle 67">
+            <a:extLst>
+              <a:ext uri="{FF2B5EF4-FFF2-40B4-BE49-F238E27FC236}">
+                <a16:creationId xmlns:a16="http://schemas.microsoft.com/office/drawing/2014/main" id="{465AB206-C012-7CD4-01F8-65CC17B4DE03}"/>
+              </a:ext>
+            </a:extLst>
+          </p:cNvPr>
+          <p:cNvSpPr/>
+          <p:nvPr/>
+        </p:nvSpPr>
+        <p:spPr>
+          <a:xfrm>
+            <a:off x="4191000" y="6781800"/>
+            <a:ext cx="2921000" cy="622300"/>
+          </a:xfrm>
+          <a:prstGeom prst="rect">
+            <a:avLst/>
+          </a:prstGeom>
+          <a:solidFill>
+            <a:srgbClr val="FFFFFF"/>
+          </a:solidFill>
+          <a:ln w="10160">
+            <a:solidFill>
+              <a:srgbClr val="333333"/>
+            </a:solidFill>
+          </a:ln>
+        </p:spPr>
+        <p:style>
+          <a:lnRef idx="2">
+            <a:schemeClr val="accent1">
+              <a:shade val="15000"/>
+            </a:schemeClr>
+          </a:lnRef>
+          <a:fillRef idx="1">
+            <a:schemeClr val="accent1"/>
+          </a:fillRef>
+          <a:effectRef idx="0">
+            <a:schemeClr val="accent1"/>
+          </a:effectRef>
+          <a:fontRef idx="minor">
+            <a:schemeClr val="lt1"/>
+          </a:fontRef>
+        </p:style>
+        <p:txBody>
+          <a:bodyPr rtlCol="0" anchor="ctr"/>
+          <a:lstStyle/>
+          <a:p>
+            <a:pPr algn="ctr"/>
+            <a:endParaRPr lang="en-US"/>
+          </a:p>
+        </p:txBody>
+      </p:sp>
+      <p:sp>
+        <p:nvSpPr>
+          <p:cNvPr id="69" name="Rectangle 68">
+            <a:extLst>
+              <a:ext uri="{FF2B5EF4-FFF2-40B4-BE49-F238E27FC236}">
+                <a16:creationId xmlns:a16="http://schemas.microsoft.com/office/drawing/2014/main" id="{DB5D146E-6ECB-77F0-080A-840C8B120176}"/>
+              </a:ext>
+            </a:extLst>
+          </p:cNvPr>
+          <p:cNvSpPr/>
+          <p:nvPr/>
+        </p:nvSpPr>
+        <p:spPr>
+          <a:xfrm>
+            <a:off x="4191000" y="6781800"/>
+            <a:ext cx="2921000" cy="228600"/>
+          </a:xfrm>
+          <a:prstGeom prst="rect">
+            <a:avLst/>
+          </a:prstGeom>
+          <a:solidFill>
+            <a:srgbClr val="E9EEF0"/>
+          </a:solidFill>
+          <a:ln w="10160">
+            <a:solidFill>
+              <a:srgbClr val="333333"/>
+            </a:solidFill>
+          </a:ln>
+        </p:spPr>
+        <p:style>
+          <a:lnRef idx="2">
+            <a:schemeClr val="accent1">
+              <a:shade val="15000"/>
+            </a:schemeClr>
+          </a:lnRef>
+          <a:fillRef idx="1">
+            <a:schemeClr val="accent1"/>
+          </a:fillRef>
+          <a:effectRef idx="0">
+            <a:schemeClr val="accent1"/>
+          </a:effectRef>
+          <a:fontRef idx="minor">
+            <a:schemeClr val="lt1"/>
+          </a:fontRef>
+        </p:style>
+        <p:txBody>
+          <a:bodyPr rtlCol="0" anchor="ctr"/>
+          <a:lstStyle/>
+          <a:p>
+            <a:pPr algn="ctr"/>
+            <a:endParaRPr lang="en-US"/>
+          </a:p>
+        </p:txBody>
+      </p:sp>
+      <p:sp>
+        <p:nvSpPr>
+          <p:cNvPr id="70" name="TextBox 69">
+            <a:extLst>
+              <a:ext uri="{FF2B5EF4-FFF2-40B4-BE49-F238E27FC236}">
+                <a16:creationId xmlns:a16="http://schemas.microsoft.com/office/drawing/2014/main" id="{9E418B6E-2084-C42C-C535-4160B15E2756}"/>
+              </a:ext>
+            </a:extLst>
+          </p:cNvPr>
+          <p:cNvSpPr txBox="1"/>
+          <p:nvPr/>
+        </p:nvSpPr>
+        <p:spPr>
+          <a:xfrm>
+            <a:off x="4254500" y="6807200"/>
+            <a:ext cx="2794000" cy="177800"/>
+          </a:xfrm>
+          <a:prstGeom prst="rect">
+            <a:avLst/>
+          </a:prstGeom>
+          <a:noFill/>
+        </p:spPr>
+        <p:txBody>
+          <a:bodyPr vert="horz" wrap="square" lIns="0" tIns="0" rIns="0" bIns="0" rtlCol="0">
+            <a:noAutofit/>
+          </a:bodyPr>
+          <a:lstStyle/>
+          <a:p>
+            <a:r>
+              <a:rPr lang="en-US" sz="900" b="1">
+                <a:solidFill>
+                  <a:srgbClr val="111111"/>
+                </a:solidFill>
+                <a:latin typeface="Times New Roman" panose="02020603050405020304" pitchFamily="18" charset="0"/>
+              </a:rPr>
+              <a:t>push_reminders</a:t>
+            </a:r>
+          </a:p>
+        </p:txBody>
+      </p:sp>
+      <p:sp>
+        <p:nvSpPr>
+          <p:cNvPr id="71" name="TextBox 70">
+            <a:extLst>
+              <a:ext uri="{FF2B5EF4-FFF2-40B4-BE49-F238E27FC236}">
+                <a16:creationId xmlns:a16="http://schemas.microsoft.com/office/drawing/2014/main" id="{22B2036B-3BD7-9540-FCDF-E5E3ED5E7EAC}"/>
+              </a:ext>
+            </a:extLst>
+          </p:cNvPr>
+          <p:cNvSpPr txBox="1"/>
+          <p:nvPr/>
+        </p:nvSpPr>
+        <p:spPr>
+          <a:xfrm>
+            <a:off x="4254500" y="7048500"/>
+            <a:ext cx="2794000" cy="304800"/>
+          </a:xfrm>
+          <a:prstGeom prst="rect">
+            <a:avLst/>
+          </a:prstGeom>
+          <a:noFill/>
+        </p:spPr>
+        <p:txBody>
+          <a:bodyPr vert="horz" wrap="square" lIns="0" tIns="0" rIns="0" bIns="0" rtlCol="0">
+            <a:noAutofit/>
+          </a:bodyPr>
+          <a:lstStyle/>
+          <a:p>
+            <a:r>
+              <a:rPr lang="en-US" sz="800">
+                <a:solidFill>
+                  <a:srgbClr val="111111"/>
+                </a:solidFill>
+                <a:latin typeface="Times New Roman" panose="02020603050405020304" pitchFamily="18" charset="0"/>
+              </a:rPr>
+              <a:t>id PK | user_id FK | scheduled_at</a:t>
+            </a:r>
+          </a:p>
+        </p:txBody>
+      </p:sp>
+      <p:cxnSp>
+        <p:nvCxnSpPr>
+          <p:cNvPr id="72" name="Straight Arrow Connector 71">
+            <a:extLst>
+              <a:ext uri="{FF2B5EF4-FFF2-40B4-BE49-F238E27FC236}">
+                <a16:creationId xmlns:a16="http://schemas.microsoft.com/office/drawing/2014/main" id="{CC9B55AD-12E2-16CD-7D76-FCF3873B126B}"/>
+              </a:ext>
+            </a:extLst>
+          </p:cNvPr>
+          <p:cNvCxnSpPr/>
+          <p:nvPr/>
+        </p:nvCxnSpPr>
+        <p:spPr>
+          <a:xfrm>
+            <a:off x="3365500" y="7829550"/>
+            <a:ext cx="412750" cy="0"/>
+          </a:xfrm>
+          <a:prstGeom prst="straightConnector1">
+            <a:avLst/>
+          </a:prstGeom>
+          <a:ln w="10160">
+            <a:solidFill>
+              <a:srgbClr val="555555"/>
+            </a:solidFill>
+          </a:ln>
+        </p:spPr>
+        <p:style>
+          <a:lnRef idx="2">
+            <a:schemeClr val="accent1"/>
+          </a:lnRef>
+          <a:fillRef idx="0">
+            <a:schemeClr val="accent1"/>
+          </a:fillRef>
+          <a:effectRef idx="1">
+            <a:schemeClr val="accent1"/>
+          </a:effectRef>
+          <a:fontRef idx="minor">
+            <a:schemeClr val="tx1"/>
+          </a:fontRef>
+        </p:style>
+      </p:cxnSp>
+      <p:sp>
+        <p:nvSpPr>
+          <p:cNvPr id="73" name="TextBox 72">
+            <a:extLst>
+              <a:ext uri="{FF2B5EF4-FFF2-40B4-BE49-F238E27FC236}">
+                <a16:creationId xmlns:a16="http://schemas.microsoft.com/office/drawing/2014/main" id="{2E7344B7-1126-5DFD-D559-CADF34349BD0}"/>
+              </a:ext>
+            </a:extLst>
+          </p:cNvPr>
+          <p:cNvSpPr txBox="1"/>
+          <p:nvPr/>
+        </p:nvSpPr>
+        <p:spPr>
+          <a:xfrm>
+            <a:off x="3390900" y="7620000"/>
+            <a:ext cx="355600" cy="165100"/>
+          </a:xfrm>
+          <a:prstGeom prst="rect">
+            <a:avLst/>
+          </a:prstGeom>
+          <a:noFill/>
+        </p:spPr>
+        <p:txBody>
+          <a:bodyPr vert="horz" wrap="square" lIns="0" tIns="0" rIns="0" bIns="0" rtlCol="0">
+            <a:noAutofit/>
+          </a:bodyPr>
+          <a:lstStyle/>
+          <a:p>
+            <a:pPr algn="ctr"/>
+            <a:r>
+              <a:rPr lang="en-US" sz="650">
+                <a:solidFill>
+                  <a:srgbClr val="444444"/>
+                </a:solidFill>
+                <a:latin typeface="Times New Roman" panose="02020603050405020304" pitchFamily="18" charset="0"/>
+              </a:rPr>
+              <a:t>1:N*</a:t>
+            </a:r>
+          </a:p>
+        </p:txBody>
+      </p:sp>
+      <p:sp>
+        <p:nvSpPr>
+          <p:cNvPr id="74" name="Rectangle 73">
+            <a:extLst>
+              <a:ext uri="{FF2B5EF4-FFF2-40B4-BE49-F238E27FC236}">
+                <a16:creationId xmlns:a16="http://schemas.microsoft.com/office/drawing/2014/main" id="{A6FA6897-5F45-F089-1697-F80C2909AED0}"/>
+              </a:ext>
+            </a:extLst>
+          </p:cNvPr>
+          <p:cNvSpPr/>
+          <p:nvPr/>
+        </p:nvSpPr>
+        <p:spPr>
+          <a:xfrm>
+            <a:off x="444500" y="7518400"/>
+            <a:ext cx="2921000" cy="622300"/>
+          </a:xfrm>
+          <a:prstGeom prst="rect">
+            <a:avLst/>
+          </a:prstGeom>
+          <a:solidFill>
+            <a:srgbClr val="FFFFFF"/>
+          </a:solidFill>
+          <a:ln w="10160">
+            <a:solidFill>
+              <a:srgbClr val="333333"/>
+            </a:solidFill>
+          </a:ln>
+        </p:spPr>
+        <p:style>
+          <a:lnRef idx="2">
+            <a:schemeClr val="accent1">
+              <a:shade val="15000"/>
+            </a:schemeClr>
+          </a:lnRef>
+          <a:fillRef idx="1">
+            <a:schemeClr val="accent1"/>
+          </a:fillRef>
+          <a:effectRef idx="0">
+            <a:schemeClr val="accent1"/>
+          </a:effectRef>
+          <a:fontRef idx="minor">
+            <a:schemeClr val="lt1"/>
+          </a:fontRef>
+        </p:style>
+        <p:txBody>
+          <a:bodyPr rtlCol="0" anchor="ctr"/>
+          <a:lstStyle/>
+          <a:p>
+            <a:pPr algn="ctr"/>
+            <a:endParaRPr lang="en-US"/>
+          </a:p>
+        </p:txBody>
+      </p:sp>
+      <p:sp>
+        <p:nvSpPr>
+          <p:cNvPr id="75" name="Rectangle 74">
+            <a:extLst>
+              <a:ext uri="{FF2B5EF4-FFF2-40B4-BE49-F238E27FC236}">
+                <a16:creationId xmlns:a16="http://schemas.microsoft.com/office/drawing/2014/main" id="{090DCA83-10A6-91F5-0D57-8132C453C6C3}"/>
+              </a:ext>
+            </a:extLst>
+          </p:cNvPr>
+          <p:cNvSpPr/>
+          <p:nvPr/>
+        </p:nvSpPr>
+        <p:spPr>
+          <a:xfrm>
+            <a:off x="444500" y="7518400"/>
+            <a:ext cx="2921000" cy="228600"/>
+          </a:xfrm>
+          <a:prstGeom prst="rect">
+            <a:avLst/>
+          </a:prstGeom>
+          <a:solidFill>
+            <a:srgbClr val="E9EEF0"/>
+          </a:solidFill>
+          <a:ln w="10160">
+            <a:solidFill>
+              <a:srgbClr val="333333"/>
+            </a:solidFill>
+          </a:ln>
+        </p:spPr>
+        <p:style>
+          <a:lnRef idx="2">
+            <a:schemeClr val="accent1">
+              <a:shade val="15000"/>
+            </a:schemeClr>
+          </a:lnRef>
+          <a:fillRef idx="1">
+            <a:schemeClr val="accent1"/>
+          </a:fillRef>
+          <a:effectRef idx="0">
+            <a:schemeClr val="accent1"/>
+          </a:effectRef>
+          <a:fontRef idx="minor">
+            <a:schemeClr val="lt1"/>
+          </a:fontRef>
+        </p:style>
+        <p:txBody>
+          <a:bodyPr rtlCol="0" anchor="ctr"/>
+          <a:lstStyle/>
+          <a:p>
+            <a:pPr algn="ctr"/>
+            <a:endParaRPr lang="en-US"/>
+          </a:p>
+        </p:txBody>
+      </p:sp>
+      <p:sp>
+        <p:nvSpPr>
+          <p:cNvPr id="76" name="TextBox 75">
+            <a:extLst>
+              <a:ext uri="{FF2B5EF4-FFF2-40B4-BE49-F238E27FC236}">
+                <a16:creationId xmlns:a16="http://schemas.microsoft.com/office/drawing/2014/main" id="{F064C18B-B785-8CE6-4DE8-83A6B98296FF}"/>
+              </a:ext>
+            </a:extLst>
+          </p:cNvPr>
+          <p:cNvSpPr txBox="1"/>
+          <p:nvPr/>
+        </p:nvSpPr>
+        <p:spPr>
+          <a:xfrm>
+            <a:off x="508000" y="7543800"/>
+            <a:ext cx="2794000" cy="177800"/>
+          </a:xfrm>
+          <a:prstGeom prst="rect">
+            <a:avLst/>
+          </a:prstGeom>
+          <a:noFill/>
+        </p:spPr>
+        <p:txBody>
+          <a:bodyPr vert="horz" wrap="square" lIns="0" tIns="0" rIns="0" bIns="0" rtlCol="0">
+            <a:noAutofit/>
+          </a:bodyPr>
+          <a:lstStyle/>
+          <a:p>
+            <a:r>
+              <a:rPr lang="en-US" sz="900" b="1">
+                <a:solidFill>
+                  <a:srgbClr val="111111"/>
+                </a:solidFill>
+                <a:latin typeface="Times New Roman" panose="02020603050405020304" pitchFamily="18" charset="0"/>
+              </a:rPr>
+              <a:t>appointment_questions</a:t>
+            </a:r>
+          </a:p>
+        </p:txBody>
+      </p:sp>
+      <p:sp>
+        <p:nvSpPr>
+          <p:cNvPr id="77" name="TextBox 76">
+            <a:extLst>
+              <a:ext uri="{FF2B5EF4-FFF2-40B4-BE49-F238E27FC236}">
+                <a16:creationId xmlns:a16="http://schemas.microsoft.com/office/drawing/2014/main" id="{CE17B8DD-B7C0-CB48-56F7-C5D2C7BFAA37}"/>
+              </a:ext>
+            </a:extLst>
+          </p:cNvPr>
+          <p:cNvSpPr txBox="1"/>
+          <p:nvPr/>
+        </p:nvSpPr>
+        <p:spPr>
+          <a:xfrm>
+            <a:off x="508000" y="7785100"/>
+            <a:ext cx="2794000" cy="304800"/>
+          </a:xfrm>
+          <a:prstGeom prst="rect">
+            <a:avLst/>
+          </a:prstGeom>
+          <a:noFill/>
+        </p:spPr>
+        <p:txBody>
+          <a:bodyPr vert="horz" wrap="square" lIns="0" tIns="0" rIns="0" bIns="0" rtlCol="0">
+            <a:noAutofit/>
+          </a:bodyPr>
+          <a:lstStyle/>
+          <a:p>
+            <a:r>
+              <a:rPr lang="en-US" sz="800">
+                <a:solidFill>
+                  <a:srgbClr val="111111"/>
+                </a:solidFill>
+                <a:latin typeface="Times New Roman" panose="02020603050405020304" pitchFamily="18" charset="0"/>
+              </a:rPr>
+              <a:t>id PK | appointment_id FK</a:t>
+            </a:r>
+          </a:p>
+        </p:txBody>
+      </p:sp>
+      <p:cxnSp>
+        <p:nvCxnSpPr>
+          <p:cNvPr id="78" name="Straight Arrow Connector 77">
+            <a:extLst>
+              <a:ext uri="{FF2B5EF4-FFF2-40B4-BE49-F238E27FC236}">
+                <a16:creationId xmlns:a16="http://schemas.microsoft.com/office/drawing/2014/main" id="{00239D8B-923F-FF6B-2BBF-DBFF725C4133}"/>
+              </a:ext>
+            </a:extLst>
+          </p:cNvPr>
+          <p:cNvCxnSpPr/>
+          <p:nvPr/>
+        </p:nvCxnSpPr>
+        <p:spPr>
+          <a:xfrm>
+            <a:off x="3778250" y="7829550"/>
+            <a:ext cx="412750" cy="0"/>
+          </a:xfrm>
+          <a:prstGeom prst="straightConnector1">
+            <a:avLst/>
+          </a:prstGeom>
+          <a:ln w="10160">
+            <a:solidFill>
+              <a:srgbClr val="555555"/>
+            </a:solidFill>
+          </a:ln>
+        </p:spPr>
+        <p:style>
+          <a:lnRef idx="2">
+            <a:schemeClr val="accent1"/>
+          </a:lnRef>
+          <a:fillRef idx="0">
+            <a:schemeClr val="accent1"/>
+          </a:fillRef>
+          <a:effectRef idx="1">
+            <a:schemeClr val="accent1"/>
+          </a:effectRef>
+          <a:fontRef idx="minor">
+            <a:schemeClr val="tx1"/>
+          </a:fontRef>
+        </p:style>
+      </p:cxnSp>
+      <p:sp>
+        <p:nvSpPr>
+          <p:cNvPr id="79" name="TextBox 78">
+            <a:extLst>
+              <a:ext uri="{FF2B5EF4-FFF2-40B4-BE49-F238E27FC236}">
+                <a16:creationId xmlns:a16="http://schemas.microsoft.com/office/drawing/2014/main" id="{06EDA594-98BB-C6F0-9638-0867D47992AC}"/>
+              </a:ext>
+            </a:extLst>
+          </p:cNvPr>
+          <p:cNvSpPr txBox="1"/>
+          <p:nvPr/>
+        </p:nvSpPr>
+        <p:spPr>
+          <a:xfrm>
+            <a:off x="3810000" y="7620000"/>
+            <a:ext cx="355600" cy="165100"/>
+          </a:xfrm>
+          <a:prstGeom prst="rect">
+            <a:avLst/>
+          </a:prstGeom>
+          <a:noFill/>
+        </p:spPr>
+        <p:txBody>
+          <a:bodyPr vert="horz" wrap="square" lIns="0" tIns="0" rIns="0" bIns="0" rtlCol="0">
+            <a:noAutofit/>
+          </a:bodyPr>
+          <a:lstStyle/>
+          <a:p>
+            <a:pPr algn="ctr"/>
+            <a:r>
+              <a:rPr lang="en-US" sz="650">
+                <a:solidFill>
+                  <a:srgbClr val="444444"/>
+                </a:solidFill>
+                <a:latin typeface="Times New Roman" panose="02020603050405020304" pitchFamily="18" charset="0"/>
+              </a:rPr>
+              <a:t>shared</a:t>
+            </a:r>
+          </a:p>
+        </p:txBody>
+      </p:sp>
+      <p:sp>
+        <p:nvSpPr>
+          <p:cNvPr id="80" name="Rectangle 79">
+            <a:extLst>
+              <a:ext uri="{FF2B5EF4-FFF2-40B4-BE49-F238E27FC236}">
+                <a16:creationId xmlns:a16="http://schemas.microsoft.com/office/drawing/2014/main" id="{13DEC84A-EBE1-805B-CEE9-CAD4F40AF1FA}"/>
+              </a:ext>
+            </a:extLst>
+          </p:cNvPr>
+          <p:cNvSpPr/>
+          <p:nvPr/>
+        </p:nvSpPr>
+        <p:spPr>
+          <a:xfrm>
+            <a:off x="4191000" y="7518400"/>
+            <a:ext cx="2921000" cy="622300"/>
+          </a:xfrm>
+          <a:prstGeom prst="rect">
+            <a:avLst/>
+          </a:prstGeom>
+          <a:solidFill>
+            <a:srgbClr val="FFFFFF"/>
+          </a:solidFill>
+          <a:ln w="10160">
+            <a:solidFill>
+              <a:srgbClr val="333333"/>
+            </a:solidFill>
+          </a:ln>
+        </p:spPr>
+        <p:style>
+          <a:lnRef idx="2">
+            <a:schemeClr val="accent1">
+              <a:shade val="15000"/>
+            </a:schemeClr>
+          </a:lnRef>
+          <a:fillRef idx="1">
+            <a:schemeClr val="accent1"/>
+          </a:fillRef>
+          <a:effectRef idx="0">
+            <a:schemeClr val="accent1"/>
+          </a:effectRef>
+          <a:fontRef idx="minor">
+            <a:schemeClr val="lt1"/>
+          </a:fontRef>
+        </p:style>
+        <p:txBody>
+          <a:bodyPr rtlCol="0" anchor="ctr"/>
+          <a:lstStyle/>
+          <a:p>
+            <a:pPr algn="ctr"/>
+            <a:endParaRPr lang="en-US"/>
+          </a:p>
+        </p:txBody>
+      </p:sp>
+      <p:sp>
+        <p:nvSpPr>
+          <p:cNvPr id="81" name="Rectangle 80">
+            <a:extLst>
+              <a:ext uri="{FF2B5EF4-FFF2-40B4-BE49-F238E27FC236}">
+                <a16:creationId xmlns:a16="http://schemas.microsoft.com/office/drawing/2014/main" id="{CABB6C5D-E372-2D95-2642-86DDB6CE6750}"/>
+              </a:ext>
+            </a:extLst>
+          </p:cNvPr>
+          <p:cNvSpPr/>
+          <p:nvPr/>
+        </p:nvSpPr>
+        <p:spPr>
+          <a:xfrm>
+            <a:off x="4191000" y="7518400"/>
+            <a:ext cx="2921000" cy="228600"/>
+          </a:xfrm>
+          <a:prstGeom prst="rect">
+            <a:avLst/>
+          </a:prstGeom>
+          <a:solidFill>
+            <a:srgbClr val="E9EEF0"/>
+          </a:solidFill>
+          <a:ln w="10160">
+            <a:solidFill>
+              <a:srgbClr val="333333"/>
+            </a:solidFill>
+          </a:ln>
+        </p:spPr>
+        <p:style>
+          <a:lnRef idx="2">
+            <a:schemeClr val="accent1">
+              <a:shade val="15000"/>
+            </a:schemeClr>
+          </a:lnRef>
+          <a:fillRef idx="1">
+            <a:schemeClr val="accent1"/>
+          </a:fillRef>
+          <a:effectRef idx="0">
+            <a:schemeClr val="accent1"/>
+          </a:effectRef>
+          <a:fontRef idx="minor">
+            <a:schemeClr val="lt1"/>
+          </a:fontRef>
+        </p:style>
+        <p:txBody>
+          <a:bodyPr rtlCol="0" anchor="ctr"/>
+          <a:lstStyle/>
+          <a:p>
+            <a:pPr algn="ctr"/>
+            <a:endParaRPr lang="en-US"/>
+          </a:p>
+        </p:txBody>
+      </p:sp>
+      <p:sp>
+        <p:nvSpPr>
+          <p:cNvPr id="82" name="TextBox 81">
+            <a:extLst>
+              <a:ext uri="{FF2B5EF4-FFF2-40B4-BE49-F238E27FC236}">
+                <a16:creationId xmlns:a16="http://schemas.microsoft.com/office/drawing/2014/main" id="{854BD513-225C-ABA7-3251-9F2C345C9623}"/>
+              </a:ext>
+            </a:extLst>
+          </p:cNvPr>
+          <p:cNvSpPr txBox="1"/>
+          <p:nvPr/>
+        </p:nvSpPr>
+        <p:spPr>
+          <a:xfrm>
+            <a:off x="4254500" y="7543800"/>
+            <a:ext cx="2794000" cy="177800"/>
+          </a:xfrm>
+          <a:prstGeom prst="rect">
+            <a:avLst/>
+          </a:prstGeom>
+          <a:noFill/>
+        </p:spPr>
+        <p:txBody>
+          <a:bodyPr vert="horz" wrap="square" lIns="0" tIns="0" rIns="0" bIns="0" rtlCol="0">
+            <a:noAutofit/>
+          </a:bodyPr>
+          <a:lstStyle/>
+          <a:p>
+            <a:r>
+              <a:rPr lang="en-US" sz="900" b="1">
+                <a:solidFill>
+                  <a:srgbClr val="111111"/>
+                </a:solidFill>
+                <a:latin typeface="Times New Roman" panose="02020603050405020304" pitchFamily="18" charset="0"/>
+              </a:rPr>
+              <a:t>task_details</a:t>
+            </a:r>
+          </a:p>
+        </p:txBody>
+      </p:sp>
+      <p:sp>
+        <p:nvSpPr>
+          <p:cNvPr id="83" name="TextBox 82">
+            <a:extLst>
+              <a:ext uri="{FF2B5EF4-FFF2-40B4-BE49-F238E27FC236}">
+                <a16:creationId xmlns:a16="http://schemas.microsoft.com/office/drawing/2014/main" id="{DDA65647-8D73-3160-C391-361503255A43}"/>
+              </a:ext>
+            </a:extLst>
+          </p:cNvPr>
+          <p:cNvSpPr txBox="1"/>
+          <p:nvPr/>
+        </p:nvSpPr>
+        <p:spPr>
+          <a:xfrm>
+            <a:off x="4254500" y="7785100"/>
+            <a:ext cx="2794000" cy="304800"/>
+          </a:xfrm>
+          <a:prstGeom prst="rect">
+            <a:avLst/>
+          </a:prstGeom>
+          <a:noFill/>
+        </p:spPr>
+        <p:txBody>
+          <a:bodyPr vert="horz" wrap="square" lIns="0" tIns="0" rIns="0" bIns="0" rtlCol="0">
+            <a:noAutofit/>
+          </a:bodyPr>
+          <a:lstStyle/>
+          <a:p>
+            <a:r>
+              <a:rPr lang="en-US" sz="800">
+                <a:solidFill>
+                  <a:srgbClr val="111111"/>
+                </a:solidFill>
+                <a:latin typeface="Times New Roman" panose="02020603050405020304" pitchFamily="18" charset="0"/>
+              </a:rPr>
+              <a:t>id PK | title | is_shared</a:t>
+            </a:r>
+          </a:p>
+        </p:txBody>
+      </p:sp>
+      <p:sp>
+        <p:nvSpPr>
+          <p:cNvPr id="84" name="TextBox 83">
+            <a:extLst>
+              <a:ext uri="{FF2B5EF4-FFF2-40B4-BE49-F238E27FC236}">
+                <a16:creationId xmlns:a16="http://schemas.microsoft.com/office/drawing/2014/main" id="{F0ADD1AB-1F46-8A9A-20A7-40AD72AD7B63}"/>
+              </a:ext>
+            </a:extLst>
+          </p:cNvPr>
+          <p:cNvSpPr txBox="1"/>
+          <p:nvPr/>
+        </p:nvSpPr>
+        <p:spPr>
+          <a:xfrm>
+            <a:off x="533400" y="8483600"/>
+            <a:ext cx="6477000" cy="736600"/>
+          </a:xfrm>
+          <a:prstGeom prst="rect">
+            <a:avLst/>
+          </a:prstGeom>
+          <a:noFill/>
+        </p:spPr>
+        <p:txBody>
+          <a:bodyPr vert="horz" wrap="square" lIns="0" tIns="0" rIns="0" bIns="0" rtlCol="0">
+            <a:noAutofit/>
+          </a:bodyPr>
+          <a:lstStyle/>
+          <a:p>
+            <a:r>
+              <a:rPr lang="en-US" sz="900">
+                <a:solidFill>
+                  <a:srgbClr val="222222"/>
+                </a:solidFill>
+                <a:latin typeface="Times New Roman" panose="02020603050405020304" pitchFamily="18" charset="0"/>
+              </a:rPr>
+              <a:t>Relationships: one user has one pregnancy profile and may have many appointments, tasks, daily records, symptoms, milestones, report shares, push subscriptions, and reminders. Appointment questions reference appointments; care tasks reference shared task details.</a:t>
             </a:r>
           </a:p>
         </p:txBody>
@@ -4762,7 +8080,7 @@
     </p:spTree>
     <p:extLst>
       <p:ext uri="{BB962C8B-B14F-4D97-AF65-F5344CB8AC3E}">
-        <p14:creationId xmlns:p14="http://schemas.microsoft.com/office/powerpoint/2010/main" val="170901648"/>
+        <p14:creationId xmlns:p14="http://schemas.microsoft.com/office/powerpoint/2010/main" val="1217788721"/>
       </p:ext>
     </p:extLst>
   </p:cSld>
